--- a/04-hands-on-lab.pptx
+++ b/04-hands-on-lab.pptx
@@ -17,6 +17,7 @@
     <p:sldId id="265" r:id="rId16"/>
     <p:sldId id="266" r:id="rId17"/>
     <p:sldId id="267" r:id="rId18"/>
+    <p:sldId id="268" r:id="rId19"/>
   </p:sldIdLst>
   <p:sldSz cx="9144000" cy="5143500" type="screen4x3"/>
   <p:notesSz cx="6858000" cy="9144000"/>
@@ -3531,7 +3532,7 @@
                 </a:solidFill>
                 <a:latin typeface="Calibri"/>
               </a:rPr>
-              <a:t>03 · ①②   L A B   1   ·   S T E P S   1 - 2</a:t>
+              <a:t>03   L A B   1   ·   換   J S O N</a:t>
             </a:r>
           </a:p>
         </p:txBody>
@@ -3566,7 +3567,7 @@
                 </a:solidFill>
                 <a:latin typeface="Arial Black"/>
               </a:rPr>
-              <a:t>Step 1–2:觀察 → 換 JSON</a:t>
+              <a:t>Lab 1 — 換 JSON 做你領域的助理</a:t>
             </a:r>
           </a:p>
         </p:txBody>
@@ -3601,7 +3602,7 @@
                 </a:solidFill>
                 <a:latin typeface="Calibri"/>
               </a:rPr>
-              <a:t>還沒動到 Python 一個字</a:t>
+              <a:t>0 行 Python · 40 分鐘 · 現場必做</a:t>
             </a:r>
           </a:p>
         </p:txBody>
@@ -3614,8 +3615,8 @@
         </p:nvSpPr>
         <p:spPr>
           <a:xfrm>
-            <a:off x="582930" y="1851660"/>
-            <a:ext cx="4080510" cy="2743200"/>
+            <a:off x="582930" y="1954530"/>
+            <a:ext cx="2023110" cy="2400300"/>
           </a:xfrm>
           <a:prstGeom prst="roundRect">
             <a:avLst>
@@ -3656,14 +3657,95 @@
       </p:sp>
       <p:sp>
         <p:nvSpPr>
-          <p:cNvPr id="8" name="TextBox 7"/>
-          <p:cNvSpPr txBox="1"/>
-          <p:nvPr/>
-        </p:nvSpPr>
-        <p:spPr>
-          <a:xfrm>
-            <a:off x="754380" y="1975104"/>
-            <a:ext cx="3737610" cy="377190"/>
+          <p:cNvPr id="8" name="Oval 7"/>
+          <p:cNvSpPr/>
+          <p:nvPr/>
+        </p:nvSpPr>
+        <p:spPr>
+          <a:xfrm>
+            <a:off x="706374" y="2009394"/>
+            <a:ext cx="438912" cy="438912"/>
+          </a:xfrm>
+          <a:prstGeom prst="ellipse">
+            <a:avLst/>
+          </a:prstGeom>
+          <a:solidFill>
+            <a:srgbClr val="FFFFFF"/>
+          </a:solidFill>
+          <a:ln w="23812">
+            <a:solidFill>
+              <a:srgbClr val="7B5CF5"/>
+            </a:solidFill>
+          </a:ln>
+          <a:effectLst/>
+        </p:spPr>
+        <p:style>
+          <a:lnRef idx="1">
+            <a:schemeClr val="accent1"/>
+          </a:lnRef>
+          <a:fillRef idx="3">
+            <a:schemeClr val="accent1"/>
+          </a:fillRef>
+          <a:effectRef idx="2">
+            <a:schemeClr val="accent1"/>
+          </a:effectRef>
+          <a:fontRef idx="minor">
+            <a:schemeClr val="lt1"/>
+          </a:fontRef>
+        </p:style>
+        <p:txBody>
+          <a:bodyPr rtlCol="0" anchor="ctr"/>
+          <a:lstStyle/>
+          <a:p>
+            <a:pPr algn="ctr"/>
+          </a:p>
+        </p:txBody>
+      </p:sp>
+      <p:sp>
+        <p:nvSpPr>
+          <p:cNvPr id="9" name="TextBox 8"/>
+          <p:cNvSpPr txBox="1"/>
+          <p:nvPr/>
+        </p:nvSpPr>
+        <p:spPr>
+          <a:xfrm>
+            <a:off x="706374" y="2009394"/>
+            <a:ext cx="438912" cy="438912"/>
+          </a:xfrm>
+          <a:prstGeom prst="rect">
+            <a:avLst/>
+          </a:prstGeom>
+          <a:noFill/>
+        </p:spPr>
+        <p:txBody>
+          <a:bodyPr wrap="square" lIns="27432" rIns="27432" tIns="13716" bIns="13716" anchor="ctr">
+            <a:spAutoFit/>
+          </a:bodyPr>
+          <a:lstStyle/>
+          <a:p>
+            <a:pPr algn="ctr"/>
+            <a:r>
+              <a:rPr sz="1950" b="1" i="0">
+                <a:solidFill>
+                  <a:srgbClr val="7B5CF5"/>
+                </a:solidFill>
+                <a:latin typeface="Arial Black"/>
+              </a:rPr>
+              <a:t>①</a:t>
+            </a:r>
+          </a:p>
+        </p:txBody>
+      </p:sp>
+      <p:sp>
+        <p:nvSpPr>
+          <p:cNvPr id="10" name="TextBox 9"/>
+          <p:cNvSpPr txBox="1"/>
+          <p:nvPr/>
+        </p:nvSpPr>
+        <p:spPr>
+          <a:xfrm>
+            <a:off x="754380" y="2708910"/>
+            <a:ext cx="1680210" cy="377190"/>
           </a:xfrm>
           <a:prstGeom prst="rect">
             <a:avLst/>
@@ -3678,27 +3760,27 @@
           <a:p>
             <a:pPr algn="l"/>
             <a:r>
-              <a:rPr sz="1650" b="1" i="0">
-                <a:solidFill>
-                  <a:srgbClr val="7B5CF5"/>
+              <a:rPr sz="1350" b="1" i="0">
+                <a:solidFill>
+                  <a:srgbClr val="1F2937"/>
                 </a:solidFill>
                 <a:latin typeface="Arial Black"/>
               </a:rPr>
-              <a:t>Step 1  觀察 (5 min)</a:t>
-            </a:r>
-          </a:p>
-        </p:txBody>
-      </p:sp>
-      <p:sp>
-        <p:nvSpPr>
-          <p:cNvPr id="9" name="TextBox 8"/>
-          <p:cNvSpPr txBox="1"/>
-          <p:nvPr/>
-        </p:nvSpPr>
-        <p:spPr>
-          <a:xfrm>
-            <a:off x="754380" y="2263139"/>
-            <a:ext cx="3771900" cy="2263139"/>
+              <a:t>觀察</a:t>
+            </a:r>
+          </a:p>
+        </p:txBody>
+      </p:sp>
+      <p:sp>
+        <p:nvSpPr>
+          <p:cNvPr id="11" name="TextBox 10"/>
+          <p:cNvSpPr txBox="1"/>
+          <p:nvPr/>
+        </p:nvSpPr>
+        <p:spPr>
+          <a:xfrm>
+            <a:off x="754380" y="3154679"/>
+            <a:ext cx="1680210" cy="960119"/>
           </a:xfrm>
           <a:prstGeom prst="rect">
             <a:avLst/>
@@ -3723,23 +3805,7 @@
                 </a:solidFill>
                 <a:latin typeface="Calibri"/>
               </a:rPr>
-              <a:t>在瀏覽器問:</a:t>
-            </a:r>
-          </a:p>
-          <a:p>
-            <a:pPr algn="l">
-              <a:spcAft>
-                <a:spcPts val="900"/>
-              </a:spcAft>
-            </a:pPr>
-            <a:r>
-              <a:rPr sz="1125" b="1" i="0">
-                <a:solidFill>
-                  <a:srgbClr val="5B3ED9"/>
-                </a:solidFill>
-                <a:latin typeface="Calibri"/>
-              </a:rPr>
-              <a:t>「英文中心幾點開門?」</a:t>
+              <a:t>看 [tool_use] log</a:t>
             </a:r>
           </a:p>
           <a:p>
@@ -3755,69 +3821,56 @@
                 </a:solidFill>
                 <a:latin typeface="Calibri"/>
               </a:rPr>
-              <a:t>在 terminal 觀察:</a:t>
-            </a:r>
-          </a:p>
-          <a:p>
-            <a:pPr algn="l">
-              <a:spcAft>
-                <a:spcPts val="1050"/>
-              </a:spcAft>
-            </a:pPr>
-            <a:r>
-              <a:rPr sz="900" b="1" i="0">
-                <a:solidFill>
-                  <a:srgbClr val="FB7048"/>
+              <a:t>AI 摘要 JSON</a:t>
+            </a:r>
+          </a:p>
+        </p:txBody>
+      </p:sp>
+      <p:sp>
+        <p:nvSpPr>
+          <p:cNvPr id="12" name="TextBox 11"/>
+          <p:cNvSpPr txBox="1"/>
+          <p:nvPr/>
+        </p:nvSpPr>
+        <p:spPr>
+          <a:xfrm>
+            <a:off x="754380" y="4080510"/>
+            <a:ext cx="1680210" cy="274320"/>
+          </a:xfrm>
+          <a:prstGeom prst="rect">
+            <a:avLst/>
+          </a:prstGeom>
+          <a:noFill/>
+        </p:spPr>
+        <p:txBody>
+          <a:bodyPr wrap="square" lIns="27432" rIns="27432" tIns="13716" bIns="13716" anchor="t">
+            <a:spAutoFit/>
+          </a:bodyPr>
+          <a:lstStyle/>
+          <a:p>
+            <a:pPr algn="l"/>
+            <a:r>
+              <a:rPr sz="1050" b="1" i="1">
+                <a:solidFill>
+                  <a:srgbClr val="7B5CF5"/>
                 </a:solidFill>
                 <a:latin typeface="Consolas"/>
               </a:rPr>
-              <a:t>[tool_use] get_english_center_info</a:t>
-            </a:r>
-          </a:p>
-          <a:p>
-            <a:pPr algn="l">
-              <a:spcAft>
-                <a:spcPts val="300"/>
-              </a:spcAft>
-            </a:pPr>
-            <a:r>
-              <a:rPr sz="975" b="1" i="0">
-                <a:solidFill>
-                  <a:srgbClr val="1F2937"/>
-                </a:solidFill>
-                <a:latin typeface="Calibri"/>
-              </a:rPr>
-              <a:t>💡  關鍵觀察:</a:t>
-            </a:r>
-          </a:p>
-          <a:p>
-            <a:pPr algn="l">
-              <a:spcAft>
-                <a:spcPts val="0"/>
-              </a:spcAft>
-            </a:pPr>
-            <a:r>
-              <a:rPr sz="900" b="0" i="1">
-                <a:solidFill>
-                  <a:srgbClr val="374151"/>
-                </a:solidFill>
-                <a:latin typeface="Calibri"/>
-              </a:rPr>
-              <a:t>Claude 不會 dump 整份 JSON,挑出「開放時間」那一段。這是 LLM 對 tool result 的摘要 — agent 的靈魂。</a:t>
-            </a:r>
-          </a:p>
-        </p:txBody>
-      </p:sp>
-      <p:sp>
-        <p:nvSpPr>
-          <p:cNvPr id="10" name="Rounded Rectangle 9"/>
+              <a:t>5 min</a:t>
+            </a:r>
+          </a:p>
+        </p:txBody>
+      </p:sp>
+      <p:sp>
+        <p:nvSpPr>
+          <p:cNvPr id="13" name="Rounded Rectangle 12"/>
           <p:cNvSpPr/>
           <p:nvPr/>
         </p:nvSpPr>
         <p:spPr>
           <a:xfrm>
-            <a:off x="4834890" y="1851660"/>
-            <a:ext cx="4011929" cy="2743200"/>
+            <a:off x="2743200" y="1954530"/>
+            <a:ext cx="2023110" cy="2400300"/>
           </a:xfrm>
           <a:prstGeom prst="roundRect">
             <a:avLst>
@@ -3858,14 +3911,95 @@
       </p:sp>
       <p:sp>
         <p:nvSpPr>
-          <p:cNvPr id="11" name="TextBox 10"/>
-          <p:cNvSpPr txBox="1"/>
-          <p:nvPr/>
-        </p:nvSpPr>
-        <p:spPr>
-          <a:xfrm>
-            <a:off x="5006340" y="1975104"/>
-            <a:ext cx="3669029" cy="377190"/>
+          <p:cNvPr id="14" name="Oval 13"/>
+          <p:cNvSpPr/>
+          <p:nvPr/>
+        </p:nvSpPr>
+        <p:spPr>
+          <a:xfrm>
+            <a:off x="2866644" y="2009394"/>
+            <a:ext cx="438912" cy="438912"/>
+          </a:xfrm>
+          <a:prstGeom prst="ellipse">
+            <a:avLst/>
+          </a:prstGeom>
+          <a:solidFill>
+            <a:srgbClr val="FFFFFF"/>
+          </a:solidFill>
+          <a:ln w="23812">
+            <a:solidFill>
+              <a:srgbClr val="FB7048"/>
+            </a:solidFill>
+          </a:ln>
+          <a:effectLst/>
+        </p:spPr>
+        <p:style>
+          <a:lnRef idx="1">
+            <a:schemeClr val="accent1"/>
+          </a:lnRef>
+          <a:fillRef idx="3">
+            <a:schemeClr val="accent1"/>
+          </a:fillRef>
+          <a:effectRef idx="2">
+            <a:schemeClr val="accent1"/>
+          </a:effectRef>
+          <a:fontRef idx="minor">
+            <a:schemeClr val="lt1"/>
+          </a:fontRef>
+        </p:style>
+        <p:txBody>
+          <a:bodyPr rtlCol="0" anchor="ctr"/>
+          <a:lstStyle/>
+          <a:p>
+            <a:pPr algn="ctr"/>
+          </a:p>
+        </p:txBody>
+      </p:sp>
+      <p:sp>
+        <p:nvSpPr>
+          <p:cNvPr id="15" name="TextBox 14"/>
+          <p:cNvSpPr txBox="1"/>
+          <p:nvPr/>
+        </p:nvSpPr>
+        <p:spPr>
+          <a:xfrm>
+            <a:off x="2866644" y="2009394"/>
+            <a:ext cx="438912" cy="438912"/>
+          </a:xfrm>
+          <a:prstGeom prst="rect">
+            <a:avLst/>
+          </a:prstGeom>
+          <a:noFill/>
+        </p:spPr>
+        <p:txBody>
+          <a:bodyPr wrap="square" lIns="27432" rIns="27432" tIns="13716" bIns="13716" anchor="ctr">
+            <a:spAutoFit/>
+          </a:bodyPr>
+          <a:lstStyle/>
+          <a:p>
+            <a:pPr algn="ctr"/>
+            <a:r>
+              <a:rPr sz="1950" b="1" i="0">
+                <a:solidFill>
+                  <a:srgbClr val="FB7048"/>
+                </a:solidFill>
+                <a:latin typeface="Arial Black"/>
+              </a:rPr>
+              <a:t>②</a:t>
+            </a:r>
+          </a:p>
+        </p:txBody>
+      </p:sp>
+      <p:sp>
+        <p:nvSpPr>
+          <p:cNvPr id="16" name="TextBox 15"/>
+          <p:cNvSpPr txBox="1"/>
+          <p:nvPr/>
+        </p:nvSpPr>
+        <p:spPr>
+          <a:xfrm>
+            <a:off x="2914650" y="2708910"/>
+            <a:ext cx="1680210" cy="377190"/>
           </a:xfrm>
           <a:prstGeom prst="rect">
             <a:avLst/>
@@ -3880,27 +4014,27 @@
           <a:p>
             <a:pPr algn="l"/>
             <a:r>
-              <a:rPr sz="1650" b="1" i="0">
-                <a:solidFill>
-                  <a:srgbClr val="FB7048"/>
+              <a:rPr sz="1350" b="1" i="0">
+                <a:solidFill>
+                  <a:srgbClr val="1F2937"/>
                 </a:solidFill>
                 <a:latin typeface="Arial Black"/>
               </a:rPr>
-              <a:t>Step 2  換 JSON (15 min)</a:t>
-            </a:r>
-          </a:p>
-        </p:txBody>
-      </p:sp>
-      <p:sp>
-        <p:nvSpPr>
-          <p:cNvPr id="12" name="TextBox 11"/>
-          <p:cNvSpPr txBox="1"/>
-          <p:nvPr/>
-        </p:nvSpPr>
-        <p:spPr>
-          <a:xfrm>
-            <a:off x="5006340" y="2263139"/>
-            <a:ext cx="3703320" cy="2263139"/>
+              <a:t>換資料</a:t>
+            </a:r>
+          </a:p>
+        </p:txBody>
+      </p:sp>
+      <p:sp>
+        <p:nvSpPr>
+          <p:cNvPr id="17" name="TextBox 16"/>
+          <p:cNvSpPr txBox="1"/>
+          <p:nvPr/>
+        </p:nvSpPr>
+        <p:spPr>
+          <a:xfrm>
+            <a:off x="2914650" y="3154679"/>
+            <a:ext cx="1680210" cy="960119"/>
           </a:xfrm>
           <a:prstGeom prst="rect">
             <a:avLst/>
@@ -3912,38 +4046,6 @@
             <a:spAutoFit/>
           </a:bodyPr>
           <a:lstStyle/>
-          <a:p>
-            <a:pPr algn="l">
-              <a:spcAft>
-                <a:spcPts val="150"/>
-              </a:spcAft>
-            </a:pPr>
-            <a:r>
-              <a:rPr sz="975" b="0" i="0">
-                <a:solidFill>
-                  <a:srgbClr val="374151"/>
-                </a:solidFill>
-                <a:latin typeface="Calibri"/>
-              </a:rPr>
-              <a:t>編輯:</a:t>
-            </a:r>
-          </a:p>
-          <a:p>
-            <a:pPr algn="l">
-              <a:spcAft>
-                <a:spcPts val="900"/>
-              </a:spcAft>
-            </a:pPr>
-            <a:r>
-              <a:rPr sz="900" b="1" i="0">
-                <a:solidFill>
-                  <a:srgbClr val="FB7048"/>
-                </a:solidFill>
-                <a:latin typeface="Consolas"/>
-              </a:rPr>
-              <a:t>mcp-server-py/data/english_center.json</a:t>
-            </a:r>
-          </a:p>
           <a:p>
             <a:pPr algn="l">
               <a:spcAft>
@@ -3951,19 +4053,19 @@
               </a:spcAft>
             </a:pPr>
             <a:r>
-              <a:rPr sz="975" b="1" i="0">
-                <a:solidFill>
-                  <a:srgbClr val="1F2937"/>
+              <a:rPr sz="975" b="0" i="0">
+                <a:solidFill>
+                  <a:srgbClr val="374151"/>
                 </a:solidFill>
                 <a:latin typeface="Calibri"/>
               </a:rPr>
-              <a:t>換成你自己的領域資料:</a:t>
+              <a:t>編輯 data/*.json</a:t>
             </a:r>
           </a:p>
           <a:p>
             <a:pPr algn="l">
               <a:spcAft>
-                <a:spcPts val="150"/>
+                <a:spcPts val="300"/>
               </a:spcAft>
             </a:pPr>
             <a:r>
@@ -3973,13 +4075,235 @@
                 </a:solidFill>
                 <a:latin typeface="Calibri"/>
               </a:rPr>
-              <a:t>• 你的研究室介紹</a:t>
-            </a:r>
-          </a:p>
+              <a:t>放你的領域內容</a:t>
+            </a:r>
+          </a:p>
+        </p:txBody>
+      </p:sp>
+      <p:sp>
+        <p:nvSpPr>
+          <p:cNvPr id="18" name="TextBox 17"/>
+          <p:cNvSpPr txBox="1"/>
+          <p:nvPr/>
+        </p:nvSpPr>
+        <p:spPr>
+          <a:xfrm>
+            <a:off x="2914650" y="4080510"/>
+            <a:ext cx="1680210" cy="274320"/>
+          </a:xfrm>
+          <a:prstGeom prst="rect">
+            <a:avLst/>
+          </a:prstGeom>
+          <a:noFill/>
+        </p:spPr>
+        <p:txBody>
+          <a:bodyPr wrap="square" lIns="27432" rIns="27432" tIns="13716" bIns="13716" anchor="t">
+            <a:spAutoFit/>
+          </a:bodyPr>
+          <a:lstStyle/>
+          <a:p>
+            <a:pPr algn="l"/>
+            <a:r>
+              <a:rPr sz="1050" b="1" i="1">
+                <a:solidFill>
+                  <a:srgbClr val="FB7048"/>
+                </a:solidFill>
+                <a:latin typeface="Consolas"/>
+              </a:rPr>
+              <a:t>15 min</a:t>
+            </a:r>
+          </a:p>
+        </p:txBody>
+      </p:sp>
+      <p:sp>
+        <p:nvSpPr>
+          <p:cNvPr id="19" name="Rounded Rectangle 18"/>
+          <p:cNvSpPr/>
+          <p:nvPr/>
+        </p:nvSpPr>
+        <p:spPr>
+          <a:xfrm>
+            <a:off x="4903470" y="1954530"/>
+            <a:ext cx="2023110" cy="2400300"/>
+          </a:xfrm>
+          <a:prstGeom prst="roundRect">
+            <a:avLst>
+              <a:gd name="adj" fmla="val 10000"/>
+            </a:avLst>
+          </a:prstGeom>
+          <a:solidFill>
+            <a:srgbClr val="D4F7F0"/>
+          </a:solidFill>
+          <a:ln w="19050">
+            <a:solidFill>
+              <a:srgbClr val="0EA594"/>
+            </a:solidFill>
+          </a:ln>
+          <a:effectLst/>
+        </p:spPr>
+        <p:style>
+          <a:lnRef idx="1">
+            <a:schemeClr val="accent1"/>
+          </a:lnRef>
+          <a:fillRef idx="3">
+            <a:schemeClr val="accent1"/>
+          </a:fillRef>
+          <a:effectRef idx="2">
+            <a:schemeClr val="accent1"/>
+          </a:effectRef>
+          <a:fontRef idx="minor">
+            <a:schemeClr val="lt1"/>
+          </a:fontRef>
+        </p:style>
+        <p:txBody>
+          <a:bodyPr rtlCol="0" anchor="ctr"/>
+          <a:lstStyle/>
+          <a:p>
+            <a:pPr algn="ctr"/>
+          </a:p>
+        </p:txBody>
+      </p:sp>
+      <p:sp>
+        <p:nvSpPr>
+          <p:cNvPr id="20" name="Oval 19"/>
+          <p:cNvSpPr/>
+          <p:nvPr/>
+        </p:nvSpPr>
+        <p:spPr>
+          <a:xfrm>
+            <a:off x="5026914" y="2009394"/>
+            <a:ext cx="438912" cy="438912"/>
+          </a:xfrm>
+          <a:prstGeom prst="ellipse">
+            <a:avLst/>
+          </a:prstGeom>
+          <a:solidFill>
+            <a:srgbClr val="FFFFFF"/>
+          </a:solidFill>
+          <a:ln w="23812">
+            <a:solidFill>
+              <a:srgbClr val="0EA594"/>
+            </a:solidFill>
+          </a:ln>
+          <a:effectLst/>
+        </p:spPr>
+        <p:style>
+          <a:lnRef idx="1">
+            <a:schemeClr val="accent1"/>
+          </a:lnRef>
+          <a:fillRef idx="3">
+            <a:schemeClr val="accent1"/>
+          </a:fillRef>
+          <a:effectRef idx="2">
+            <a:schemeClr val="accent1"/>
+          </a:effectRef>
+          <a:fontRef idx="minor">
+            <a:schemeClr val="lt1"/>
+          </a:fontRef>
+        </p:style>
+        <p:txBody>
+          <a:bodyPr rtlCol="0" anchor="ctr"/>
+          <a:lstStyle/>
+          <a:p>
+            <a:pPr algn="ctr"/>
+          </a:p>
+        </p:txBody>
+      </p:sp>
+      <p:sp>
+        <p:nvSpPr>
+          <p:cNvPr id="21" name="TextBox 20"/>
+          <p:cNvSpPr txBox="1"/>
+          <p:nvPr/>
+        </p:nvSpPr>
+        <p:spPr>
+          <a:xfrm>
+            <a:off x="5026914" y="2009394"/>
+            <a:ext cx="438912" cy="438912"/>
+          </a:xfrm>
+          <a:prstGeom prst="rect">
+            <a:avLst/>
+          </a:prstGeom>
+          <a:noFill/>
+        </p:spPr>
+        <p:txBody>
+          <a:bodyPr wrap="square" lIns="27432" rIns="27432" tIns="13716" bIns="13716" anchor="ctr">
+            <a:spAutoFit/>
+          </a:bodyPr>
+          <a:lstStyle/>
+          <a:p>
+            <a:pPr algn="ctr"/>
+            <a:r>
+              <a:rPr sz="1950" b="1" i="0">
+                <a:solidFill>
+                  <a:srgbClr val="0EA594"/>
+                </a:solidFill>
+                <a:latin typeface="Arial Black"/>
+              </a:rPr>
+              <a:t>③</a:t>
+            </a:r>
+          </a:p>
+        </p:txBody>
+      </p:sp>
+      <p:sp>
+        <p:nvSpPr>
+          <p:cNvPr id="22" name="TextBox 21"/>
+          <p:cNvSpPr txBox="1"/>
+          <p:nvPr/>
+        </p:nvSpPr>
+        <p:spPr>
+          <a:xfrm>
+            <a:off x="5074920" y="2708910"/>
+            <a:ext cx="1680210" cy="377190"/>
+          </a:xfrm>
+          <a:prstGeom prst="rect">
+            <a:avLst/>
+          </a:prstGeom>
+          <a:noFill/>
+        </p:spPr>
+        <p:txBody>
+          <a:bodyPr wrap="square" lIns="27432" rIns="27432" tIns="13716" bIns="13716" anchor="t">
+            <a:spAutoFit/>
+          </a:bodyPr>
+          <a:lstStyle/>
+          <a:p>
+            <a:pPr algn="l"/>
+            <a:r>
+              <a:rPr sz="1350" b="1" i="0">
+                <a:solidFill>
+                  <a:srgbClr val="1F2937"/>
+                </a:solidFill>
+                <a:latin typeface="Arial Black"/>
+              </a:rPr>
+              <a:t>改說明書</a:t>
+            </a:r>
+          </a:p>
+        </p:txBody>
+      </p:sp>
+      <p:sp>
+        <p:nvSpPr>
+          <p:cNvPr id="23" name="TextBox 22"/>
+          <p:cNvSpPr txBox="1"/>
+          <p:nvPr/>
+        </p:nvSpPr>
+        <p:spPr>
+          <a:xfrm>
+            <a:off x="5074920" y="3154679"/>
+            <a:ext cx="1680210" cy="960119"/>
+          </a:xfrm>
+          <a:prstGeom prst="rect">
+            <a:avLst/>
+          </a:prstGeom>
+          <a:noFill/>
+        </p:spPr>
+        <p:txBody>
+          <a:bodyPr wrap="square" lIns="27432" rIns="27432" tIns="13716" bIns="13716" anchor="t">
+            <a:spAutoFit/>
+          </a:bodyPr>
+          <a:lstStyle/>
           <a:p>
             <a:pPr algn="l">
               <a:spcAft>
-                <a:spcPts val="150"/>
+                <a:spcPts val="300"/>
               </a:spcAft>
             </a:pPr>
             <a:r>
@@ -3989,13 +4313,13 @@
                 </a:solidFill>
                 <a:latin typeface="Calibri"/>
               </a:rPr>
-              <a:t>• 你教的一門課(大綱/作業/評分)</a:t>
+              <a:t>docstring 的使用情境</a:t>
             </a:r>
           </a:p>
           <a:p>
             <a:pPr algn="l">
               <a:spcAft>
-                <a:spcPts val="900"/>
+                <a:spcPts val="300"/>
               </a:spcAft>
             </a:pPr>
             <a:r>
@@ -4005,46 +4329,386 @@
                 </a:solidFill>
                 <a:latin typeface="Calibri"/>
               </a:rPr>
-              <a:t>• 你系所的 FAQ / 研究成果清單</a:t>
-            </a:r>
-          </a:p>
+              <a:t>決定工具呼叫率</a:t>
+            </a:r>
+          </a:p>
+        </p:txBody>
+      </p:sp>
+      <p:sp>
+        <p:nvSpPr>
+          <p:cNvPr id="24" name="TextBox 23"/>
+          <p:cNvSpPr txBox="1"/>
+          <p:nvPr/>
+        </p:nvSpPr>
+        <p:spPr>
+          <a:xfrm>
+            <a:off x="5074920" y="4080510"/>
+            <a:ext cx="1680210" cy="274320"/>
+          </a:xfrm>
+          <a:prstGeom prst="rect">
+            <a:avLst/>
+          </a:prstGeom>
+          <a:noFill/>
+        </p:spPr>
+        <p:txBody>
+          <a:bodyPr wrap="square" lIns="27432" rIns="27432" tIns="13716" bIns="13716" anchor="t">
+            <a:spAutoFit/>
+          </a:bodyPr>
+          <a:lstStyle/>
+          <a:p>
+            <a:pPr algn="l"/>
+            <a:r>
+              <a:rPr sz="1050" b="1" i="1">
+                <a:solidFill>
+                  <a:srgbClr val="0EA594"/>
+                </a:solidFill>
+                <a:latin typeface="Consolas"/>
+              </a:rPr>
+              <a:t>10 min</a:t>
+            </a:r>
+          </a:p>
+        </p:txBody>
+      </p:sp>
+      <p:sp>
+        <p:nvSpPr>
+          <p:cNvPr id="25" name="Rounded Rectangle 24"/>
+          <p:cNvSpPr/>
+          <p:nvPr/>
+        </p:nvSpPr>
+        <p:spPr>
+          <a:xfrm>
+            <a:off x="7063740" y="1954530"/>
+            <a:ext cx="2023110" cy="2400300"/>
+          </a:xfrm>
+          <a:prstGeom prst="roundRect">
+            <a:avLst>
+              <a:gd name="adj" fmla="val 10000"/>
+            </a:avLst>
+          </a:prstGeom>
+          <a:solidFill>
+            <a:srgbClr val="FEE2E2"/>
+          </a:solidFill>
+          <a:ln w="19050">
+            <a:solidFill>
+              <a:srgbClr val="EF4444"/>
+            </a:solidFill>
+          </a:ln>
+          <a:effectLst/>
+        </p:spPr>
+        <p:style>
+          <a:lnRef idx="1">
+            <a:schemeClr val="accent1"/>
+          </a:lnRef>
+          <a:fillRef idx="3">
+            <a:schemeClr val="accent1"/>
+          </a:fillRef>
+          <a:effectRef idx="2">
+            <a:schemeClr val="accent1"/>
+          </a:effectRef>
+          <a:fontRef idx="minor">
+            <a:schemeClr val="lt1"/>
+          </a:fontRef>
+        </p:style>
+        <p:txBody>
+          <a:bodyPr rtlCol="0" anchor="ctr"/>
+          <a:lstStyle/>
+          <a:p>
+            <a:pPr algn="ctr"/>
+          </a:p>
+        </p:txBody>
+      </p:sp>
+      <p:sp>
+        <p:nvSpPr>
+          <p:cNvPr id="26" name="Oval 25"/>
+          <p:cNvSpPr/>
+          <p:nvPr/>
+        </p:nvSpPr>
+        <p:spPr>
+          <a:xfrm>
+            <a:off x="7187184" y="2009394"/>
+            <a:ext cx="438912" cy="438912"/>
+          </a:xfrm>
+          <a:prstGeom prst="ellipse">
+            <a:avLst/>
+          </a:prstGeom>
+          <a:solidFill>
+            <a:srgbClr val="FFFFFF"/>
+          </a:solidFill>
+          <a:ln w="23812">
+            <a:solidFill>
+              <a:srgbClr val="EF4444"/>
+            </a:solidFill>
+          </a:ln>
+          <a:effectLst/>
+        </p:spPr>
+        <p:style>
+          <a:lnRef idx="1">
+            <a:schemeClr val="accent1"/>
+          </a:lnRef>
+          <a:fillRef idx="3">
+            <a:schemeClr val="accent1"/>
+          </a:fillRef>
+          <a:effectRef idx="2">
+            <a:schemeClr val="accent1"/>
+          </a:effectRef>
+          <a:fontRef idx="minor">
+            <a:schemeClr val="lt1"/>
+          </a:fontRef>
+        </p:style>
+        <p:txBody>
+          <a:bodyPr rtlCol="0" anchor="ctr"/>
+          <a:lstStyle/>
+          <a:p>
+            <a:pPr algn="ctr"/>
+          </a:p>
+        </p:txBody>
+      </p:sp>
+      <p:sp>
+        <p:nvSpPr>
+          <p:cNvPr id="27" name="TextBox 26"/>
+          <p:cNvSpPr txBox="1"/>
+          <p:nvPr/>
+        </p:nvSpPr>
+        <p:spPr>
+          <a:xfrm>
+            <a:off x="7187184" y="2009394"/>
+            <a:ext cx="438912" cy="438912"/>
+          </a:xfrm>
+          <a:prstGeom prst="rect">
+            <a:avLst/>
+          </a:prstGeom>
+          <a:noFill/>
+        </p:spPr>
+        <p:txBody>
+          <a:bodyPr wrap="square" lIns="27432" rIns="27432" tIns="13716" bIns="13716" anchor="ctr">
+            <a:spAutoFit/>
+          </a:bodyPr>
+          <a:lstStyle/>
+          <a:p>
+            <a:pPr algn="ctr"/>
+            <a:r>
+              <a:rPr sz="1950" b="1" i="0">
+                <a:solidFill>
+                  <a:srgbClr val="EF4444"/>
+                </a:solidFill>
+                <a:latin typeface="Arial Black"/>
+              </a:rPr>
+              <a:t>④</a:t>
+            </a:r>
+          </a:p>
+        </p:txBody>
+      </p:sp>
+      <p:sp>
+        <p:nvSpPr>
+          <p:cNvPr id="28" name="TextBox 27"/>
+          <p:cNvSpPr txBox="1"/>
+          <p:nvPr/>
+        </p:nvSpPr>
+        <p:spPr>
+          <a:xfrm>
+            <a:off x="7235190" y="2708910"/>
+            <a:ext cx="1680210" cy="377190"/>
+          </a:xfrm>
+          <a:prstGeom prst="rect">
+            <a:avLst/>
+          </a:prstGeom>
+          <a:noFill/>
+        </p:spPr>
+        <p:txBody>
+          <a:bodyPr wrap="square" lIns="27432" rIns="27432" tIns="13716" bIns="13716" anchor="t">
+            <a:spAutoFit/>
+          </a:bodyPr>
+          <a:lstStyle/>
+          <a:p>
+            <a:pPr algn="l"/>
+            <a:r>
+              <a:rPr sz="1350" b="1" i="0">
+                <a:solidFill>
+                  <a:srgbClr val="1F2937"/>
+                </a:solidFill>
+                <a:latin typeface="Arial Black"/>
+              </a:rPr>
+              <a:t>驗證</a:t>
+            </a:r>
+          </a:p>
+        </p:txBody>
+      </p:sp>
+      <p:sp>
+        <p:nvSpPr>
+          <p:cNvPr id="29" name="TextBox 28"/>
+          <p:cNvSpPr txBox="1"/>
+          <p:nvPr/>
+        </p:nvSpPr>
+        <p:spPr>
+          <a:xfrm>
+            <a:off x="7235190" y="3154679"/>
+            <a:ext cx="1680210" cy="960119"/>
+          </a:xfrm>
+          <a:prstGeom prst="rect">
+            <a:avLst/>
+          </a:prstGeom>
+          <a:noFill/>
+        </p:spPr>
+        <p:txBody>
+          <a:bodyPr wrap="square" lIns="27432" rIns="27432" tIns="13716" bIns="13716" anchor="t">
+            <a:spAutoFit/>
+          </a:bodyPr>
+          <a:lstStyle/>
           <a:p>
             <a:pPr algn="l">
               <a:spcAft>
-                <a:spcPts val="150"/>
+                <a:spcPts val="300"/>
               </a:spcAft>
             </a:pPr>
             <a:r>
-              <a:rPr sz="900" b="1" i="0">
-                <a:solidFill>
-                  <a:srgbClr val="B91C1C"/>
+              <a:rPr sz="975" b="0" i="0">
+                <a:solidFill>
+                  <a:srgbClr val="374151"/>
                 </a:solidFill>
                 <a:latin typeface="Calibri"/>
               </a:rPr>
-              <a:t>⚠ JSON 語法錯會卡住:</a:t>
+              <a:t>重啟 npm start</a:t>
             </a:r>
           </a:p>
           <a:p>
             <a:pPr algn="l">
               <a:spcAft>
-                <a:spcPts val="0"/>
+                <a:spcPts val="300"/>
               </a:spcAft>
             </a:pPr>
             <a:r>
-              <a:rPr sz="825" b="0" i="0">
-                <a:solidFill>
-                  <a:srgbClr val="B91C1C"/>
+              <a:rPr sz="975" b="0" i="0">
+                <a:solidFill>
+                  <a:srgbClr val="374151"/>
+                </a:solidFill>
+                <a:latin typeface="Calibri"/>
+              </a:rPr>
+              <a:t>問自己資料問題</a:t>
+            </a:r>
+          </a:p>
+        </p:txBody>
+      </p:sp>
+      <p:sp>
+        <p:nvSpPr>
+          <p:cNvPr id="30" name="TextBox 29"/>
+          <p:cNvSpPr txBox="1"/>
+          <p:nvPr/>
+        </p:nvSpPr>
+        <p:spPr>
+          <a:xfrm>
+            <a:off x="7235190" y="4080510"/>
+            <a:ext cx="1680210" cy="274320"/>
+          </a:xfrm>
+          <a:prstGeom prst="rect">
+            <a:avLst/>
+          </a:prstGeom>
+          <a:noFill/>
+        </p:spPr>
+        <p:txBody>
+          <a:bodyPr wrap="square" lIns="27432" rIns="27432" tIns="13716" bIns="13716" anchor="t">
+            <a:spAutoFit/>
+          </a:bodyPr>
+          <a:lstStyle/>
+          <a:p>
+            <a:pPr algn="l"/>
+            <a:r>
+              <a:rPr sz="1050" b="1" i="1">
+                <a:solidFill>
+                  <a:srgbClr val="EF4444"/>
                 </a:solidFill>
                 <a:latin typeface="Consolas"/>
               </a:rPr>
-              <a:t>python3 -m json.tool data/xxx.json</a:t>
-            </a:r>
-          </a:p>
-        </p:txBody>
-      </p:sp>
-      <p:sp>
-        <p:nvSpPr>
-          <p:cNvPr id="13" name="TextBox 12"/>
+              <a:t>5 min</a:t>
+            </a:r>
+          </a:p>
+        </p:txBody>
+      </p:sp>
+      <p:sp>
+        <p:nvSpPr>
+          <p:cNvPr id="31" name="Rounded Rectangle 30"/>
+          <p:cNvSpPr/>
+          <p:nvPr/>
+        </p:nvSpPr>
+        <p:spPr>
+          <a:xfrm>
+            <a:off x="582930" y="4457700"/>
+            <a:ext cx="8229600" cy="342900"/>
+          </a:xfrm>
+          <a:prstGeom prst="roundRect">
+            <a:avLst>
+              <a:gd name="adj" fmla="val 10000"/>
+            </a:avLst>
+          </a:prstGeom>
+          <a:solidFill>
+            <a:srgbClr val="EEE8FF"/>
+          </a:solidFill>
+          <a:ln w="19050">
+            <a:solidFill>
+              <a:srgbClr val="7B5CF5"/>
+            </a:solidFill>
+          </a:ln>
+          <a:effectLst/>
+        </p:spPr>
+        <p:style>
+          <a:lnRef idx="1">
+            <a:schemeClr val="accent1"/>
+          </a:lnRef>
+          <a:fillRef idx="3">
+            <a:schemeClr val="accent1"/>
+          </a:fillRef>
+          <a:effectRef idx="2">
+            <a:schemeClr val="accent1"/>
+          </a:effectRef>
+          <a:fontRef idx="minor">
+            <a:schemeClr val="lt1"/>
+          </a:fontRef>
+        </p:style>
+        <p:txBody>
+          <a:bodyPr rtlCol="0" anchor="ctr"/>
+          <a:lstStyle/>
+          <a:p>
+            <a:pPr algn="ctr"/>
+          </a:p>
+        </p:txBody>
+      </p:sp>
+      <p:sp>
+        <p:nvSpPr>
+          <p:cNvPr id="32" name="TextBox 31"/>
+          <p:cNvSpPr txBox="1"/>
+          <p:nvPr/>
+        </p:nvSpPr>
+        <p:spPr>
+          <a:xfrm>
+            <a:off x="788669" y="4457700"/>
+            <a:ext cx="7818120" cy="342900"/>
+          </a:xfrm>
+          <a:prstGeom prst="rect">
+            <a:avLst/>
+          </a:prstGeom>
+          <a:noFill/>
+        </p:spPr>
+        <p:txBody>
+          <a:bodyPr wrap="square" lIns="27432" rIns="27432" tIns="13716" bIns="13716" anchor="ctr">
+            <a:spAutoFit/>
+          </a:bodyPr>
+          <a:lstStyle/>
+          <a:p>
+            <a:pPr algn="l"/>
+            <a:r>
+              <a:rPr sz="975" b="1" i="0">
+                <a:solidFill>
+                  <a:srgbClr val="7B5CF5"/>
+                </a:solidFill>
+                <a:latin typeface="Calibri"/>
+              </a:rPr>
+              <a:t>▶  產出:你的 AI 助理會回答你自己放進去的資料 — 不是英文中心 demo 了</a:t>
+            </a:r>
+          </a:p>
+        </p:txBody>
+      </p:sp>
+      <p:sp>
+        <p:nvSpPr>
+          <p:cNvPr id="33" name="TextBox 32"/>
           <p:cNvSpPr txBox="1"/>
           <p:nvPr/>
         </p:nvSpPr>
@@ -4072,7 +4736,7 @@
                 </a:solidFill>
                 <a:latin typeface="Calibri"/>
               </a:rPr>
-              <a:t>10 / 12</a:t>
+              <a:t>10 / 13</a:t>
             </a:r>
           </a:p>
         </p:txBody>
@@ -4212,7 +4876,7 @@
                 </a:solidFill>
                 <a:latin typeface="Calibri"/>
               </a:rPr>
-              <a:t>03 · ③   L A B   1   ·   S T E P   3   ·   D O C S T R I N G</a:t>
+              <a:t>03 · ①②   L A B   1   ·   S T E P S   1 - 2</a:t>
             </a:r>
           </a:p>
         </p:txBody>
@@ -4241,13 +4905,13 @@
           <a:p>
             <a:pPr algn="l"/>
             <a:r>
-              <a:rPr sz="2250" b="1" i="0">
+              <a:rPr sz="3150" b="1" i="0">
                 <a:solidFill>
                   <a:srgbClr val="1F2937"/>
                 </a:solidFill>
                 <a:latin typeface="Arial Black"/>
               </a:rPr>
-              <a:t>Step 3:改 docstring (10 min)</a:t>
+              <a:t>Step 1–2:觀察 → 換 JSON</a:t>
             </a:r>
           </a:p>
         </p:txBody>
@@ -4282,7 +4946,7 @@
                 </a:solidFill>
                 <a:latin typeface="Calibri"/>
               </a:rPr>
-              <a:t>直接拿 repo 兩支真實工具對照 —— 同樣語法、教 LLM 不同事</a:t>
+              <a:t>還沒動到 Python 一個字</a:t>
             </a:r>
           </a:p>
         </p:txBody>
@@ -4296,7 +4960,209 @@
         <p:spPr>
           <a:xfrm>
             <a:off x="582930" y="1851660"/>
-            <a:ext cx="4080510" cy="2468880"/>
+            <a:ext cx="4080510" cy="2743200"/>
+          </a:xfrm>
+          <a:prstGeom prst="roundRect">
+            <a:avLst>
+              <a:gd name="adj" fmla="val 10000"/>
+            </a:avLst>
+          </a:prstGeom>
+          <a:solidFill>
+            <a:srgbClr val="EEE8FF"/>
+          </a:solidFill>
+          <a:ln w="19050">
+            <a:solidFill>
+              <a:srgbClr val="7B5CF5"/>
+            </a:solidFill>
+          </a:ln>
+          <a:effectLst/>
+        </p:spPr>
+        <p:style>
+          <a:lnRef idx="1">
+            <a:schemeClr val="accent1"/>
+          </a:lnRef>
+          <a:fillRef idx="3">
+            <a:schemeClr val="accent1"/>
+          </a:fillRef>
+          <a:effectRef idx="2">
+            <a:schemeClr val="accent1"/>
+          </a:effectRef>
+          <a:fontRef idx="minor">
+            <a:schemeClr val="lt1"/>
+          </a:fontRef>
+        </p:style>
+        <p:txBody>
+          <a:bodyPr rtlCol="0" anchor="ctr"/>
+          <a:lstStyle/>
+          <a:p>
+            <a:pPr algn="ctr"/>
+          </a:p>
+        </p:txBody>
+      </p:sp>
+      <p:sp>
+        <p:nvSpPr>
+          <p:cNvPr id="8" name="TextBox 7"/>
+          <p:cNvSpPr txBox="1"/>
+          <p:nvPr/>
+        </p:nvSpPr>
+        <p:spPr>
+          <a:xfrm>
+            <a:off x="754380" y="1975104"/>
+            <a:ext cx="3737610" cy="377190"/>
+          </a:xfrm>
+          <a:prstGeom prst="rect">
+            <a:avLst/>
+          </a:prstGeom>
+          <a:noFill/>
+        </p:spPr>
+        <p:txBody>
+          <a:bodyPr wrap="square" lIns="27432" rIns="27432" tIns="13716" bIns="13716" anchor="t">
+            <a:spAutoFit/>
+          </a:bodyPr>
+          <a:lstStyle/>
+          <a:p>
+            <a:pPr algn="l"/>
+            <a:r>
+              <a:rPr sz="1650" b="1" i="0">
+                <a:solidFill>
+                  <a:srgbClr val="7B5CF5"/>
+                </a:solidFill>
+                <a:latin typeface="Arial Black"/>
+              </a:rPr>
+              <a:t>Step 1  觀察 (5 min)</a:t>
+            </a:r>
+          </a:p>
+        </p:txBody>
+      </p:sp>
+      <p:sp>
+        <p:nvSpPr>
+          <p:cNvPr id="9" name="TextBox 8"/>
+          <p:cNvSpPr txBox="1"/>
+          <p:nvPr/>
+        </p:nvSpPr>
+        <p:spPr>
+          <a:xfrm>
+            <a:off x="754380" y="2263139"/>
+            <a:ext cx="3771900" cy="2263139"/>
+          </a:xfrm>
+          <a:prstGeom prst="rect">
+            <a:avLst/>
+          </a:prstGeom>
+          <a:noFill/>
+        </p:spPr>
+        <p:txBody>
+          <a:bodyPr wrap="square" lIns="27432" rIns="27432" tIns="13716" bIns="13716" anchor="t">
+            <a:spAutoFit/>
+          </a:bodyPr>
+          <a:lstStyle/>
+          <a:p>
+            <a:pPr algn="l">
+              <a:spcAft>
+                <a:spcPts val="300"/>
+              </a:spcAft>
+            </a:pPr>
+            <a:r>
+              <a:rPr sz="975" b="0" i="0">
+                <a:solidFill>
+                  <a:srgbClr val="374151"/>
+                </a:solidFill>
+                <a:latin typeface="Calibri"/>
+              </a:rPr>
+              <a:t>在瀏覽器問:</a:t>
+            </a:r>
+          </a:p>
+          <a:p>
+            <a:pPr algn="l">
+              <a:spcAft>
+                <a:spcPts val="900"/>
+              </a:spcAft>
+            </a:pPr>
+            <a:r>
+              <a:rPr sz="1125" b="1" i="0">
+                <a:solidFill>
+                  <a:srgbClr val="5B3ED9"/>
+                </a:solidFill>
+                <a:latin typeface="Calibri"/>
+              </a:rPr>
+              <a:t>「英文中心幾點開門?」</a:t>
+            </a:r>
+          </a:p>
+          <a:p>
+            <a:pPr algn="l">
+              <a:spcAft>
+                <a:spcPts val="300"/>
+              </a:spcAft>
+            </a:pPr>
+            <a:r>
+              <a:rPr sz="975" b="0" i="0">
+                <a:solidFill>
+                  <a:srgbClr val="374151"/>
+                </a:solidFill>
+                <a:latin typeface="Calibri"/>
+              </a:rPr>
+              <a:t>在 terminal 觀察:</a:t>
+            </a:r>
+          </a:p>
+          <a:p>
+            <a:pPr algn="l">
+              <a:spcAft>
+                <a:spcPts val="1050"/>
+              </a:spcAft>
+            </a:pPr>
+            <a:r>
+              <a:rPr sz="900" b="1" i="0">
+                <a:solidFill>
+                  <a:srgbClr val="FB7048"/>
+                </a:solidFill>
+                <a:latin typeface="Consolas"/>
+              </a:rPr>
+              <a:t>[tool_use] get_english_center_info</a:t>
+            </a:r>
+          </a:p>
+          <a:p>
+            <a:pPr algn="l">
+              <a:spcAft>
+                <a:spcPts val="300"/>
+              </a:spcAft>
+            </a:pPr>
+            <a:r>
+              <a:rPr sz="975" b="1" i="0">
+                <a:solidFill>
+                  <a:srgbClr val="1F2937"/>
+                </a:solidFill>
+                <a:latin typeface="Calibri"/>
+              </a:rPr>
+              <a:t>💡  關鍵觀察:</a:t>
+            </a:r>
+          </a:p>
+          <a:p>
+            <a:pPr algn="l">
+              <a:spcAft>
+                <a:spcPts val="0"/>
+              </a:spcAft>
+            </a:pPr>
+            <a:r>
+              <a:rPr sz="900" b="0" i="1">
+                <a:solidFill>
+                  <a:srgbClr val="374151"/>
+                </a:solidFill>
+                <a:latin typeface="Calibri"/>
+              </a:rPr>
+              <a:t>Claude 不會 dump 整份 JSON,挑出「開放時間」那一段。這是 LLM 對 tool result 的摘要 — agent 的靈魂。</a:t>
+            </a:r>
+          </a:p>
+        </p:txBody>
+      </p:sp>
+      <p:sp>
+        <p:nvSpPr>
+          <p:cNvPr id="10" name="Rounded Rectangle 9"/>
+          <p:cNvSpPr/>
+          <p:nvPr/>
+        </p:nvSpPr>
+        <p:spPr>
+          <a:xfrm>
+            <a:off x="4834890" y="1851660"/>
+            <a:ext cx="4011929" cy="2743200"/>
           </a:xfrm>
           <a:prstGeom prst="roundRect">
             <a:avLst>
@@ -4337,14 +5203,14 @@
       </p:sp>
       <p:sp>
         <p:nvSpPr>
-          <p:cNvPr id="8" name="TextBox 7"/>
-          <p:cNvSpPr txBox="1"/>
-          <p:nvPr/>
-        </p:nvSpPr>
-        <p:spPr>
-          <a:xfrm>
-            <a:off x="754380" y="1975104"/>
-            <a:ext cx="3737610" cy="377190"/>
+          <p:cNvPr id="11" name="TextBox 10"/>
+          <p:cNvSpPr txBox="1"/>
+          <p:nvPr/>
+        </p:nvSpPr>
+        <p:spPr>
+          <a:xfrm>
+            <a:off x="5006340" y="1975104"/>
+            <a:ext cx="3669029" cy="377190"/>
           </a:xfrm>
           <a:prstGeom prst="rect">
             <a:avLst/>
@@ -4365,65 +5231,21 @@
                 </a:solidFill>
                 <a:latin typeface="Arial Black"/>
               </a:rPr>
-              <a:t>📝  minimal — hello_tool.py</a:t>
-            </a:r>
-          </a:p>
-        </p:txBody>
-      </p:sp>
-      <p:sp>
-        <p:nvSpPr>
-          <p:cNvPr id="9" name="Rectangle 8"/>
-          <p:cNvSpPr/>
-          <p:nvPr/>
-        </p:nvSpPr>
-        <p:spPr>
-          <a:xfrm>
-            <a:off x="720090" y="2263139"/>
-            <a:ext cx="3806189" cy="1988819"/>
-          </a:xfrm>
-          <a:prstGeom prst="rect">
-            <a:avLst/>
-          </a:prstGeom>
-          <a:solidFill>
-            <a:srgbClr val="1A2138"/>
-          </a:solidFill>
-          <a:ln>
-            <a:noFill/>
-          </a:ln>
-          <a:effectLst/>
-        </p:spPr>
-        <p:style>
-          <a:lnRef idx="1">
-            <a:schemeClr val="accent1"/>
-          </a:lnRef>
-          <a:fillRef idx="3">
-            <a:schemeClr val="accent1"/>
-          </a:fillRef>
-          <a:effectRef idx="2">
-            <a:schemeClr val="accent1"/>
-          </a:effectRef>
-          <a:fontRef idx="minor">
-            <a:schemeClr val="lt1"/>
-          </a:fontRef>
-        </p:style>
-        <p:txBody>
-          <a:bodyPr rtlCol="0" anchor="ctr"/>
-          <a:lstStyle/>
-          <a:p>
-            <a:pPr algn="ctr"/>
-          </a:p>
-        </p:txBody>
-      </p:sp>
-      <p:sp>
-        <p:nvSpPr>
-          <p:cNvPr id="10" name="TextBox 9"/>
-          <p:cNvSpPr txBox="1"/>
-          <p:nvPr/>
-        </p:nvSpPr>
-        <p:spPr>
-          <a:xfrm>
-            <a:off x="939546" y="2414016"/>
-            <a:ext cx="3429000" cy="1700784"/>
+              <a:t>Step 2  換 JSON (15 min)</a:t>
+            </a:r>
+          </a:p>
+        </p:txBody>
+      </p:sp>
+      <p:sp>
+        <p:nvSpPr>
+          <p:cNvPr id="12" name="TextBox 11"/>
+          <p:cNvSpPr txBox="1"/>
+          <p:nvPr/>
+        </p:nvSpPr>
+        <p:spPr>
+          <a:xfrm>
+            <a:off x="5006340" y="2263139"/>
+            <a:ext cx="3703320" cy="2263139"/>
           </a:xfrm>
           <a:prstGeom prst="rect">
             <a:avLst/>
@@ -4438,561 +5260,136 @@
           <a:p>
             <a:pPr algn="l">
               <a:spcAft>
-                <a:spcPts val="75"/>
+                <a:spcPts val="150"/>
               </a:spcAft>
             </a:pPr>
             <a:r>
-              <a:rPr sz="750" b="0" i="0">
-                <a:solidFill>
-                  <a:srgbClr val="FB924D"/>
-                </a:solidFill>
-                <a:latin typeface="Consolas"/>
-              </a:rPr>
-              <a:t>@mcp.tool()</a:t>
+              <a:rPr sz="975" b="0" i="0">
+                <a:solidFill>
+                  <a:srgbClr val="374151"/>
+                </a:solidFill>
+                <a:latin typeface="Calibri"/>
+              </a:rPr>
+              <a:t>編輯:</a:t>
             </a:r>
           </a:p>
           <a:p>
             <a:pPr algn="l">
               <a:spcAft>
-                <a:spcPts val="75"/>
+                <a:spcPts val="900"/>
               </a:spcAft>
             </a:pPr>
             <a:r>
-              <a:rPr sz="750" b="0" i="0">
-                <a:solidFill>
-                  <a:srgbClr val="E5E7EB"/>
+              <a:rPr sz="900" b="1" i="0">
+                <a:solidFill>
+                  <a:srgbClr val="FB7048"/>
                 </a:solidFill>
                 <a:latin typeface="Consolas"/>
               </a:rPr>
-              <a:t>def get_english_center_info() -&gt; str:</a:t>
+              <a:t>mcp-server-py/data/english_center.json</a:t>
             </a:r>
           </a:p>
           <a:p>
             <a:pPr algn="l">
               <a:spcAft>
-                <a:spcPts val="75"/>
+                <a:spcPts val="300"/>
               </a:spcAft>
             </a:pPr>
             <a:r>
-              <a:rPr sz="750" b="0" i="0">
-                <a:solidFill>
-                  <a:srgbClr val="A8E1B4"/>
-                </a:solidFill>
-                <a:latin typeface="Consolas"/>
-              </a:rPr>
-              <a:t>    """取得中興大學英語自學暨</a:t>
+              <a:rPr sz="975" b="1" i="0">
+                <a:solidFill>
+                  <a:srgbClr val="1F2937"/>
+                </a:solidFill>
+                <a:latin typeface="Calibri"/>
+              </a:rPr>
+              <a:t>換成你自己的領域資料:</a:t>
             </a:r>
           </a:p>
           <a:p>
             <a:pPr algn="l">
               <a:spcAft>
-                <a:spcPts val="75"/>
+                <a:spcPts val="150"/>
               </a:spcAft>
             </a:pPr>
             <a:r>
-              <a:rPr sz="750" b="0" i="0">
-                <a:solidFill>
-                  <a:srgbClr val="A8E1B4"/>
-                </a:solidFill>
-                <a:latin typeface="Consolas"/>
-              </a:rPr>
-              <a:t>    檢定中心的完整資訊。</a:t>
+              <a:rPr sz="975" b="0" i="0">
+                <a:solidFill>
+                  <a:srgbClr val="374151"/>
+                </a:solidFill>
+                <a:latin typeface="Calibri"/>
+              </a:rPr>
+              <a:t>• 你的研究室介紹</a:t>
             </a:r>
           </a:p>
           <a:p>
             <a:pPr algn="l">
               <a:spcAft>
-                <a:spcPts val="75"/>
+                <a:spcPts val="150"/>
               </a:spcAft>
             </a:pPr>
             <a:r>
-              <a:rPr sz="750" b="0" i="0">
-                <a:solidFill>
-                  <a:srgbClr val="E5E7EB"/>
-                </a:solidFill>
-                <a:latin typeface="Consolas"/>
-              </a:rPr>
-              <a:t> </a:t>
+              <a:rPr sz="975" b="0" i="0">
+                <a:solidFill>
+                  <a:srgbClr val="374151"/>
+                </a:solidFill>
+                <a:latin typeface="Calibri"/>
+              </a:rPr>
+              <a:t>• 你教的一門課(大綱/作業/評分)</a:t>
             </a:r>
           </a:p>
           <a:p>
             <a:pPr algn="l">
               <a:spcAft>
-                <a:spcPts val="75"/>
+                <a:spcPts val="900"/>
               </a:spcAft>
             </a:pPr>
             <a:r>
-              <a:rPr sz="750" b="0" i="0">
-                <a:solidFill>
-                  <a:srgbClr val="A8E1B4"/>
-                </a:solidFill>
-                <a:latin typeface="Consolas"/>
-              </a:rPr>
-              <a:t>    回傳 JSON 字串,包含:</a:t>
+              <a:rPr sz="975" b="0" i="0">
+                <a:solidFill>
+                  <a:srgbClr val="374151"/>
+                </a:solidFill>
+                <a:latin typeface="Calibri"/>
+              </a:rPr>
+              <a:t>• 你系所的 FAQ / 研究成果清單</a:t>
             </a:r>
           </a:p>
           <a:p>
             <a:pPr algn="l">
               <a:spcAft>
-                <a:spcPts val="75"/>
+                <a:spcPts val="150"/>
               </a:spcAft>
             </a:pPr>
             <a:r>
-              <a:rPr sz="750" b="0" i="0">
-                <a:solidFill>
-                  <a:srgbClr val="A8E1B4"/>
-                </a:solidFill>
-                <a:latin typeface="Consolas"/>
-              </a:rPr>
-              <a:t>    名稱、開放時間、地點、設備…</a:t>
+              <a:rPr sz="900" b="1" i="0">
+                <a:solidFill>
+                  <a:srgbClr val="B91C1C"/>
+                </a:solidFill>
+                <a:latin typeface="Calibri"/>
+              </a:rPr>
+              <a:t>⚠ JSON 語法錯會卡住:</a:t>
             </a:r>
           </a:p>
           <a:p>
             <a:pPr algn="l">
               <a:spcAft>
-                <a:spcPts val="75"/>
+                <a:spcPts val="0"/>
               </a:spcAft>
             </a:pPr>
             <a:r>
-              <a:rPr sz="750" b="0" i="0">
-                <a:solidFill>
-                  <a:srgbClr val="A8E1B4"/>
+              <a:rPr sz="825" b="0" i="0">
+                <a:solidFill>
+                  <a:srgbClr val="B91C1C"/>
                 </a:solidFill>
                 <a:latin typeface="Consolas"/>
               </a:rPr>
-              <a:t>    使用情境:使用者詢問英語</a:t>
-            </a:r>
-          </a:p>
-          <a:p>
-            <a:pPr algn="l">
-              <a:spcAft>
-                <a:spcPts val="75"/>
-              </a:spcAft>
-            </a:pPr>
-            <a:r>
-              <a:rPr sz="750" b="0" i="0">
-                <a:solidFill>
-                  <a:srgbClr val="A8E1B4"/>
-                </a:solidFill>
-                <a:latin typeface="Consolas"/>
-              </a:rPr>
-              <a:t>    自學中心相關問題時呼叫。</a:t>
-            </a:r>
-          </a:p>
-          <a:p>
-            <a:pPr algn="l">
-              <a:spcAft>
-                <a:spcPts val="75"/>
-              </a:spcAft>
-            </a:pPr>
-            <a:r>
-              <a:rPr sz="750" b="0" i="0">
-                <a:solidFill>
-                  <a:srgbClr val="A8E1B4"/>
-                </a:solidFill>
-                <a:latin typeface="Consolas"/>
-              </a:rPr>
-              <a:t>    """</a:t>
-            </a:r>
-          </a:p>
-        </p:txBody>
-      </p:sp>
-      <p:sp>
-        <p:nvSpPr>
-          <p:cNvPr id="11" name="Rounded Rectangle 10"/>
-          <p:cNvSpPr/>
-          <p:nvPr/>
-        </p:nvSpPr>
-        <p:spPr>
-          <a:xfrm>
-            <a:off x="4834890" y="1851660"/>
-            <a:ext cx="4011929" cy="2468880"/>
-          </a:xfrm>
-          <a:prstGeom prst="roundRect">
-            <a:avLst>
-              <a:gd name="adj" fmla="val 10000"/>
-            </a:avLst>
-          </a:prstGeom>
-          <a:solidFill>
-            <a:srgbClr val="D4F7F0"/>
-          </a:solidFill>
-          <a:ln w="19050">
-            <a:solidFill>
-              <a:srgbClr val="0EA594"/>
-            </a:solidFill>
-          </a:ln>
-          <a:effectLst/>
-        </p:spPr>
-        <p:style>
-          <a:lnRef idx="1">
-            <a:schemeClr val="accent1"/>
-          </a:lnRef>
-          <a:fillRef idx="3">
-            <a:schemeClr val="accent1"/>
-          </a:fillRef>
-          <a:effectRef idx="2">
-            <a:schemeClr val="accent1"/>
-          </a:effectRef>
-          <a:fontRef idx="minor">
-            <a:schemeClr val="lt1"/>
-          </a:fontRef>
-        </p:style>
-        <p:txBody>
-          <a:bodyPr rtlCol="0" anchor="ctr"/>
-          <a:lstStyle/>
-          <a:p>
-            <a:pPr algn="ctr"/>
-          </a:p>
-        </p:txBody>
-      </p:sp>
-      <p:sp>
-        <p:nvSpPr>
-          <p:cNvPr id="12" name="TextBox 11"/>
-          <p:cNvSpPr txBox="1"/>
-          <p:nvPr/>
-        </p:nvSpPr>
-        <p:spPr>
-          <a:xfrm>
-            <a:off x="5006340" y="1975104"/>
-            <a:ext cx="3669029" cy="377190"/>
-          </a:xfrm>
-          <a:prstGeom prst="rect">
-            <a:avLst/>
-          </a:prstGeom>
-          <a:noFill/>
-        </p:spPr>
-        <p:txBody>
-          <a:bodyPr wrap="square" lIns="27432" rIns="27432" tIns="13716" bIns="13716" anchor="t">
-            <a:spAutoFit/>
-          </a:bodyPr>
-          <a:lstStyle/>
-          <a:p>
-            <a:pPr algn="l"/>
-            <a:r>
-              <a:rPr sz="1650" b="1" i="0">
-                <a:solidFill>
-                  <a:srgbClr val="0EA594"/>
-                </a:solidFill>
-                <a:latin typeface="Arial Black"/>
-              </a:rPr>
-              <a:t>📖  rich — teachers_tool.py</a:t>
-            </a:r>
-          </a:p>
-        </p:txBody>
-      </p:sp>
-      <p:sp>
-        <p:nvSpPr>
-          <p:cNvPr id="13" name="Rectangle 12"/>
-          <p:cNvSpPr/>
-          <p:nvPr/>
-        </p:nvSpPr>
-        <p:spPr>
-          <a:xfrm>
-            <a:off x="4937760" y="2263139"/>
-            <a:ext cx="3806189" cy="1988819"/>
-          </a:xfrm>
-          <a:prstGeom prst="rect">
-            <a:avLst/>
-          </a:prstGeom>
-          <a:solidFill>
-            <a:srgbClr val="1A2138"/>
-          </a:solidFill>
-          <a:ln>
-            <a:noFill/>
-          </a:ln>
-          <a:effectLst/>
-        </p:spPr>
-        <p:style>
-          <a:lnRef idx="1">
-            <a:schemeClr val="accent1"/>
-          </a:lnRef>
-          <a:fillRef idx="3">
-            <a:schemeClr val="accent1"/>
-          </a:fillRef>
-          <a:effectRef idx="2">
-            <a:schemeClr val="accent1"/>
-          </a:effectRef>
-          <a:fontRef idx="minor">
-            <a:schemeClr val="lt1"/>
-          </a:fontRef>
-        </p:style>
-        <p:txBody>
-          <a:bodyPr rtlCol="0" anchor="ctr"/>
-          <a:lstStyle/>
-          <a:p>
-            <a:pPr algn="ctr"/>
-          </a:p>
-        </p:txBody>
-      </p:sp>
-      <p:sp>
-        <p:nvSpPr>
-          <p:cNvPr id="14" name="TextBox 13"/>
-          <p:cNvSpPr txBox="1"/>
-          <p:nvPr/>
-        </p:nvSpPr>
-        <p:spPr>
-          <a:xfrm>
-            <a:off x="5157216" y="2414016"/>
-            <a:ext cx="3429000" cy="1700784"/>
-          </a:xfrm>
-          <a:prstGeom prst="rect">
-            <a:avLst/>
-          </a:prstGeom>
-          <a:noFill/>
-        </p:spPr>
-        <p:txBody>
-          <a:bodyPr wrap="square" lIns="27432" rIns="27432" tIns="13716" bIns="13716" anchor="t">
-            <a:spAutoFit/>
-          </a:bodyPr>
-          <a:lstStyle/>
-          <a:p>
-            <a:pPr algn="l">
-              <a:spcAft>
-                <a:spcPts val="75"/>
-              </a:spcAft>
-            </a:pPr>
-            <a:r>
-              <a:rPr sz="750" b="0" i="0">
-                <a:solidFill>
-                  <a:srgbClr val="FB924D"/>
-                </a:solidFill>
-                <a:latin typeface="Consolas"/>
-              </a:rPr>
-              <a:t>@mcp.tool()</a:t>
-            </a:r>
-          </a:p>
-          <a:p>
-            <a:pPr algn="l">
-              <a:spcAft>
-                <a:spcPts val="75"/>
-              </a:spcAft>
-            </a:pPr>
-            <a:r>
-              <a:rPr sz="750" b="0" i="0">
-                <a:solidFill>
-                  <a:srgbClr val="E5E7EB"/>
-                </a:solidFill>
-                <a:latin typeface="Consolas"/>
-              </a:rPr>
-              <a:t>def get_teacher_detail(name: str) -&gt; str:</a:t>
-            </a:r>
-          </a:p>
-          <a:p>
-            <a:pPr algn="l">
-              <a:spcAft>
-                <a:spcPts val="75"/>
-              </a:spcAft>
-            </a:pPr>
-            <a:r>
-              <a:rPr sz="750" b="0" i="0">
-                <a:solidFill>
-                  <a:srgbClr val="A8E1B4"/>
-                </a:solidFill>
-                <a:latin typeface="Consolas"/>
-              </a:rPr>
-              <a:t>    """取得指定教授的完整資訊</a:t>
-            </a:r>
-          </a:p>
-          <a:p>
-            <a:pPr algn="l">
-              <a:spcAft>
-                <a:spcPts val="75"/>
-              </a:spcAft>
-            </a:pPr>
-            <a:r>
-              <a:rPr sz="750" b="0" i="0">
-                <a:solidFill>
-                  <a:srgbClr val="A8E1B4"/>
-                </a:solidFill>
-                <a:latin typeface="Consolas"/>
-              </a:rPr>
-              <a:t>    (email、辦公室、研究領域)。</a:t>
-            </a:r>
-          </a:p>
-          <a:p>
-            <a:pPr algn="l">
-              <a:spcAft>
-                <a:spcPts val="75"/>
-              </a:spcAft>
-            </a:pPr>
-            <a:r>
-              <a:rPr sz="750" b="0" i="0">
-                <a:solidFill>
-                  <a:srgbClr val="A8E1B4"/>
-                </a:solidFill>
-                <a:latin typeface="Consolas"/>
-              </a:rPr>
-              <a:t>    使用情境:使用者問某位教授</a:t>
-            </a:r>
-          </a:p>
-          <a:p>
-            <a:pPr algn="l">
-              <a:spcAft>
-                <a:spcPts val="75"/>
-              </a:spcAft>
-            </a:pPr>
-            <a:r>
-              <a:rPr sz="750" b="0" i="0">
-                <a:solidFill>
-                  <a:srgbClr val="A8E1B4"/>
-                </a:solidFill>
-                <a:latin typeface="Consolas"/>
-              </a:rPr>
-              <a:t>    的聯絡方式或完整資料時呼叫。</a:t>
-            </a:r>
-          </a:p>
-          <a:p>
-            <a:pPr algn="l">
-              <a:spcAft>
-                <a:spcPts val="75"/>
-              </a:spcAft>
-            </a:pPr>
-            <a:r>
-              <a:rPr sz="750" b="0" i="0">
-                <a:solidFill>
-                  <a:srgbClr val="A8E1B4"/>
-                </a:solidFill>
-                <a:latin typeface="Consolas"/>
-              </a:rPr>
-              <a:t>    通常在 search_teachers 找到</a:t>
-            </a:r>
-          </a:p>
-          <a:p>
-            <a:pPr algn="l">
-              <a:spcAft>
-                <a:spcPts val="75"/>
-              </a:spcAft>
-            </a:pPr>
-            <a:r>
-              <a:rPr sz="750" b="0" i="0">
-                <a:solidFill>
-                  <a:srgbClr val="FB924D"/>
-                </a:solidFill>
-                <a:latin typeface="Consolas"/>
-              </a:rPr>
-              <a:t>    候選名單後再呼叫。 ← 跨工具線索</a:t>
-            </a:r>
-          </a:p>
-          <a:p>
-            <a:pPr algn="l">
-              <a:spcAft>
-                <a:spcPts val="75"/>
-              </a:spcAft>
-            </a:pPr>
-            <a:r>
-              <a:rPr sz="750" b="0" i="0">
-                <a:solidFill>
-                  <a:srgbClr val="E5E7EB"/>
-                </a:solidFill>
-                <a:latin typeface="Consolas"/>
-              </a:rPr>
-              <a:t>    Args:</a:t>
-            </a:r>
-          </a:p>
-          <a:p>
-            <a:pPr algn="l">
-              <a:spcAft>
-                <a:spcPts val="75"/>
-              </a:spcAft>
-            </a:pPr>
-            <a:r>
-              <a:rPr sz="750" b="0" i="0">
-                <a:solidFill>
-                  <a:srgbClr val="A8E1B4"/>
-                </a:solidFill>
-                <a:latin typeface="Consolas"/>
-              </a:rPr>
-              <a:t>        name: 教授姓名(完整中文)。</a:t>
-            </a:r>
-          </a:p>
-        </p:txBody>
-      </p:sp>
-      <p:sp>
-        <p:nvSpPr>
-          <p:cNvPr id="15" name="Rounded Rectangle 14"/>
-          <p:cNvSpPr/>
-          <p:nvPr/>
-        </p:nvSpPr>
-        <p:spPr>
-          <a:xfrm>
-            <a:off x="582930" y="4423410"/>
-            <a:ext cx="8229600" cy="377190"/>
-          </a:xfrm>
-          <a:prstGeom prst="roundRect">
-            <a:avLst>
-              <a:gd name="adj" fmla="val 10000"/>
-            </a:avLst>
-          </a:prstGeom>
-          <a:solidFill>
-            <a:srgbClr val="EEE8FF"/>
-          </a:solidFill>
-          <a:ln w="19050">
-            <a:solidFill>
-              <a:srgbClr val="7B5CF5"/>
-            </a:solidFill>
-          </a:ln>
-          <a:effectLst/>
-        </p:spPr>
-        <p:style>
-          <a:lnRef idx="1">
-            <a:schemeClr val="accent1"/>
-          </a:lnRef>
-          <a:fillRef idx="3">
-            <a:schemeClr val="accent1"/>
-          </a:fillRef>
-          <a:effectRef idx="2">
-            <a:schemeClr val="accent1"/>
-          </a:effectRef>
-          <a:fontRef idx="minor">
-            <a:schemeClr val="lt1"/>
-          </a:fontRef>
-        </p:style>
-        <p:txBody>
-          <a:bodyPr rtlCol="0" anchor="ctr"/>
-          <a:lstStyle/>
-          <a:p>
-            <a:pPr algn="ctr"/>
-          </a:p>
-        </p:txBody>
-      </p:sp>
-      <p:sp>
-        <p:nvSpPr>
-          <p:cNvPr id="16" name="TextBox 15"/>
-          <p:cNvSpPr txBox="1"/>
-          <p:nvPr/>
-        </p:nvSpPr>
-        <p:spPr>
-          <a:xfrm>
-            <a:off x="788669" y="4423410"/>
-            <a:ext cx="7818120" cy="377190"/>
-          </a:xfrm>
-          <a:prstGeom prst="rect">
-            <a:avLst/>
-          </a:prstGeom>
-          <a:noFill/>
-        </p:spPr>
-        <p:txBody>
-          <a:bodyPr wrap="square" lIns="27432" rIns="27432" tIns="13716" bIns="13716" anchor="ctr">
-            <a:spAutoFit/>
-          </a:bodyPr>
-          <a:lstStyle/>
-          <a:p>
-            <a:pPr algn="l"/>
-            <a:r>
-              <a:rPr sz="975" b="1" i="0">
-                <a:solidFill>
-                  <a:srgbClr val="7B5CF5"/>
-                </a:solidFill>
-                <a:latin typeface="Calibri"/>
-              </a:rPr>
-              <a:t>▶  影響 LLM 行為的 3 元素:使用情境(該不該叫) / Args 描述(怎麼填) / 跨工具線索(呼叫順序)</a:t>
-            </a:r>
-          </a:p>
-        </p:txBody>
-      </p:sp>
-      <p:sp>
-        <p:nvSpPr>
-          <p:cNvPr id="17" name="TextBox 16"/>
+              <a:t>python3 -m json.tool data/xxx.json</a:t>
+            </a:r>
+          </a:p>
+        </p:txBody>
+      </p:sp>
+      <p:sp>
+        <p:nvSpPr>
+          <p:cNvPr id="13" name="TextBox 12"/>
           <p:cNvSpPr txBox="1"/>
           <p:nvPr/>
         </p:nvSpPr>
@@ -5020,7 +5417,7 @@
                 </a:solidFill>
                 <a:latin typeface="Calibri"/>
               </a:rPr>
-              <a:t>11 / 12</a:t>
+              <a:t>11 / 13</a:t>
             </a:r>
           </a:p>
         </p:txBody>
@@ -5101,7 +5498,7 @@
             <a:avLst/>
           </a:prstGeom>
           <a:solidFill>
-            <a:srgbClr val="7B5CF5"/>
+            <a:srgbClr val="EF4444"/>
           </a:solidFill>
           <a:ln>
             <a:noFill/>
@@ -5160,7 +5557,7 @@
                 </a:solidFill>
                 <a:latin typeface="Calibri"/>
               </a:rPr>
-              <a:t>★   L 2 / L 3   P R E V I E W</a:t>
+              <a:t>03 · ③   L A B   1   ·   S T E P   3   ·   D O C S T R I N G</a:t>
             </a:r>
           </a:p>
         </p:txBody>
@@ -5189,13 +5586,13 @@
           <a:p>
             <a:pPr algn="l"/>
             <a:r>
-              <a:rPr sz="3150" b="1" i="0">
+              <a:rPr sz="2250" b="1" i="0">
                 <a:solidFill>
                   <a:srgbClr val="1F2937"/>
                 </a:solidFill>
                 <a:latin typeface="Arial Black"/>
               </a:rPr>
-              <a:t>L2 / L3 — 帶回去繼續深入</a:t>
+              <a:t>Step 3:改 docstring (10 min)</a:t>
             </a:r>
           </a:p>
         </p:txBody>
@@ -5230,7 +5627,7 @@
                 </a:solidFill>
                 <a:latin typeface="Calibri"/>
               </a:rPr>
-              <a:t>課後自修,參考 mini-project/docs/labs/</a:t>
+              <a:t>直接拿 repo 兩支真實工具對照 —— 同樣語法、教 LLM 不同事</a:t>
             </a:r>
           </a:p>
         </p:txBody>
@@ -5243,8 +5640,318 @@
         </p:nvSpPr>
         <p:spPr>
           <a:xfrm>
-            <a:off x="377190" y="1851660"/>
-            <a:ext cx="2708910" cy="2537460"/>
+            <a:off x="582930" y="1851660"/>
+            <a:ext cx="4080510" cy="2468880"/>
+          </a:xfrm>
+          <a:prstGeom prst="roundRect">
+            <a:avLst>
+              <a:gd name="adj" fmla="val 10000"/>
+            </a:avLst>
+          </a:prstGeom>
+          <a:solidFill>
+            <a:srgbClr val="FFE7DB"/>
+          </a:solidFill>
+          <a:ln w="19050">
+            <a:solidFill>
+              <a:srgbClr val="FB7048"/>
+            </a:solidFill>
+          </a:ln>
+          <a:effectLst/>
+        </p:spPr>
+        <p:style>
+          <a:lnRef idx="1">
+            <a:schemeClr val="accent1"/>
+          </a:lnRef>
+          <a:fillRef idx="3">
+            <a:schemeClr val="accent1"/>
+          </a:fillRef>
+          <a:effectRef idx="2">
+            <a:schemeClr val="accent1"/>
+          </a:effectRef>
+          <a:fontRef idx="minor">
+            <a:schemeClr val="lt1"/>
+          </a:fontRef>
+        </p:style>
+        <p:txBody>
+          <a:bodyPr rtlCol="0" anchor="ctr"/>
+          <a:lstStyle/>
+          <a:p>
+            <a:pPr algn="ctr"/>
+          </a:p>
+        </p:txBody>
+      </p:sp>
+      <p:sp>
+        <p:nvSpPr>
+          <p:cNvPr id="8" name="TextBox 7"/>
+          <p:cNvSpPr txBox="1"/>
+          <p:nvPr/>
+        </p:nvSpPr>
+        <p:spPr>
+          <a:xfrm>
+            <a:off x="754380" y="1975104"/>
+            <a:ext cx="3737610" cy="377190"/>
+          </a:xfrm>
+          <a:prstGeom prst="rect">
+            <a:avLst/>
+          </a:prstGeom>
+          <a:noFill/>
+        </p:spPr>
+        <p:txBody>
+          <a:bodyPr wrap="square" lIns="27432" rIns="27432" tIns="13716" bIns="13716" anchor="t">
+            <a:spAutoFit/>
+          </a:bodyPr>
+          <a:lstStyle/>
+          <a:p>
+            <a:pPr algn="l"/>
+            <a:r>
+              <a:rPr sz="1650" b="1" i="0">
+                <a:solidFill>
+                  <a:srgbClr val="FB7048"/>
+                </a:solidFill>
+                <a:latin typeface="Arial Black"/>
+              </a:rPr>
+              <a:t>📝  minimal — hello_tool.py</a:t>
+            </a:r>
+          </a:p>
+        </p:txBody>
+      </p:sp>
+      <p:sp>
+        <p:nvSpPr>
+          <p:cNvPr id="9" name="Rectangle 8"/>
+          <p:cNvSpPr/>
+          <p:nvPr/>
+        </p:nvSpPr>
+        <p:spPr>
+          <a:xfrm>
+            <a:off x="720090" y="2263139"/>
+            <a:ext cx="3806189" cy="1988819"/>
+          </a:xfrm>
+          <a:prstGeom prst="rect">
+            <a:avLst/>
+          </a:prstGeom>
+          <a:solidFill>
+            <a:srgbClr val="1A2138"/>
+          </a:solidFill>
+          <a:ln>
+            <a:noFill/>
+          </a:ln>
+          <a:effectLst/>
+        </p:spPr>
+        <p:style>
+          <a:lnRef idx="1">
+            <a:schemeClr val="accent1"/>
+          </a:lnRef>
+          <a:fillRef idx="3">
+            <a:schemeClr val="accent1"/>
+          </a:fillRef>
+          <a:effectRef idx="2">
+            <a:schemeClr val="accent1"/>
+          </a:effectRef>
+          <a:fontRef idx="minor">
+            <a:schemeClr val="lt1"/>
+          </a:fontRef>
+        </p:style>
+        <p:txBody>
+          <a:bodyPr rtlCol="0" anchor="ctr"/>
+          <a:lstStyle/>
+          <a:p>
+            <a:pPr algn="ctr"/>
+          </a:p>
+        </p:txBody>
+      </p:sp>
+      <p:sp>
+        <p:nvSpPr>
+          <p:cNvPr id="10" name="TextBox 9"/>
+          <p:cNvSpPr txBox="1"/>
+          <p:nvPr/>
+        </p:nvSpPr>
+        <p:spPr>
+          <a:xfrm>
+            <a:off x="939546" y="2414016"/>
+            <a:ext cx="3429000" cy="1700784"/>
+          </a:xfrm>
+          <a:prstGeom prst="rect">
+            <a:avLst/>
+          </a:prstGeom>
+          <a:noFill/>
+        </p:spPr>
+        <p:txBody>
+          <a:bodyPr wrap="square" lIns="27432" rIns="27432" tIns="13716" bIns="13716" anchor="t">
+            <a:spAutoFit/>
+          </a:bodyPr>
+          <a:lstStyle/>
+          <a:p>
+            <a:pPr algn="l">
+              <a:spcAft>
+                <a:spcPts val="75"/>
+              </a:spcAft>
+            </a:pPr>
+            <a:r>
+              <a:rPr sz="750" b="0" i="0">
+                <a:solidFill>
+                  <a:srgbClr val="FB924D"/>
+                </a:solidFill>
+                <a:latin typeface="Consolas"/>
+              </a:rPr>
+              <a:t>@mcp.tool()</a:t>
+            </a:r>
+          </a:p>
+          <a:p>
+            <a:pPr algn="l">
+              <a:spcAft>
+                <a:spcPts val="75"/>
+              </a:spcAft>
+            </a:pPr>
+            <a:r>
+              <a:rPr sz="750" b="0" i="0">
+                <a:solidFill>
+                  <a:srgbClr val="E5E7EB"/>
+                </a:solidFill>
+                <a:latin typeface="Consolas"/>
+              </a:rPr>
+              <a:t>def get_english_center_info() -&gt; str:</a:t>
+            </a:r>
+          </a:p>
+          <a:p>
+            <a:pPr algn="l">
+              <a:spcAft>
+                <a:spcPts val="75"/>
+              </a:spcAft>
+            </a:pPr>
+            <a:r>
+              <a:rPr sz="750" b="0" i="0">
+                <a:solidFill>
+                  <a:srgbClr val="A8E1B4"/>
+                </a:solidFill>
+                <a:latin typeface="Consolas"/>
+              </a:rPr>
+              <a:t>    """取得中興大學英語自學暨</a:t>
+            </a:r>
+          </a:p>
+          <a:p>
+            <a:pPr algn="l">
+              <a:spcAft>
+                <a:spcPts val="75"/>
+              </a:spcAft>
+            </a:pPr>
+            <a:r>
+              <a:rPr sz="750" b="0" i="0">
+                <a:solidFill>
+                  <a:srgbClr val="A8E1B4"/>
+                </a:solidFill>
+                <a:latin typeface="Consolas"/>
+              </a:rPr>
+              <a:t>    檢定中心的完整資訊。</a:t>
+            </a:r>
+          </a:p>
+          <a:p>
+            <a:pPr algn="l">
+              <a:spcAft>
+                <a:spcPts val="75"/>
+              </a:spcAft>
+            </a:pPr>
+            <a:r>
+              <a:rPr sz="750" b="0" i="0">
+                <a:solidFill>
+                  <a:srgbClr val="E5E7EB"/>
+                </a:solidFill>
+                <a:latin typeface="Consolas"/>
+              </a:rPr>
+              <a:t> </a:t>
+            </a:r>
+          </a:p>
+          <a:p>
+            <a:pPr algn="l">
+              <a:spcAft>
+                <a:spcPts val="75"/>
+              </a:spcAft>
+            </a:pPr>
+            <a:r>
+              <a:rPr sz="750" b="0" i="0">
+                <a:solidFill>
+                  <a:srgbClr val="A8E1B4"/>
+                </a:solidFill>
+                <a:latin typeface="Consolas"/>
+              </a:rPr>
+              <a:t>    回傳 JSON 字串,包含:</a:t>
+            </a:r>
+          </a:p>
+          <a:p>
+            <a:pPr algn="l">
+              <a:spcAft>
+                <a:spcPts val="75"/>
+              </a:spcAft>
+            </a:pPr>
+            <a:r>
+              <a:rPr sz="750" b="0" i="0">
+                <a:solidFill>
+                  <a:srgbClr val="A8E1B4"/>
+                </a:solidFill>
+                <a:latin typeface="Consolas"/>
+              </a:rPr>
+              <a:t>    名稱、開放時間、地點、設備…</a:t>
+            </a:r>
+          </a:p>
+          <a:p>
+            <a:pPr algn="l">
+              <a:spcAft>
+                <a:spcPts val="75"/>
+              </a:spcAft>
+            </a:pPr>
+            <a:r>
+              <a:rPr sz="750" b="0" i="0">
+                <a:solidFill>
+                  <a:srgbClr val="A8E1B4"/>
+                </a:solidFill>
+                <a:latin typeface="Consolas"/>
+              </a:rPr>
+              <a:t>    使用情境:使用者詢問英語</a:t>
+            </a:r>
+          </a:p>
+          <a:p>
+            <a:pPr algn="l">
+              <a:spcAft>
+                <a:spcPts val="75"/>
+              </a:spcAft>
+            </a:pPr>
+            <a:r>
+              <a:rPr sz="750" b="0" i="0">
+                <a:solidFill>
+                  <a:srgbClr val="A8E1B4"/>
+                </a:solidFill>
+                <a:latin typeface="Consolas"/>
+              </a:rPr>
+              <a:t>    自學中心相關問題時呼叫。</a:t>
+            </a:r>
+          </a:p>
+          <a:p>
+            <a:pPr algn="l">
+              <a:spcAft>
+                <a:spcPts val="75"/>
+              </a:spcAft>
+            </a:pPr>
+            <a:r>
+              <a:rPr sz="750" b="0" i="0">
+                <a:solidFill>
+                  <a:srgbClr val="A8E1B4"/>
+                </a:solidFill>
+                <a:latin typeface="Consolas"/>
+              </a:rPr>
+              <a:t>    """</a:t>
+            </a:r>
+          </a:p>
+        </p:txBody>
+      </p:sp>
+      <p:sp>
+        <p:nvSpPr>
+          <p:cNvPr id="11" name="Rounded Rectangle 10"/>
+          <p:cNvSpPr/>
+          <p:nvPr/>
+        </p:nvSpPr>
+        <p:spPr>
+          <a:xfrm>
+            <a:off x="4834890" y="1851660"/>
+            <a:ext cx="4011929" cy="2468880"/>
           </a:xfrm>
           <a:prstGeom prst="roundRect">
             <a:avLst>
@@ -5285,6 +5992,644 @@
       </p:sp>
       <p:sp>
         <p:nvSpPr>
+          <p:cNvPr id="12" name="TextBox 11"/>
+          <p:cNvSpPr txBox="1"/>
+          <p:nvPr/>
+        </p:nvSpPr>
+        <p:spPr>
+          <a:xfrm>
+            <a:off x="5006340" y="1975104"/>
+            <a:ext cx="3669029" cy="377190"/>
+          </a:xfrm>
+          <a:prstGeom prst="rect">
+            <a:avLst/>
+          </a:prstGeom>
+          <a:noFill/>
+        </p:spPr>
+        <p:txBody>
+          <a:bodyPr wrap="square" lIns="27432" rIns="27432" tIns="13716" bIns="13716" anchor="t">
+            <a:spAutoFit/>
+          </a:bodyPr>
+          <a:lstStyle/>
+          <a:p>
+            <a:pPr algn="l"/>
+            <a:r>
+              <a:rPr sz="1650" b="1" i="0">
+                <a:solidFill>
+                  <a:srgbClr val="0EA594"/>
+                </a:solidFill>
+                <a:latin typeface="Arial Black"/>
+              </a:rPr>
+              <a:t>📖  rich — teachers_tool.py</a:t>
+            </a:r>
+          </a:p>
+        </p:txBody>
+      </p:sp>
+      <p:sp>
+        <p:nvSpPr>
+          <p:cNvPr id="13" name="Rectangle 12"/>
+          <p:cNvSpPr/>
+          <p:nvPr/>
+        </p:nvSpPr>
+        <p:spPr>
+          <a:xfrm>
+            <a:off x="4937760" y="2263139"/>
+            <a:ext cx="3806189" cy="1988819"/>
+          </a:xfrm>
+          <a:prstGeom prst="rect">
+            <a:avLst/>
+          </a:prstGeom>
+          <a:solidFill>
+            <a:srgbClr val="1A2138"/>
+          </a:solidFill>
+          <a:ln>
+            <a:noFill/>
+          </a:ln>
+          <a:effectLst/>
+        </p:spPr>
+        <p:style>
+          <a:lnRef idx="1">
+            <a:schemeClr val="accent1"/>
+          </a:lnRef>
+          <a:fillRef idx="3">
+            <a:schemeClr val="accent1"/>
+          </a:fillRef>
+          <a:effectRef idx="2">
+            <a:schemeClr val="accent1"/>
+          </a:effectRef>
+          <a:fontRef idx="minor">
+            <a:schemeClr val="lt1"/>
+          </a:fontRef>
+        </p:style>
+        <p:txBody>
+          <a:bodyPr rtlCol="0" anchor="ctr"/>
+          <a:lstStyle/>
+          <a:p>
+            <a:pPr algn="ctr"/>
+          </a:p>
+        </p:txBody>
+      </p:sp>
+      <p:sp>
+        <p:nvSpPr>
+          <p:cNvPr id="14" name="TextBox 13"/>
+          <p:cNvSpPr txBox="1"/>
+          <p:nvPr/>
+        </p:nvSpPr>
+        <p:spPr>
+          <a:xfrm>
+            <a:off x="5157216" y="2414016"/>
+            <a:ext cx="3429000" cy="1700784"/>
+          </a:xfrm>
+          <a:prstGeom prst="rect">
+            <a:avLst/>
+          </a:prstGeom>
+          <a:noFill/>
+        </p:spPr>
+        <p:txBody>
+          <a:bodyPr wrap="square" lIns="27432" rIns="27432" tIns="13716" bIns="13716" anchor="t">
+            <a:spAutoFit/>
+          </a:bodyPr>
+          <a:lstStyle/>
+          <a:p>
+            <a:pPr algn="l">
+              <a:spcAft>
+                <a:spcPts val="75"/>
+              </a:spcAft>
+            </a:pPr>
+            <a:r>
+              <a:rPr sz="750" b="0" i="0">
+                <a:solidFill>
+                  <a:srgbClr val="FB924D"/>
+                </a:solidFill>
+                <a:latin typeface="Consolas"/>
+              </a:rPr>
+              <a:t>@mcp.tool()</a:t>
+            </a:r>
+          </a:p>
+          <a:p>
+            <a:pPr algn="l">
+              <a:spcAft>
+                <a:spcPts val="75"/>
+              </a:spcAft>
+            </a:pPr>
+            <a:r>
+              <a:rPr sz="750" b="0" i="0">
+                <a:solidFill>
+                  <a:srgbClr val="E5E7EB"/>
+                </a:solidFill>
+                <a:latin typeface="Consolas"/>
+              </a:rPr>
+              <a:t>def get_teacher_detail(name: str) -&gt; str:</a:t>
+            </a:r>
+          </a:p>
+          <a:p>
+            <a:pPr algn="l">
+              <a:spcAft>
+                <a:spcPts val="75"/>
+              </a:spcAft>
+            </a:pPr>
+            <a:r>
+              <a:rPr sz="750" b="0" i="0">
+                <a:solidFill>
+                  <a:srgbClr val="A8E1B4"/>
+                </a:solidFill>
+                <a:latin typeface="Consolas"/>
+              </a:rPr>
+              <a:t>    """取得指定教授的完整資訊</a:t>
+            </a:r>
+          </a:p>
+          <a:p>
+            <a:pPr algn="l">
+              <a:spcAft>
+                <a:spcPts val="75"/>
+              </a:spcAft>
+            </a:pPr>
+            <a:r>
+              <a:rPr sz="750" b="0" i="0">
+                <a:solidFill>
+                  <a:srgbClr val="A8E1B4"/>
+                </a:solidFill>
+                <a:latin typeface="Consolas"/>
+              </a:rPr>
+              <a:t>    (email、辦公室、研究領域)。</a:t>
+            </a:r>
+          </a:p>
+          <a:p>
+            <a:pPr algn="l">
+              <a:spcAft>
+                <a:spcPts val="75"/>
+              </a:spcAft>
+            </a:pPr>
+            <a:r>
+              <a:rPr sz="750" b="0" i="0">
+                <a:solidFill>
+                  <a:srgbClr val="A8E1B4"/>
+                </a:solidFill>
+                <a:latin typeface="Consolas"/>
+              </a:rPr>
+              <a:t>    使用情境:使用者問某位教授</a:t>
+            </a:r>
+          </a:p>
+          <a:p>
+            <a:pPr algn="l">
+              <a:spcAft>
+                <a:spcPts val="75"/>
+              </a:spcAft>
+            </a:pPr>
+            <a:r>
+              <a:rPr sz="750" b="0" i="0">
+                <a:solidFill>
+                  <a:srgbClr val="A8E1B4"/>
+                </a:solidFill>
+                <a:latin typeface="Consolas"/>
+              </a:rPr>
+              <a:t>    的聯絡方式或完整資料時呼叫。</a:t>
+            </a:r>
+          </a:p>
+          <a:p>
+            <a:pPr algn="l">
+              <a:spcAft>
+                <a:spcPts val="75"/>
+              </a:spcAft>
+            </a:pPr>
+            <a:r>
+              <a:rPr sz="750" b="0" i="0">
+                <a:solidFill>
+                  <a:srgbClr val="A8E1B4"/>
+                </a:solidFill>
+                <a:latin typeface="Consolas"/>
+              </a:rPr>
+              <a:t>    通常在 search_teachers 找到</a:t>
+            </a:r>
+          </a:p>
+          <a:p>
+            <a:pPr algn="l">
+              <a:spcAft>
+                <a:spcPts val="75"/>
+              </a:spcAft>
+            </a:pPr>
+            <a:r>
+              <a:rPr sz="750" b="0" i="0">
+                <a:solidFill>
+                  <a:srgbClr val="FB924D"/>
+                </a:solidFill>
+                <a:latin typeface="Consolas"/>
+              </a:rPr>
+              <a:t>    候選名單後再呼叫。 ← 跨工具線索</a:t>
+            </a:r>
+          </a:p>
+          <a:p>
+            <a:pPr algn="l">
+              <a:spcAft>
+                <a:spcPts val="75"/>
+              </a:spcAft>
+            </a:pPr>
+            <a:r>
+              <a:rPr sz="750" b="0" i="0">
+                <a:solidFill>
+                  <a:srgbClr val="E5E7EB"/>
+                </a:solidFill>
+                <a:latin typeface="Consolas"/>
+              </a:rPr>
+              <a:t>    Args:</a:t>
+            </a:r>
+          </a:p>
+          <a:p>
+            <a:pPr algn="l">
+              <a:spcAft>
+                <a:spcPts val="75"/>
+              </a:spcAft>
+            </a:pPr>
+            <a:r>
+              <a:rPr sz="750" b="0" i="0">
+                <a:solidFill>
+                  <a:srgbClr val="A8E1B4"/>
+                </a:solidFill>
+                <a:latin typeface="Consolas"/>
+              </a:rPr>
+              <a:t>        name: 教授姓名(完整中文)。</a:t>
+            </a:r>
+          </a:p>
+        </p:txBody>
+      </p:sp>
+      <p:sp>
+        <p:nvSpPr>
+          <p:cNvPr id="15" name="Rounded Rectangle 14"/>
+          <p:cNvSpPr/>
+          <p:nvPr/>
+        </p:nvSpPr>
+        <p:spPr>
+          <a:xfrm>
+            <a:off x="582930" y="4423410"/>
+            <a:ext cx="8229600" cy="377190"/>
+          </a:xfrm>
+          <a:prstGeom prst="roundRect">
+            <a:avLst>
+              <a:gd name="adj" fmla="val 10000"/>
+            </a:avLst>
+          </a:prstGeom>
+          <a:solidFill>
+            <a:srgbClr val="EEE8FF"/>
+          </a:solidFill>
+          <a:ln w="19050">
+            <a:solidFill>
+              <a:srgbClr val="7B5CF5"/>
+            </a:solidFill>
+          </a:ln>
+          <a:effectLst/>
+        </p:spPr>
+        <p:style>
+          <a:lnRef idx="1">
+            <a:schemeClr val="accent1"/>
+          </a:lnRef>
+          <a:fillRef idx="3">
+            <a:schemeClr val="accent1"/>
+          </a:fillRef>
+          <a:effectRef idx="2">
+            <a:schemeClr val="accent1"/>
+          </a:effectRef>
+          <a:fontRef idx="minor">
+            <a:schemeClr val="lt1"/>
+          </a:fontRef>
+        </p:style>
+        <p:txBody>
+          <a:bodyPr rtlCol="0" anchor="ctr"/>
+          <a:lstStyle/>
+          <a:p>
+            <a:pPr algn="ctr"/>
+          </a:p>
+        </p:txBody>
+      </p:sp>
+      <p:sp>
+        <p:nvSpPr>
+          <p:cNvPr id="16" name="TextBox 15"/>
+          <p:cNvSpPr txBox="1"/>
+          <p:nvPr/>
+        </p:nvSpPr>
+        <p:spPr>
+          <a:xfrm>
+            <a:off x="788669" y="4423410"/>
+            <a:ext cx="7818120" cy="377190"/>
+          </a:xfrm>
+          <a:prstGeom prst="rect">
+            <a:avLst/>
+          </a:prstGeom>
+          <a:noFill/>
+        </p:spPr>
+        <p:txBody>
+          <a:bodyPr wrap="square" lIns="27432" rIns="27432" tIns="13716" bIns="13716" anchor="ctr">
+            <a:spAutoFit/>
+          </a:bodyPr>
+          <a:lstStyle/>
+          <a:p>
+            <a:pPr algn="l"/>
+            <a:r>
+              <a:rPr sz="975" b="1" i="0">
+                <a:solidFill>
+                  <a:srgbClr val="7B5CF5"/>
+                </a:solidFill>
+                <a:latin typeface="Calibri"/>
+              </a:rPr>
+              <a:t>▶  影響 LLM 行為的 3 元素:使用情境(該不該叫) / Args 描述(怎麼填) / 跨工具線索(呼叫順序)</a:t>
+            </a:r>
+          </a:p>
+        </p:txBody>
+      </p:sp>
+      <p:sp>
+        <p:nvSpPr>
+          <p:cNvPr id="17" name="TextBox 16"/>
+          <p:cNvSpPr txBox="1"/>
+          <p:nvPr/>
+        </p:nvSpPr>
+        <p:spPr>
+          <a:xfrm>
+            <a:off x="7955279" y="4766310"/>
+            <a:ext cx="1028700" cy="240029"/>
+          </a:xfrm>
+          <a:prstGeom prst="rect">
+            <a:avLst/>
+          </a:prstGeom>
+          <a:noFill/>
+        </p:spPr>
+        <p:txBody>
+          <a:bodyPr wrap="square" lIns="27432" rIns="27432" tIns="13716" bIns="13716" anchor="t">
+            <a:spAutoFit/>
+          </a:bodyPr>
+          <a:lstStyle/>
+          <a:p>
+            <a:pPr algn="r"/>
+            <a:r>
+              <a:rPr sz="1050" b="0" i="0">
+                <a:solidFill>
+                  <a:srgbClr val="9CA3AF"/>
+                </a:solidFill>
+                <a:latin typeface="Calibri"/>
+              </a:rPr>
+              <a:t>12 / 13</a:t>
+            </a:r>
+          </a:p>
+        </p:txBody>
+      </p:sp>
+    </p:spTree>
+  </p:cSld>
+  <p:clrMapOvr>
+    <a:masterClrMapping/>
+  </p:clrMapOvr>
+</p:sld>
+</file>
+
+<file path=ppt/slides/slide13.xml><?xml version="1.0" encoding="utf-8"?>
+<p:sld xmlns:a="http://schemas.openxmlformats.org/drawingml/2006/main" xmlns:p="http://schemas.openxmlformats.org/presentationml/2006/main" xmlns:r="http://schemas.openxmlformats.org/officeDocument/2006/relationships">
+  <p:cSld>
+    <p:spTree>
+      <p:nvGrpSpPr>
+        <p:cNvPr id="1" name=""/>
+        <p:cNvGrpSpPr/>
+        <p:nvPr/>
+      </p:nvGrpSpPr>
+      <p:grpSpPr/>
+      <p:sp>
+        <p:nvSpPr>
+          <p:cNvPr id="2" name="Rectangle 1"/>
+          <p:cNvSpPr/>
+          <p:nvPr/>
+        </p:nvSpPr>
+        <p:spPr>
+          <a:xfrm>
+            <a:off x="0" y="0"/>
+            <a:ext cx="9144000" cy="5143500"/>
+          </a:xfrm>
+          <a:prstGeom prst="rect">
+            <a:avLst/>
+          </a:prstGeom>
+          <a:solidFill>
+            <a:srgbClr val="FFFFFF"/>
+          </a:solidFill>
+          <a:ln>
+            <a:noFill/>
+          </a:ln>
+        </p:spPr>
+        <p:style>
+          <a:lnRef idx="1">
+            <a:schemeClr val="accent1"/>
+          </a:lnRef>
+          <a:fillRef idx="3">
+            <a:schemeClr val="accent1"/>
+          </a:fillRef>
+          <a:effectRef idx="2">
+            <a:schemeClr val="accent1"/>
+          </a:effectRef>
+          <a:fontRef idx="minor">
+            <a:schemeClr val="lt1"/>
+          </a:fontRef>
+        </p:style>
+        <p:txBody>
+          <a:bodyPr rtlCol="0" anchor="ctr"/>
+          <a:lstStyle/>
+          <a:p>
+            <a:pPr algn="ctr"/>
+          </a:p>
+        </p:txBody>
+      </p:sp>
+      <p:sp>
+        <p:nvSpPr>
+          <p:cNvPr id="3" name="Oval 2"/>
+          <p:cNvSpPr/>
+          <p:nvPr/>
+        </p:nvSpPr>
+        <p:spPr>
+          <a:xfrm>
+            <a:off x="445769" y="240030"/>
+            <a:ext cx="274320" cy="274320"/>
+          </a:xfrm>
+          <a:prstGeom prst="ellipse">
+            <a:avLst/>
+          </a:prstGeom>
+          <a:solidFill>
+            <a:srgbClr val="7B5CF5"/>
+          </a:solidFill>
+          <a:ln>
+            <a:noFill/>
+          </a:ln>
+          <a:effectLst/>
+        </p:spPr>
+        <p:style>
+          <a:lnRef idx="1">
+            <a:schemeClr val="accent1"/>
+          </a:lnRef>
+          <a:fillRef idx="3">
+            <a:schemeClr val="accent1"/>
+          </a:fillRef>
+          <a:effectRef idx="2">
+            <a:schemeClr val="accent1"/>
+          </a:effectRef>
+          <a:fontRef idx="minor">
+            <a:schemeClr val="lt1"/>
+          </a:fontRef>
+        </p:style>
+        <p:txBody>
+          <a:bodyPr rtlCol="0" anchor="ctr"/>
+          <a:lstStyle/>
+          <a:p>
+            <a:pPr algn="ctr"/>
+          </a:p>
+        </p:txBody>
+      </p:sp>
+      <p:sp>
+        <p:nvSpPr>
+          <p:cNvPr id="4" name="TextBox 3"/>
+          <p:cNvSpPr txBox="1"/>
+          <p:nvPr/>
+        </p:nvSpPr>
+        <p:spPr>
+          <a:xfrm>
+            <a:off x="822959" y="205739"/>
+            <a:ext cx="8229600" cy="377190"/>
+          </a:xfrm>
+          <a:prstGeom prst="rect">
+            <a:avLst/>
+          </a:prstGeom>
+          <a:noFill/>
+        </p:spPr>
+        <p:txBody>
+          <a:bodyPr wrap="square" lIns="27432" rIns="27432" tIns="13716" bIns="13716" anchor="ctr">
+            <a:spAutoFit/>
+          </a:bodyPr>
+          <a:lstStyle/>
+          <a:p>
+            <a:pPr algn="l"/>
+            <a:r>
+              <a:rPr sz="1125" b="1" i="0">
+                <a:solidFill>
+                  <a:srgbClr val="9CA3AF"/>
+                </a:solidFill>
+                <a:latin typeface="Calibri"/>
+              </a:rPr>
+              <a:t>★   L 2 / L 3   P R E V I E W</a:t>
+            </a:r>
+          </a:p>
+        </p:txBody>
+      </p:sp>
+      <p:sp>
+        <p:nvSpPr>
+          <p:cNvPr id="5" name="TextBox 4"/>
+          <p:cNvSpPr txBox="1"/>
+          <p:nvPr/>
+        </p:nvSpPr>
+        <p:spPr>
+          <a:xfrm>
+            <a:off x="582930" y="651509"/>
+            <a:ext cx="8229600" cy="651509"/>
+          </a:xfrm>
+          <a:prstGeom prst="rect">
+            <a:avLst/>
+          </a:prstGeom>
+          <a:noFill/>
+        </p:spPr>
+        <p:txBody>
+          <a:bodyPr wrap="square" lIns="27432" rIns="27432" tIns="13716" bIns="13716" anchor="t">
+            <a:spAutoFit/>
+          </a:bodyPr>
+          <a:lstStyle/>
+          <a:p>
+            <a:pPr algn="l"/>
+            <a:r>
+              <a:rPr sz="3150" b="1" i="0">
+                <a:solidFill>
+                  <a:srgbClr val="1F2937"/>
+                </a:solidFill>
+                <a:latin typeface="Arial Black"/>
+              </a:rPr>
+              <a:t>L2 / L3 — 帶回去繼續深入</a:t>
+            </a:r>
+          </a:p>
+        </p:txBody>
+      </p:sp>
+      <p:sp>
+        <p:nvSpPr>
+          <p:cNvPr id="6" name="TextBox 5"/>
+          <p:cNvSpPr txBox="1"/>
+          <p:nvPr/>
+        </p:nvSpPr>
+        <p:spPr>
+          <a:xfrm>
+            <a:off x="582930" y="1268730"/>
+            <a:ext cx="8229600" cy="377190"/>
+          </a:xfrm>
+          <a:prstGeom prst="rect">
+            <a:avLst/>
+          </a:prstGeom>
+          <a:noFill/>
+        </p:spPr>
+        <p:txBody>
+          <a:bodyPr wrap="square" lIns="27432" rIns="27432" tIns="13716" bIns="13716" anchor="t">
+            <a:spAutoFit/>
+          </a:bodyPr>
+          <a:lstStyle/>
+          <a:p>
+            <a:pPr algn="l"/>
+            <a:r>
+              <a:rPr sz="1500" b="0" i="1">
+                <a:solidFill>
+                  <a:srgbClr val="6B7280"/>
+                </a:solidFill>
+                <a:latin typeface="Calibri"/>
+              </a:rPr>
+              <a:t>課後自修,參考 mini-project/docs/labs/</a:t>
+            </a:r>
+          </a:p>
+        </p:txBody>
+      </p:sp>
+      <p:sp>
+        <p:nvSpPr>
+          <p:cNvPr id="7" name="Rounded Rectangle 6"/>
+          <p:cNvSpPr/>
+          <p:nvPr/>
+        </p:nvSpPr>
+        <p:spPr>
+          <a:xfrm>
+            <a:off x="377190" y="1851660"/>
+            <a:ext cx="2708910" cy="2537460"/>
+          </a:xfrm>
+          <a:prstGeom prst="roundRect">
+            <a:avLst>
+              <a:gd name="adj" fmla="val 10000"/>
+            </a:avLst>
+          </a:prstGeom>
+          <a:solidFill>
+            <a:srgbClr val="D4F7F0"/>
+          </a:solidFill>
+          <a:ln w="19050">
+            <a:solidFill>
+              <a:srgbClr val="0EA594"/>
+            </a:solidFill>
+          </a:ln>
+          <a:effectLst/>
+        </p:spPr>
+        <p:style>
+          <a:lnRef idx="1">
+            <a:schemeClr val="accent1"/>
+          </a:lnRef>
+          <a:fillRef idx="3">
+            <a:schemeClr val="accent1"/>
+          </a:fillRef>
+          <a:effectRef idx="2">
+            <a:schemeClr val="accent1"/>
+          </a:effectRef>
+          <a:fontRef idx="minor">
+            <a:schemeClr val="lt1"/>
+          </a:fontRef>
+        </p:style>
+        <p:txBody>
+          <a:bodyPr rtlCol="0" anchor="ctr"/>
+          <a:lstStyle/>
+          <a:p>
+            <a:pPr algn="ctr"/>
+          </a:p>
+        </p:txBody>
+      </p:sp>
+      <p:sp>
+        <p:nvSpPr>
           <p:cNvPr id="8" name="TextBox 7"/>
           <p:cNvSpPr txBox="1"/>
           <p:nvPr/>
@@ -6116,7 +7461,7 @@
                 </a:solidFill>
                 <a:latin typeface="Calibri"/>
               </a:rPr>
-              <a:t>12 / 12</a:t>
+              <a:t>13 / 13</a:t>
             </a:r>
           </a:p>
         </p:txBody>
@@ -7037,7 +8382,7 @@
                 </a:solidFill>
                 <a:latin typeface="Calibri"/>
               </a:rPr>
-              <a:t>2 / 12</a:t>
+              <a:t>2 / 13</a:t>
             </a:r>
           </a:p>
         </p:txBody>
@@ -8215,7 +9560,7 @@
                 </a:solidFill>
                 <a:latin typeface="Calibri"/>
               </a:rPr>
-              <a:t>3 / 12</a:t>
+              <a:t>3 / 13</a:t>
             </a:r>
           </a:p>
         </p:txBody>
@@ -9310,7 +10655,7 @@
                 </a:solidFill>
                 <a:latin typeface="Calibri"/>
               </a:rPr>
-              <a:t>4 / 12</a:t>
+              <a:t>4 / 13</a:t>
             </a:r>
           </a:p>
         </p:txBody>
@@ -10041,7 +11386,7 @@
                 </a:solidFill>
                 <a:latin typeface="Calibri"/>
               </a:rPr>
-              <a:t>5 / 12</a:t>
+              <a:t>5 / 13</a:t>
             </a:r>
           </a:p>
         </p:txBody>
@@ -11162,7 +12507,7 @@
                 </a:solidFill>
                 <a:latin typeface="Calibri"/>
               </a:rPr>
-              <a:t>6 / 12</a:t>
+              <a:t>6 / 13</a:t>
             </a:r>
           </a:p>
         </p:txBody>
@@ -11902,7 +13247,7 @@
                 </a:solidFill>
                 <a:latin typeface="Calibri"/>
               </a:rPr>
-              <a:t>7 / 12</a:t>
+              <a:t>7 / 13</a:t>
             </a:r>
           </a:p>
         </p:txBody>
@@ -11983,7 +13328,7 @@
             <a:avLst/>
           </a:prstGeom>
           <a:solidFill>
-            <a:srgbClr val="0EA594"/>
+            <a:srgbClr val="EF4444"/>
           </a:solidFill>
           <a:ln>
             <a:noFill/>
@@ -12042,7 +13387,7 @@
                 </a:solidFill>
                 <a:latin typeface="Calibri"/>
               </a:rPr>
-              <a:t>02 · ②   L L M   R O U T E   ·   1   L I N E   T O   S W I T C H</a:t>
+              <a:t>02 · ⚠   S E T U P · 卡住怎麼辦</a:t>
             </a:r>
           </a:p>
         </p:txBody>
@@ -12071,13 +13416,13 @@
           <a:p>
             <a:pPr algn="l"/>
             <a:r>
-              <a:rPr sz="3150" b="1" i="0">
+              <a:rPr sz="2400" b="1" i="0">
                 <a:solidFill>
                   <a:srgbClr val="1F2937"/>
                 </a:solidFill>
                 <a:latin typeface="Arial Black"/>
               </a:rPr>
-              <a:t>選你的 LLM 路線</a:t>
+              <a:t>卡住了?5 個常見救援</a:t>
             </a:r>
           </a:p>
         </p:txBody>
@@ -12112,7 +13457,7 @@
                 </a:solidFill>
                 <a:latin typeface="Calibri"/>
               </a:rPr>
-              <a:t>.env 一行切換 —— 因為 MCP 工具兩家都認</a:t>
+              <a:t>Setup 失敗 90% 是這 5 種,先看這頁再舉手</a:t>
             </a:r>
           </a:p>
         </p:txBody>
@@ -12125,8 +13470,161 @@
         </p:nvSpPr>
         <p:spPr>
           <a:xfrm>
-            <a:off x="582930" y="1851660"/>
-            <a:ext cx="4080510" cy="2537460"/>
+            <a:off x="582930" y="1748789"/>
+            <a:ext cx="8298179" cy="493776"/>
+          </a:xfrm>
+          <a:prstGeom prst="roundRect">
+            <a:avLst>
+              <a:gd name="adj" fmla="val 10000"/>
+            </a:avLst>
+          </a:prstGeom>
+          <a:solidFill>
+            <a:srgbClr val="FEE2E2"/>
+          </a:solidFill>
+          <a:ln w="19050">
+            <a:solidFill>
+              <a:srgbClr val="EF4444"/>
+            </a:solidFill>
+          </a:ln>
+          <a:effectLst/>
+        </p:spPr>
+        <p:style>
+          <a:lnRef idx="1">
+            <a:schemeClr val="accent1"/>
+          </a:lnRef>
+          <a:fillRef idx="3">
+            <a:schemeClr val="accent1"/>
+          </a:fillRef>
+          <a:effectRef idx="2">
+            <a:schemeClr val="accent1"/>
+          </a:effectRef>
+          <a:fontRef idx="minor">
+            <a:schemeClr val="lt1"/>
+          </a:fontRef>
+        </p:style>
+        <p:txBody>
+          <a:bodyPr rtlCol="0" anchor="ctr"/>
+          <a:lstStyle/>
+          <a:p>
+            <a:pPr algn="ctr"/>
+          </a:p>
+        </p:txBody>
+      </p:sp>
+      <p:sp>
+        <p:nvSpPr>
+          <p:cNvPr id="8" name="TextBox 7"/>
+          <p:cNvSpPr txBox="1"/>
+          <p:nvPr/>
+        </p:nvSpPr>
+        <p:spPr>
+          <a:xfrm>
+            <a:off x="685800" y="1748789"/>
+            <a:ext cx="411479" cy="493776"/>
+          </a:xfrm>
+          <a:prstGeom prst="rect">
+            <a:avLst/>
+          </a:prstGeom>
+          <a:noFill/>
+        </p:spPr>
+        <p:txBody>
+          <a:bodyPr wrap="square" lIns="27432" rIns="27432" tIns="13716" bIns="13716" anchor="ctr">
+            <a:spAutoFit/>
+          </a:bodyPr>
+          <a:lstStyle/>
+          <a:p>
+            <a:pPr algn="l"/>
+            <a:r>
+              <a:rPr sz="1650" b="1" i="0">
+                <a:solidFill>
+                  <a:srgbClr val="EF4444"/>
+                </a:solidFill>
+                <a:latin typeface="Arial Black"/>
+              </a:rPr>
+              <a:t>①</a:t>
+            </a:r>
+          </a:p>
+        </p:txBody>
+      </p:sp>
+      <p:sp>
+        <p:nvSpPr>
+          <p:cNvPr id="9" name="TextBox 8"/>
+          <p:cNvSpPr txBox="1"/>
+          <p:nvPr/>
+        </p:nvSpPr>
+        <p:spPr>
+          <a:xfrm>
+            <a:off x="1165860" y="1748789"/>
+            <a:ext cx="2400300" cy="493776"/>
+          </a:xfrm>
+          <a:prstGeom prst="rect">
+            <a:avLst/>
+          </a:prstGeom>
+          <a:noFill/>
+        </p:spPr>
+        <p:txBody>
+          <a:bodyPr wrap="square" lIns="27432" rIns="27432" tIns="13716" bIns="13716" anchor="ctr">
+            <a:spAutoFit/>
+          </a:bodyPr>
+          <a:lstStyle/>
+          <a:p>
+            <a:pPr algn="l"/>
+            <a:r>
+              <a:rPr sz="1125" b="1" i="0">
+                <a:solidFill>
+                  <a:srgbClr val="1F2937"/>
+                </a:solidFill>
+                <a:latin typeface="Arial Black"/>
+              </a:rPr>
+              <a:t>uv 未安裝</a:t>
+            </a:r>
+          </a:p>
+        </p:txBody>
+      </p:sp>
+      <p:sp>
+        <p:nvSpPr>
+          <p:cNvPr id="10" name="TextBox 9"/>
+          <p:cNvSpPr txBox="1"/>
+          <p:nvPr/>
+        </p:nvSpPr>
+        <p:spPr>
+          <a:xfrm>
+            <a:off x="3634739" y="1748789"/>
+            <a:ext cx="5280660" cy="493776"/>
+          </a:xfrm>
+          <a:prstGeom prst="rect">
+            <a:avLst/>
+          </a:prstGeom>
+          <a:noFill/>
+        </p:spPr>
+        <p:txBody>
+          <a:bodyPr wrap="square" lIns="27432" rIns="27432" tIns="13716" bIns="13716" anchor="ctr">
+            <a:spAutoFit/>
+          </a:bodyPr>
+          <a:lstStyle/>
+          <a:p>
+            <a:pPr algn="l"/>
+            <a:r>
+              <a:rPr sz="900" b="0" i="0">
+                <a:solidFill>
+                  <a:srgbClr val="374151"/>
+                </a:solidFill>
+                <a:latin typeface="Consolas"/>
+              </a:rPr>
+              <a:t>curl -LsSf https://astral.sh/uv/install.sh | sh</a:t>
+            </a:r>
+          </a:p>
+        </p:txBody>
+      </p:sp>
+      <p:sp>
+        <p:nvSpPr>
+          <p:cNvPr id="11" name="Rounded Rectangle 10"/>
+          <p:cNvSpPr/>
+          <p:nvPr/>
+        </p:nvSpPr>
+        <p:spPr>
+          <a:xfrm>
+            <a:off x="582930" y="2311146"/>
+            <a:ext cx="8298179" cy="493776"/>
           </a:xfrm>
           <a:prstGeom prst="roundRect">
             <a:avLst>
@@ -12167,22 +13665,22 @@
       </p:sp>
       <p:sp>
         <p:nvSpPr>
-          <p:cNvPr id="8" name="TextBox 7"/>
-          <p:cNvSpPr txBox="1"/>
-          <p:nvPr/>
-        </p:nvSpPr>
-        <p:spPr>
-          <a:xfrm>
-            <a:off x="754380" y="1975104"/>
-            <a:ext cx="3737610" cy="377190"/>
-          </a:xfrm>
-          <a:prstGeom prst="rect">
-            <a:avLst/>
-          </a:prstGeom>
-          <a:noFill/>
-        </p:spPr>
-        <p:txBody>
-          <a:bodyPr wrap="square" lIns="27432" rIns="27432" tIns="13716" bIns="13716" anchor="t">
+          <p:cNvPr id="12" name="TextBox 11"/>
+          <p:cNvSpPr txBox="1"/>
+          <p:nvPr/>
+        </p:nvSpPr>
+        <p:spPr>
+          <a:xfrm>
+            <a:off x="685800" y="2311146"/>
+            <a:ext cx="411479" cy="493776"/>
+          </a:xfrm>
+          <a:prstGeom prst="rect">
+            <a:avLst/>
+          </a:prstGeom>
+          <a:noFill/>
+        </p:spPr>
+        <p:txBody>
+          <a:bodyPr wrap="square" lIns="27432" rIns="27432" tIns="13716" bIns="13716" anchor="ctr">
             <a:spAutoFit/>
           </a:bodyPr>
           <a:lstStyle/>
@@ -12195,30 +13693,104 @@
                 </a:solidFill>
                 <a:latin typeface="Arial Black"/>
               </a:rPr>
-              <a:t>☁  雲端 · Anthropic Claude</a:t>
-            </a:r>
-          </a:p>
-        </p:txBody>
-      </p:sp>
-      <p:sp>
-        <p:nvSpPr>
-          <p:cNvPr id="9" name="Rectangle 8"/>
+              <a:t>②</a:t>
+            </a:r>
+          </a:p>
+        </p:txBody>
+      </p:sp>
+      <p:sp>
+        <p:nvSpPr>
+          <p:cNvPr id="13" name="TextBox 12"/>
+          <p:cNvSpPr txBox="1"/>
+          <p:nvPr/>
+        </p:nvSpPr>
+        <p:spPr>
+          <a:xfrm>
+            <a:off x="1165860" y="2311146"/>
+            <a:ext cx="2400300" cy="493776"/>
+          </a:xfrm>
+          <a:prstGeom prst="rect">
+            <a:avLst/>
+          </a:prstGeom>
+          <a:noFill/>
+        </p:spPr>
+        <p:txBody>
+          <a:bodyPr wrap="square" lIns="27432" rIns="27432" tIns="13716" bIns="13716" anchor="ctr">
+            <a:spAutoFit/>
+          </a:bodyPr>
+          <a:lstStyle/>
+          <a:p>
+            <a:pPr algn="l"/>
+            <a:r>
+              <a:rPr sz="1125" b="1" i="0">
+                <a:solidFill>
+                  <a:srgbClr val="1F2937"/>
+                </a:solidFill>
+                <a:latin typeface="Arial Black"/>
+              </a:rPr>
+              <a:t>API key 沒填</a:t>
+            </a:r>
+          </a:p>
+        </p:txBody>
+      </p:sp>
+      <p:sp>
+        <p:nvSpPr>
+          <p:cNvPr id="14" name="TextBox 13"/>
+          <p:cNvSpPr txBox="1"/>
+          <p:nvPr/>
+        </p:nvSpPr>
+        <p:spPr>
+          <a:xfrm>
+            <a:off x="3634739" y="2311146"/>
+            <a:ext cx="5280660" cy="493776"/>
+          </a:xfrm>
+          <a:prstGeom prst="rect">
+            <a:avLst/>
+          </a:prstGeom>
+          <a:noFill/>
+        </p:spPr>
+        <p:txBody>
+          <a:bodyPr wrap="square" lIns="27432" rIns="27432" tIns="13716" bIns="13716" anchor="ctr">
+            <a:spAutoFit/>
+          </a:bodyPr>
+          <a:lstStyle/>
+          <a:p>
+            <a:pPr algn="l"/>
+            <a:r>
+              <a:rPr sz="900" b="0" i="0">
+                <a:solidFill>
+                  <a:srgbClr val="374151"/>
+                </a:solidFill>
+                <a:latin typeface="Consolas"/>
+              </a:rPr>
+              <a:t>nano .env → 填入 sk-ant-...(不要加引號)</a:t>
+            </a:r>
+          </a:p>
+        </p:txBody>
+      </p:sp>
+      <p:sp>
+        <p:nvSpPr>
+          <p:cNvPr id="15" name="Rounded Rectangle 14"/>
           <p:cNvSpPr/>
           <p:nvPr/>
         </p:nvSpPr>
         <p:spPr>
           <a:xfrm>
-            <a:off x="685800" y="2263139"/>
-            <a:ext cx="3874770" cy="1988819"/>
-          </a:xfrm>
-          <a:prstGeom prst="rect">
-            <a:avLst/>
+            <a:off x="582930" y="2873501"/>
+            <a:ext cx="8298179" cy="493776"/>
+          </a:xfrm>
+          <a:prstGeom prst="roundRect">
+            <a:avLst>
+              <a:gd name="adj" fmla="val 10000"/>
+            </a:avLst>
           </a:prstGeom>
           <a:solidFill>
-            <a:srgbClr val="1A2138"/>
+            <a:srgbClr val="EEE8FF"/>
           </a:solidFill>
-          <a:ln>
-            <a:noFill/>
+          <a:ln w="19050">
+            <a:solidFill>
+              <a:srgbClr val="7B5CF5"/>
+            </a:solidFill>
           </a:ln>
           <a:effectLst/>
         </p:spPr>
@@ -12246,165 +13818,119 @@
       </p:sp>
       <p:sp>
         <p:nvSpPr>
-          <p:cNvPr id="10" name="TextBox 9"/>
-          <p:cNvSpPr txBox="1"/>
-          <p:nvPr/>
-        </p:nvSpPr>
-        <p:spPr>
-          <a:xfrm>
-            <a:off x="905256" y="2414016"/>
-            <a:ext cx="3497580" cy="1700784"/>
-          </a:xfrm>
-          <a:prstGeom prst="rect">
-            <a:avLst/>
-          </a:prstGeom>
-          <a:noFill/>
-        </p:spPr>
-        <p:txBody>
-          <a:bodyPr wrap="square" lIns="27432" rIns="27432" tIns="13716" bIns="13716" anchor="t">
-            <a:spAutoFit/>
-          </a:bodyPr>
-          <a:lstStyle/>
-          <a:p>
-            <a:pPr algn="l">
-              <a:spcAft>
-                <a:spcPts val="75"/>
-              </a:spcAft>
-            </a:pPr>
-            <a:r>
-              <a:rPr sz="825" b="0" i="0">
-                <a:solidFill>
-                  <a:srgbClr val="9CA3AF"/>
+          <p:cNvPr id="16" name="TextBox 15"/>
+          <p:cNvSpPr txBox="1"/>
+          <p:nvPr/>
+        </p:nvSpPr>
+        <p:spPr>
+          <a:xfrm>
+            <a:off x="685800" y="2873501"/>
+            <a:ext cx="411479" cy="493776"/>
+          </a:xfrm>
+          <a:prstGeom prst="rect">
+            <a:avLst/>
+          </a:prstGeom>
+          <a:noFill/>
+        </p:spPr>
+        <p:txBody>
+          <a:bodyPr wrap="square" lIns="27432" rIns="27432" tIns="13716" bIns="13716" anchor="ctr">
+            <a:spAutoFit/>
+          </a:bodyPr>
+          <a:lstStyle/>
+          <a:p>
+            <a:pPr algn="l"/>
+            <a:r>
+              <a:rPr sz="1650" b="1" i="0">
+                <a:solidFill>
+                  <a:srgbClr val="7B5CF5"/>
+                </a:solidFill>
+                <a:latin typeface="Arial Black"/>
+              </a:rPr>
+              <a:t>③</a:t>
+            </a:r>
+          </a:p>
+        </p:txBody>
+      </p:sp>
+      <p:sp>
+        <p:nvSpPr>
+          <p:cNvPr id="17" name="TextBox 16"/>
+          <p:cNvSpPr txBox="1"/>
+          <p:nvPr/>
+        </p:nvSpPr>
+        <p:spPr>
+          <a:xfrm>
+            <a:off x="1165860" y="2873501"/>
+            <a:ext cx="2400300" cy="493776"/>
+          </a:xfrm>
+          <a:prstGeom prst="rect">
+            <a:avLst/>
+          </a:prstGeom>
+          <a:noFill/>
+        </p:spPr>
+        <p:txBody>
+          <a:bodyPr wrap="square" lIns="27432" rIns="27432" tIns="13716" bIns="13716" anchor="ctr">
+            <a:spAutoFit/>
+          </a:bodyPr>
+          <a:lstStyle/>
+          <a:p>
+            <a:pPr algn="l"/>
+            <a:r>
+              <a:rPr sz="1125" b="1" i="0">
+                <a:solidFill>
+                  <a:srgbClr val="1F2937"/>
+                </a:solidFill>
+                <a:latin typeface="Arial Black"/>
+              </a:rPr>
+              <a:t>Port 3000 被佔</a:t>
+            </a:r>
+          </a:p>
+        </p:txBody>
+      </p:sp>
+      <p:sp>
+        <p:nvSpPr>
+          <p:cNvPr id="18" name="TextBox 17"/>
+          <p:cNvSpPr txBox="1"/>
+          <p:nvPr/>
+        </p:nvSpPr>
+        <p:spPr>
+          <a:xfrm>
+            <a:off x="3634739" y="2873501"/>
+            <a:ext cx="5280660" cy="493776"/>
+          </a:xfrm>
+          <a:prstGeom prst="rect">
+            <a:avLst/>
+          </a:prstGeom>
+          <a:noFill/>
+        </p:spPr>
+        <p:txBody>
+          <a:bodyPr wrap="square" lIns="27432" rIns="27432" tIns="13716" bIns="13716" anchor="ctr">
+            <a:spAutoFit/>
+          </a:bodyPr>
+          <a:lstStyle/>
+          <a:p>
+            <a:pPr algn="l"/>
+            <a:r>
+              <a:rPr sz="900" b="0" i="0">
+                <a:solidFill>
+                  <a:srgbClr val="374151"/>
                 </a:solidFill>
                 <a:latin typeface="Consolas"/>
               </a:rPr>
-              <a:t># .env</a:t>
-            </a:r>
-          </a:p>
-          <a:p>
-            <a:pPr algn="l">
-              <a:spcAft>
-                <a:spcPts val="75"/>
-              </a:spcAft>
-            </a:pPr>
-            <a:r>
-              <a:rPr sz="825" b="0" i="0">
-                <a:solidFill>
-                  <a:srgbClr val="FB924D"/>
-                </a:solidFill>
-                <a:latin typeface="Consolas"/>
-              </a:rPr>
-              <a:t>LLM_PROVIDER=anthropic</a:t>
-            </a:r>
-          </a:p>
-          <a:p>
-            <a:pPr algn="l">
-              <a:spcAft>
-                <a:spcPts val="75"/>
-              </a:spcAft>
-            </a:pPr>
-            <a:r>
-              <a:rPr sz="825" b="0" i="0">
-                <a:solidFill>
-                  <a:srgbClr val="E5E7EB"/>
-                </a:solidFill>
-                <a:latin typeface="Consolas"/>
-              </a:rPr>
-              <a:t>ANTHROPIC_API_KEY=sk-ant-...</a:t>
-            </a:r>
-          </a:p>
-          <a:p>
-            <a:pPr algn="l">
-              <a:spcAft>
-                <a:spcPts val="75"/>
-              </a:spcAft>
-            </a:pPr>
-            <a:r>
-              <a:rPr sz="825" b="0" i="0">
-                <a:solidFill>
-                  <a:srgbClr val="E5E7EB"/>
-                </a:solidFill>
-                <a:latin typeface="Consolas"/>
-              </a:rPr>
-              <a:t>ANTHROPIC_MODEL=claude-haiku-4-5</a:t>
-            </a:r>
-          </a:p>
-          <a:p>
-            <a:pPr algn="l">
-              <a:spcAft>
-                <a:spcPts val="75"/>
-              </a:spcAft>
-            </a:pPr>
-            <a:r>
-              <a:rPr sz="825" b="0" i="0">
-                <a:solidFill>
-                  <a:srgbClr val="E5E7EB"/>
-                </a:solidFill>
-                <a:latin typeface="Consolas"/>
-              </a:rPr>
-              <a:t> </a:t>
-            </a:r>
-          </a:p>
-          <a:p>
-            <a:pPr algn="l">
-              <a:spcAft>
-                <a:spcPts val="75"/>
-              </a:spcAft>
-            </a:pPr>
-            <a:r>
-              <a:rPr sz="825" b="0" i="0">
-                <a:solidFill>
-                  <a:srgbClr val="9CA3AF"/>
-                </a:solidFill>
-                <a:latin typeface="Consolas"/>
-              </a:rPr>
-              <a:t># 優點</a:t>
-            </a:r>
-          </a:p>
-          <a:p>
-            <a:pPr algn="l">
-              <a:spcAft>
-                <a:spcPts val="75"/>
-              </a:spcAft>
-            </a:pPr>
-            <a:r>
-              <a:rPr sz="825" b="0" i="0">
-                <a:solidFill>
-                  <a:srgbClr val="9CA3AF"/>
-                </a:solidFill>
-                <a:latin typeface="Consolas"/>
-              </a:rPr>
-              <a:t># • 工具呼叫品質最佳</a:t>
-            </a:r>
-          </a:p>
-          <a:p>
-            <a:pPr algn="l">
-              <a:spcAft>
-                <a:spcPts val="75"/>
-              </a:spcAft>
-            </a:pPr>
-            <a:r>
-              <a:rPr sz="825" b="0" i="0">
-                <a:solidFill>
-                  <a:srgbClr val="9CA3AF"/>
-                </a:solidFill>
-                <a:latin typeface="Consolas"/>
-              </a:rPr>
-              <a:t># • 啟動快,$5 試用額</a:t>
-            </a:r>
-          </a:p>
-        </p:txBody>
-      </p:sp>
-      <p:sp>
-        <p:nvSpPr>
-          <p:cNvPr id="11" name="Rounded Rectangle 10"/>
+              <a:t>lsof -i :3000 → kill -9 &lt;PID&gt;</a:t>
+            </a:r>
+          </a:p>
+        </p:txBody>
+      </p:sp>
+      <p:sp>
+        <p:nvSpPr>
+          <p:cNvPr id="19" name="Rounded Rectangle 18"/>
           <p:cNvSpPr/>
           <p:nvPr/>
         </p:nvSpPr>
         <p:spPr>
           <a:xfrm>
-            <a:off x="4834890" y="1851660"/>
-            <a:ext cx="4011929" cy="2537460"/>
+            <a:off x="582930" y="3435858"/>
+            <a:ext cx="8298179" cy="493776"/>
           </a:xfrm>
           <a:prstGeom prst="roundRect">
             <a:avLst>
@@ -12445,22 +13971,22 @@
       </p:sp>
       <p:sp>
         <p:nvSpPr>
-          <p:cNvPr id="12" name="TextBox 11"/>
-          <p:cNvSpPr txBox="1"/>
-          <p:nvPr/>
-        </p:nvSpPr>
-        <p:spPr>
-          <a:xfrm>
-            <a:off x="5006340" y="1975104"/>
-            <a:ext cx="3669029" cy="377190"/>
-          </a:xfrm>
-          <a:prstGeom prst="rect">
-            <a:avLst/>
-          </a:prstGeom>
-          <a:noFill/>
-        </p:spPr>
-        <p:txBody>
-          <a:bodyPr wrap="square" lIns="27432" rIns="27432" tIns="13716" bIns="13716" anchor="t">
+          <p:cNvPr id="20" name="TextBox 19"/>
+          <p:cNvSpPr txBox="1"/>
+          <p:nvPr/>
+        </p:nvSpPr>
+        <p:spPr>
+          <a:xfrm>
+            <a:off x="685800" y="3435858"/>
+            <a:ext cx="411479" cy="493776"/>
+          </a:xfrm>
+          <a:prstGeom prst="rect">
+            <a:avLst/>
+          </a:prstGeom>
+          <a:noFill/>
+        </p:spPr>
+        <p:txBody>
+          <a:bodyPr wrap="square" lIns="27432" rIns="27432" tIns="13716" bIns="13716" anchor="ctr">
             <a:spAutoFit/>
           </a:bodyPr>
           <a:lstStyle/>
@@ -12473,30 +13999,104 @@
                 </a:solidFill>
                 <a:latin typeface="Arial Black"/>
               </a:rPr>
-              <a:t>🏠  本地 · NCHU vLLM (Gemma 4)</a:t>
-            </a:r>
-          </a:p>
-        </p:txBody>
-      </p:sp>
-      <p:sp>
-        <p:nvSpPr>
-          <p:cNvPr id="13" name="Rectangle 12"/>
+              <a:t>④</a:t>
+            </a:r>
+          </a:p>
+        </p:txBody>
+      </p:sp>
+      <p:sp>
+        <p:nvSpPr>
+          <p:cNvPr id="21" name="TextBox 20"/>
+          <p:cNvSpPr txBox="1"/>
+          <p:nvPr/>
+        </p:nvSpPr>
+        <p:spPr>
+          <a:xfrm>
+            <a:off x="1165860" y="3435858"/>
+            <a:ext cx="2400300" cy="493776"/>
+          </a:xfrm>
+          <a:prstGeom prst="rect">
+            <a:avLst/>
+          </a:prstGeom>
+          <a:noFill/>
+        </p:spPr>
+        <p:txBody>
+          <a:bodyPr wrap="square" lIns="27432" rIns="27432" tIns="13716" bIns="13716" anchor="ctr">
+            <a:spAutoFit/>
+          </a:bodyPr>
+          <a:lstStyle/>
+          <a:p>
+            <a:pPr algn="l"/>
+            <a:r>
+              <a:rPr sz="1125" b="1" i="0">
+                <a:solidFill>
+                  <a:srgbClr val="1F2937"/>
+                </a:solidFill>
+                <a:latin typeface="Arial Black"/>
+              </a:rPr>
+              <a:t>npm install 失敗</a:t>
+            </a:r>
+          </a:p>
+        </p:txBody>
+      </p:sp>
+      <p:sp>
+        <p:nvSpPr>
+          <p:cNvPr id="22" name="TextBox 21"/>
+          <p:cNvSpPr txBox="1"/>
+          <p:nvPr/>
+        </p:nvSpPr>
+        <p:spPr>
+          <a:xfrm>
+            <a:off x="3634739" y="3435858"/>
+            <a:ext cx="5280660" cy="493776"/>
+          </a:xfrm>
+          <a:prstGeom prst="rect">
+            <a:avLst/>
+          </a:prstGeom>
+          <a:noFill/>
+        </p:spPr>
+        <p:txBody>
+          <a:bodyPr wrap="square" lIns="27432" rIns="27432" tIns="13716" bIns="13716" anchor="ctr">
+            <a:spAutoFit/>
+          </a:bodyPr>
+          <a:lstStyle/>
+          <a:p>
+            <a:pPr algn="l"/>
+            <a:r>
+              <a:rPr sz="900" b="0" i="0">
+                <a:solidFill>
+                  <a:srgbClr val="374151"/>
+                </a:solidFill>
+                <a:latin typeface="Consolas"/>
+              </a:rPr>
+              <a:t>cat /tmp/mini-npm.log → 多半是 --legacy-peer-deps</a:t>
+            </a:r>
+          </a:p>
+        </p:txBody>
+      </p:sp>
+      <p:sp>
+        <p:nvSpPr>
+          <p:cNvPr id="23" name="Rounded Rectangle 22"/>
           <p:cNvSpPr/>
           <p:nvPr/>
         </p:nvSpPr>
         <p:spPr>
           <a:xfrm>
-            <a:off x="4937760" y="2263139"/>
-            <a:ext cx="3806189" cy="1988819"/>
-          </a:xfrm>
-          <a:prstGeom prst="rect">
-            <a:avLst/>
+            <a:off x="582930" y="3998214"/>
+            <a:ext cx="8298179" cy="493776"/>
+          </a:xfrm>
+          <a:prstGeom prst="roundRect">
+            <a:avLst>
+              <a:gd name="adj" fmla="val 10000"/>
+            </a:avLst>
           </a:prstGeom>
           <a:solidFill>
-            <a:srgbClr val="1A2138"/>
+            <a:srgbClr val="DBEAFE"/>
           </a:solidFill>
-          <a:ln>
-            <a:noFill/>
+          <a:ln w="19050">
+            <a:solidFill>
+              <a:srgbClr val="3B82F6"/>
+            </a:solidFill>
           </a:ln>
           <a:effectLst/>
         </p:spPr>
@@ -12524,165 +14124,119 @@
       </p:sp>
       <p:sp>
         <p:nvSpPr>
-          <p:cNvPr id="14" name="TextBox 13"/>
-          <p:cNvSpPr txBox="1"/>
-          <p:nvPr/>
-        </p:nvSpPr>
-        <p:spPr>
-          <a:xfrm>
-            <a:off x="5157216" y="2414016"/>
-            <a:ext cx="3429000" cy="1700784"/>
-          </a:xfrm>
-          <a:prstGeom prst="rect">
-            <a:avLst/>
-          </a:prstGeom>
-          <a:noFill/>
-        </p:spPr>
-        <p:txBody>
-          <a:bodyPr wrap="square" lIns="27432" rIns="27432" tIns="13716" bIns="13716" anchor="t">
-            <a:spAutoFit/>
-          </a:bodyPr>
-          <a:lstStyle/>
-          <a:p>
-            <a:pPr algn="l">
-              <a:spcAft>
-                <a:spcPts val="75"/>
-              </a:spcAft>
-            </a:pPr>
-            <a:r>
-              <a:rPr sz="825" b="0" i="0">
-                <a:solidFill>
-                  <a:srgbClr val="9CA3AF"/>
+          <p:cNvPr id="24" name="TextBox 23"/>
+          <p:cNvSpPr txBox="1"/>
+          <p:nvPr/>
+        </p:nvSpPr>
+        <p:spPr>
+          <a:xfrm>
+            <a:off x="685800" y="3998214"/>
+            <a:ext cx="411479" cy="493776"/>
+          </a:xfrm>
+          <a:prstGeom prst="rect">
+            <a:avLst/>
+          </a:prstGeom>
+          <a:noFill/>
+        </p:spPr>
+        <p:txBody>
+          <a:bodyPr wrap="square" lIns="27432" rIns="27432" tIns="13716" bIns="13716" anchor="ctr">
+            <a:spAutoFit/>
+          </a:bodyPr>
+          <a:lstStyle/>
+          <a:p>
+            <a:pPr algn="l"/>
+            <a:r>
+              <a:rPr sz="1650" b="1" i="0">
+                <a:solidFill>
+                  <a:srgbClr val="3B82F6"/>
+                </a:solidFill>
+                <a:latin typeface="Arial Black"/>
+              </a:rPr>
+              <a:t>⑤</a:t>
+            </a:r>
+          </a:p>
+        </p:txBody>
+      </p:sp>
+      <p:sp>
+        <p:nvSpPr>
+          <p:cNvPr id="25" name="TextBox 24"/>
+          <p:cNvSpPr txBox="1"/>
+          <p:nvPr/>
+        </p:nvSpPr>
+        <p:spPr>
+          <a:xfrm>
+            <a:off x="1165860" y="3998214"/>
+            <a:ext cx="2400300" cy="493776"/>
+          </a:xfrm>
+          <a:prstGeom prst="rect">
+            <a:avLst/>
+          </a:prstGeom>
+          <a:noFill/>
+        </p:spPr>
+        <p:txBody>
+          <a:bodyPr wrap="square" lIns="27432" rIns="27432" tIns="13716" bIns="13716" anchor="ctr">
+            <a:spAutoFit/>
+          </a:bodyPr>
+          <a:lstStyle/>
+          <a:p>
+            <a:pPr algn="l"/>
+            <a:r>
+              <a:rPr sz="1125" b="1" i="0">
+                <a:solidFill>
+                  <a:srgbClr val="1F2937"/>
+                </a:solidFill>
+                <a:latin typeface="Arial Black"/>
+              </a:rPr>
+              <a:t>LLM 答錯</a:t>
+            </a:r>
+          </a:p>
+        </p:txBody>
+      </p:sp>
+      <p:sp>
+        <p:nvSpPr>
+          <p:cNvPr id="26" name="TextBox 25"/>
+          <p:cNvSpPr txBox="1"/>
+          <p:nvPr/>
+        </p:nvSpPr>
+        <p:spPr>
+          <a:xfrm>
+            <a:off x="3634739" y="3998214"/>
+            <a:ext cx="5280660" cy="493776"/>
+          </a:xfrm>
+          <a:prstGeom prst="rect">
+            <a:avLst/>
+          </a:prstGeom>
+          <a:noFill/>
+        </p:spPr>
+        <p:txBody>
+          <a:bodyPr wrap="square" lIns="27432" rIns="27432" tIns="13716" bIns="13716" anchor="ctr">
+            <a:spAutoFit/>
+          </a:bodyPr>
+          <a:lstStyle/>
+          <a:p>
+            <a:pPr algn="l"/>
+            <a:r>
+              <a:rPr sz="900" b="0" i="0">
+                <a:solidFill>
+                  <a:srgbClr val="374151"/>
                 </a:solidFill>
                 <a:latin typeface="Consolas"/>
               </a:rPr>
-              <a:t># .env</a:t>
-            </a:r>
-          </a:p>
-          <a:p>
-            <a:pPr algn="l">
-              <a:spcAft>
-                <a:spcPts val="75"/>
-              </a:spcAft>
-            </a:pPr>
-            <a:r>
-              <a:rPr sz="825" b="0" i="0">
-                <a:solidFill>
-                  <a:srgbClr val="FB924D"/>
-                </a:solidFill>
-                <a:latin typeface="Consolas"/>
-              </a:rPr>
-              <a:t>LLM_PROVIDER=openai</a:t>
-            </a:r>
-          </a:p>
-          <a:p>
-            <a:pPr algn="l">
-              <a:spcAft>
-                <a:spcPts val="75"/>
-              </a:spcAft>
-            </a:pPr>
-            <a:r>
-              <a:rPr sz="825" b="0" i="0">
-                <a:solidFill>
-                  <a:srgbClr val="E5E7EB"/>
-                </a:solidFill>
-                <a:latin typeface="Consolas"/>
-              </a:rPr>
-              <a:t>OPENAI_BASE_URL=http://&lt;ws&gt;:8000/v1</a:t>
-            </a:r>
-          </a:p>
-          <a:p>
-            <a:pPr algn="l">
-              <a:spcAft>
-                <a:spcPts val="75"/>
-              </a:spcAft>
-            </a:pPr>
-            <a:r>
-              <a:rPr sz="825" b="0" i="0">
-                <a:solidFill>
-                  <a:srgbClr val="E5E7EB"/>
-                </a:solidFill>
-                <a:latin typeface="Consolas"/>
-              </a:rPr>
-              <a:t>OPENAI_API_KEY=dummy</a:t>
-            </a:r>
-          </a:p>
-          <a:p>
-            <a:pPr algn="l">
-              <a:spcAft>
-                <a:spcPts val="75"/>
-              </a:spcAft>
-            </a:pPr>
-            <a:r>
-              <a:rPr sz="825" b="0" i="0">
-                <a:solidFill>
-                  <a:srgbClr val="E5E7EB"/>
-                </a:solidFill>
-                <a:latin typeface="Consolas"/>
-              </a:rPr>
-              <a:t>OPENAI_MODEL=gemma-4</a:t>
-            </a:r>
-          </a:p>
-          <a:p>
-            <a:pPr algn="l">
-              <a:spcAft>
-                <a:spcPts val="75"/>
-              </a:spcAft>
-            </a:pPr>
-            <a:r>
-              <a:rPr sz="825" b="0" i="0">
-                <a:solidFill>
-                  <a:srgbClr val="E5E7EB"/>
-                </a:solidFill>
-                <a:latin typeface="Consolas"/>
-              </a:rPr>
-              <a:t> </a:t>
-            </a:r>
-          </a:p>
-          <a:p>
-            <a:pPr algn="l">
-              <a:spcAft>
-                <a:spcPts val="75"/>
-              </a:spcAft>
-            </a:pPr>
-            <a:r>
-              <a:rPr sz="825" b="0" i="0">
-                <a:solidFill>
-                  <a:srgbClr val="9CA3AF"/>
-                </a:solidFill>
-                <a:latin typeface="Consolas"/>
-              </a:rPr>
-              <a:t># 優點</a:t>
-            </a:r>
-          </a:p>
-          <a:p>
-            <a:pPr algn="l">
-              <a:spcAft>
-                <a:spcPts val="75"/>
-              </a:spcAft>
-            </a:pPr>
-            <a:r>
-              <a:rPr sz="825" b="0" i="0">
-                <a:solidFill>
-                  <a:srgbClr val="9CA3AF"/>
-                </a:solidFill>
-                <a:latin typeface="Consolas"/>
-              </a:rPr>
-              <a:t># • 0 美金,無 token 限制</a:t>
-            </a:r>
-          </a:p>
-        </p:txBody>
-      </p:sp>
-      <p:sp>
-        <p:nvSpPr>
-          <p:cNvPr id="15" name="Rounded Rectangle 14"/>
+              <a:t>1) Ctrl+C 重啟 server   2) 把 docstring 寫更具體</a:t>
+            </a:r>
+          </a:p>
+        </p:txBody>
+      </p:sp>
+      <p:sp>
+        <p:nvSpPr>
+          <p:cNvPr id="27" name="Rounded Rectangle 26"/>
           <p:cNvSpPr/>
           <p:nvPr/>
         </p:nvSpPr>
         <p:spPr>
           <a:xfrm>
-            <a:off x="582930" y="4423410"/>
-            <a:ext cx="8229600" cy="377190"/>
+            <a:off x="582930" y="4697729"/>
+            <a:ext cx="8229600" cy="308610"/>
           </a:xfrm>
           <a:prstGeom prst="roundRect">
             <a:avLst>
@@ -12690,11 +14244,11 @@
             </a:avLst>
           </a:prstGeom>
           <a:solidFill>
-            <a:srgbClr val="EEE8FF"/>
+            <a:srgbClr val="F1F5F9"/>
           </a:solidFill>
           <a:ln w="19050">
             <a:solidFill>
-              <a:srgbClr val="7B5CF5"/>
+              <a:srgbClr val="9CA3AF"/>
             </a:solidFill>
           </a:ln>
           <a:effectLst/>
@@ -12723,14 +14277,14 @@
       </p:sp>
       <p:sp>
         <p:nvSpPr>
-          <p:cNvPr id="16" name="TextBox 15"/>
-          <p:cNvSpPr txBox="1"/>
-          <p:nvPr/>
-        </p:nvSpPr>
-        <p:spPr>
-          <a:xfrm>
-            <a:off x="788669" y="4423410"/>
-            <a:ext cx="7818120" cy="377190"/>
+          <p:cNvPr id="28" name="TextBox 27"/>
+          <p:cNvSpPr txBox="1"/>
+          <p:nvPr/>
+        </p:nvSpPr>
+        <p:spPr>
+          <a:xfrm>
+            <a:off x="788669" y="4697729"/>
+            <a:ext cx="7818120" cy="308610"/>
           </a:xfrm>
           <a:prstGeom prst="rect">
             <a:avLst/>
@@ -12745,20 +14299,20 @@
           <a:p>
             <a:pPr algn="l"/>
             <a:r>
-              <a:rPr sz="975" b="1" i="0">
-                <a:solidFill>
-                  <a:srgbClr val="7B5CF5"/>
+              <a:rPr sz="900" b="1" i="0">
+                <a:solidFill>
+                  <a:srgbClr val="9CA3AF"/>
                 </a:solidFill>
                 <a:latin typeface="Calibri"/>
               </a:rPr>
-              <a:t>  💎  N+M 的甜蜜:你的工具一支不變,adapter 差別只在 mcp-client.js 幾行</a:t>
-            </a:r>
-          </a:p>
-        </p:txBody>
-      </p:sp>
-      <p:sp>
-        <p:nvSpPr>
-          <p:cNvPr id="17" name="TextBox 16"/>
+              <a:t>i  完整故障排除見 04-live-demo-script.md(講師手冊)</a:t>
+            </a:r>
+          </a:p>
+        </p:txBody>
+      </p:sp>
+      <p:sp>
+        <p:nvSpPr>
+          <p:cNvPr id="29" name="TextBox 28"/>
           <p:cNvSpPr txBox="1"/>
           <p:nvPr/>
         </p:nvSpPr>
@@ -12786,7 +14340,7 @@
                 </a:solidFill>
                 <a:latin typeface="Calibri"/>
               </a:rPr>
-              <a:t>8 / 12</a:t>
+              <a:t>8 / 13</a:t>
             </a:r>
           </a:p>
         </p:txBody>
@@ -12867,7 +14421,7 @@
             <a:avLst/>
           </a:prstGeom>
           <a:solidFill>
-            <a:srgbClr val="EF4444"/>
+            <a:srgbClr val="0EA594"/>
           </a:solidFill>
           <a:ln>
             <a:noFill/>
@@ -12926,7 +14480,7 @@
                 </a:solidFill>
                 <a:latin typeface="Calibri"/>
               </a:rPr>
-              <a:t>03   L A B   1   ·   換   J S O N</a:t>
+              <a:t>02 · ②   L L M   R O U T E   ·   1   L I N E   T O   S W I T C H</a:t>
             </a:r>
           </a:p>
         </p:txBody>
@@ -12961,7 +14515,7 @@
                 </a:solidFill>
                 <a:latin typeface="Arial Black"/>
               </a:rPr>
-              <a:t>Lab 1 — 換 JSON 做你領域的助理</a:t>
+              <a:t>選你的 LLM 路線</a:t>
             </a:r>
           </a:p>
         </p:txBody>
@@ -12996,7 +14550,7 @@
                 </a:solidFill>
                 <a:latin typeface="Calibri"/>
               </a:rPr>
-              <a:t>0 行 Python · 40 分鐘 · 現場必做</a:t>
+              <a:t>.env 一行切換 —— 因為 MCP 工具兩家都認</a:t>
             </a:r>
           </a:p>
         </p:txBody>
@@ -13009,8 +14563,564 @@
         </p:nvSpPr>
         <p:spPr>
           <a:xfrm>
-            <a:off x="582930" y="1954530"/>
-            <a:ext cx="2023110" cy="2400300"/>
+            <a:off x="582930" y="1851660"/>
+            <a:ext cx="4080510" cy="2537460"/>
+          </a:xfrm>
+          <a:prstGeom prst="roundRect">
+            <a:avLst>
+              <a:gd name="adj" fmla="val 10000"/>
+            </a:avLst>
+          </a:prstGeom>
+          <a:solidFill>
+            <a:srgbClr val="FFE7DB"/>
+          </a:solidFill>
+          <a:ln w="19050">
+            <a:solidFill>
+              <a:srgbClr val="FB7048"/>
+            </a:solidFill>
+          </a:ln>
+          <a:effectLst/>
+        </p:spPr>
+        <p:style>
+          <a:lnRef idx="1">
+            <a:schemeClr val="accent1"/>
+          </a:lnRef>
+          <a:fillRef idx="3">
+            <a:schemeClr val="accent1"/>
+          </a:fillRef>
+          <a:effectRef idx="2">
+            <a:schemeClr val="accent1"/>
+          </a:effectRef>
+          <a:fontRef idx="minor">
+            <a:schemeClr val="lt1"/>
+          </a:fontRef>
+        </p:style>
+        <p:txBody>
+          <a:bodyPr rtlCol="0" anchor="ctr"/>
+          <a:lstStyle/>
+          <a:p>
+            <a:pPr algn="ctr"/>
+          </a:p>
+        </p:txBody>
+      </p:sp>
+      <p:sp>
+        <p:nvSpPr>
+          <p:cNvPr id="8" name="TextBox 7"/>
+          <p:cNvSpPr txBox="1"/>
+          <p:nvPr/>
+        </p:nvSpPr>
+        <p:spPr>
+          <a:xfrm>
+            <a:off x="754380" y="1975104"/>
+            <a:ext cx="3737610" cy="377190"/>
+          </a:xfrm>
+          <a:prstGeom prst="rect">
+            <a:avLst/>
+          </a:prstGeom>
+          <a:noFill/>
+        </p:spPr>
+        <p:txBody>
+          <a:bodyPr wrap="square" lIns="27432" rIns="27432" tIns="13716" bIns="13716" anchor="t">
+            <a:spAutoFit/>
+          </a:bodyPr>
+          <a:lstStyle/>
+          <a:p>
+            <a:pPr algn="l"/>
+            <a:r>
+              <a:rPr sz="1650" b="1" i="0">
+                <a:solidFill>
+                  <a:srgbClr val="FB7048"/>
+                </a:solidFill>
+                <a:latin typeface="Arial Black"/>
+              </a:rPr>
+              <a:t>☁  雲端 · Anthropic Claude</a:t>
+            </a:r>
+          </a:p>
+        </p:txBody>
+      </p:sp>
+      <p:sp>
+        <p:nvSpPr>
+          <p:cNvPr id="9" name="Rectangle 8"/>
+          <p:cNvSpPr/>
+          <p:nvPr/>
+        </p:nvSpPr>
+        <p:spPr>
+          <a:xfrm>
+            <a:off x="685800" y="2263139"/>
+            <a:ext cx="3874770" cy="1988819"/>
+          </a:xfrm>
+          <a:prstGeom prst="rect">
+            <a:avLst/>
+          </a:prstGeom>
+          <a:solidFill>
+            <a:srgbClr val="1A2138"/>
+          </a:solidFill>
+          <a:ln>
+            <a:noFill/>
+          </a:ln>
+          <a:effectLst/>
+        </p:spPr>
+        <p:style>
+          <a:lnRef idx="1">
+            <a:schemeClr val="accent1"/>
+          </a:lnRef>
+          <a:fillRef idx="3">
+            <a:schemeClr val="accent1"/>
+          </a:fillRef>
+          <a:effectRef idx="2">
+            <a:schemeClr val="accent1"/>
+          </a:effectRef>
+          <a:fontRef idx="minor">
+            <a:schemeClr val="lt1"/>
+          </a:fontRef>
+        </p:style>
+        <p:txBody>
+          <a:bodyPr rtlCol="0" anchor="ctr"/>
+          <a:lstStyle/>
+          <a:p>
+            <a:pPr algn="ctr"/>
+          </a:p>
+        </p:txBody>
+      </p:sp>
+      <p:sp>
+        <p:nvSpPr>
+          <p:cNvPr id="10" name="TextBox 9"/>
+          <p:cNvSpPr txBox="1"/>
+          <p:nvPr/>
+        </p:nvSpPr>
+        <p:spPr>
+          <a:xfrm>
+            <a:off x="905256" y="2414016"/>
+            <a:ext cx="3497580" cy="1700784"/>
+          </a:xfrm>
+          <a:prstGeom prst="rect">
+            <a:avLst/>
+          </a:prstGeom>
+          <a:noFill/>
+        </p:spPr>
+        <p:txBody>
+          <a:bodyPr wrap="square" lIns="27432" rIns="27432" tIns="13716" bIns="13716" anchor="t">
+            <a:spAutoFit/>
+          </a:bodyPr>
+          <a:lstStyle/>
+          <a:p>
+            <a:pPr algn="l">
+              <a:spcAft>
+                <a:spcPts val="75"/>
+              </a:spcAft>
+            </a:pPr>
+            <a:r>
+              <a:rPr sz="825" b="0" i="0">
+                <a:solidFill>
+                  <a:srgbClr val="9CA3AF"/>
+                </a:solidFill>
+                <a:latin typeface="Consolas"/>
+              </a:rPr>
+              <a:t># .env</a:t>
+            </a:r>
+          </a:p>
+          <a:p>
+            <a:pPr algn="l">
+              <a:spcAft>
+                <a:spcPts val="75"/>
+              </a:spcAft>
+            </a:pPr>
+            <a:r>
+              <a:rPr sz="825" b="0" i="0">
+                <a:solidFill>
+                  <a:srgbClr val="FB924D"/>
+                </a:solidFill>
+                <a:latin typeface="Consolas"/>
+              </a:rPr>
+              <a:t>LLM_PROVIDER=anthropic</a:t>
+            </a:r>
+          </a:p>
+          <a:p>
+            <a:pPr algn="l">
+              <a:spcAft>
+                <a:spcPts val="75"/>
+              </a:spcAft>
+            </a:pPr>
+            <a:r>
+              <a:rPr sz="825" b="0" i="0">
+                <a:solidFill>
+                  <a:srgbClr val="E5E7EB"/>
+                </a:solidFill>
+                <a:latin typeface="Consolas"/>
+              </a:rPr>
+              <a:t>ANTHROPIC_API_KEY=sk-ant-...</a:t>
+            </a:r>
+          </a:p>
+          <a:p>
+            <a:pPr algn="l">
+              <a:spcAft>
+                <a:spcPts val="75"/>
+              </a:spcAft>
+            </a:pPr>
+            <a:r>
+              <a:rPr sz="825" b="0" i="0">
+                <a:solidFill>
+                  <a:srgbClr val="E5E7EB"/>
+                </a:solidFill>
+                <a:latin typeface="Consolas"/>
+              </a:rPr>
+              <a:t>ANTHROPIC_MODEL=claude-haiku-4-5</a:t>
+            </a:r>
+          </a:p>
+          <a:p>
+            <a:pPr algn="l">
+              <a:spcAft>
+                <a:spcPts val="75"/>
+              </a:spcAft>
+            </a:pPr>
+            <a:r>
+              <a:rPr sz="825" b="0" i="0">
+                <a:solidFill>
+                  <a:srgbClr val="E5E7EB"/>
+                </a:solidFill>
+                <a:latin typeface="Consolas"/>
+              </a:rPr>
+              <a:t> </a:t>
+            </a:r>
+          </a:p>
+          <a:p>
+            <a:pPr algn="l">
+              <a:spcAft>
+                <a:spcPts val="75"/>
+              </a:spcAft>
+            </a:pPr>
+            <a:r>
+              <a:rPr sz="825" b="0" i="0">
+                <a:solidFill>
+                  <a:srgbClr val="9CA3AF"/>
+                </a:solidFill>
+                <a:latin typeface="Consolas"/>
+              </a:rPr>
+              <a:t># 優點</a:t>
+            </a:r>
+          </a:p>
+          <a:p>
+            <a:pPr algn="l">
+              <a:spcAft>
+                <a:spcPts val="75"/>
+              </a:spcAft>
+            </a:pPr>
+            <a:r>
+              <a:rPr sz="825" b="0" i="0">
+                <a:solidFill>
+                  <a:srgbClr val="9CA3AF"/>
+                </a:solidFill>
+                <a:latin typeface="Consolas"/>
+              </a:rPr>
+              <a:t># • 工具呼叫品質最佳</a:t>
+            </a:r>
+          </a:p>
+          <a:p>
+            <a:pPr algn="l">
+              <a:spcAft>
+                <a:spcPts val="75"/>
+              </a:spcAft>
+            </a:pPr>
+            <a:r>
+              <a:rPr sz="825" b="0" i="0">
+                <a:solidFill>
+                  <a:srgbClr val="9CA3AF"/>
+                </a:solidFill>
+                <a:latin typeface="Consolas"/>
+              </a:rPr>
+              <a:t># • 啟動快,$5 試用額</a:t>
+            </a:r>
+          </a:p>
+        </p:txBody>
+      </p:sp>
+      <p:sp>
+        <p:nvSpPr>
+          <p:cNvPr id="11" name="Rounded Rectangle 10"/>
+          <p:cNvSpPr/>
+          <p:nvPr/>
+        </p:nvSpPr>
+        <p:spPr>
+          <a:xfrm>
+            <a:off x="4834890" y="1851660"/>
+            <a:ext cx="4011929" cy="2537460"/>
+          </a:xfrm>
+          <a:prstGeom prst="roundRect">
+            <a:avLst>
+              <a:gd name="adj" fmla="val 10000"/>
+            </a:avLst>
+          </a:prstGeom>
+          <a:solidFill>
+            <a:srgbClr val="D4F7F0"/>
+          </a:solidFill>
+          <a:ln w="19050">
+            <a:solidFill>
+              <a:srgbClr val="0EA594"/>
+            </a:solidFill>
+          </a:ln>
+          <a:effectLst/>
+        </p:spPr>
+        <p:style>
+          <a:lnRef idx="1">
+            <a:schemeClr val="accent1"/>
+          </a:lnRef>
+          <a:fillRef idx="3">
+            <a:schemeClr val="accent1"/>
+          </a:fillRef>
+          <a:effectRef idx="2">
+            <a:schemeClr val="accent1"/>
+          </a:effectRef>
+          <a:fontRef idx="minor">
+            <a:schemeClr val="lt1"/>
+          </a:fontRef>
+        </p:style>
+        <p:txBody>
+          <a:bodyPr rtlCol="0" anchor="ctr"/>
+          <a:lstStyle/>
+          <a:p>
+            <a:pPr algn="ctr"/>
+          </a:p>
+        </p:txBody>
+      </p:sp>
+      <p:sp>
+        <p:nvSpPr>
+          <p:cNvPr id="12" name="TextBox 11"/>
+          <p:cNvSpPr txBox="1"/>
+          <p:nvPr/>
+        </p:nvSpPr>
+        <p:spPr>
+          <a:xfrm>
+            <a:off x="5006340" y="1975104"/>
+            <a:ext cx="3669029" cy="377190"/>
+          </a:xfrm>
+          <a:prstGeom prst="rect">
+            <a:avLst/>
+          </a:prstGeom>
+          <a:noFill/>
+        </p:spPr>
+        <p:txBody>
+          <a:bodyPr wrap="square" lIns="27432" rIns="27432" tIns="13716" bIns="13716" anchor="t">
+            <a:spAutoFit/>
+          </a:bodyPr>
+          <a:lstStyle/>
+          <a:p>
+            <a:pPr algn="l"/>
+            <a:r>
+              <a:rPr sz="1650" b="1" i="0">
+                <a:solidFill>
+                  <a:srgbClr val="0EA594"/>
+                </a:solidFill>
+                <a:latin typeface="Arial Black"/>
+              </a:rPr>
+              <a:t>🏠  本地 · NCHU vLLM (Gemma 4)</a:t>
+            </a:r>
+          </a:p>
+        </p:txBody>
+      </p:sp>
+      <p:sp>
+        <p:nvSpPr>
+          <p:cNvPr id="13" name="Rectangle 12"/>
+          <p:cNvSpPr/>
+          <p:nvPr/>
+        </p:nvSpPr>
+        <p:spPr>
+          <a:xfrm>
+            <a:off x="4937760" y="2263139"/>
+            <a:ext cx="3806189" cy="1988819"/>
+          </a:xfrm>
+          <a:prstGeom prst="rect">
+            <a:avLst/>
+          </a:prstGeom>
+          <a:solidFill>
+            <a:srgbClr val="1A2138"/>
+          </a:solidFill>
+          <a:ln>
+            <a:noFill/>
+          </a:ln>
+          <a:effectLst/>
+        </p:spPr>
+        <p:style>
+          <a:lnRef idx="1">
+            <a:schemeClr val="accent1"/>
+          </a:lnRef>
+          <a:fillRef idx="3">
+            <a:schemeClr val="accent1"/>
+          </a:fillRef>
+          <a:effectRef idx="2">
+            <a:schemeClr val="accent1"/>
+          </a:effectRef>
+          <a:fontRef idx="minor">
+            <a:schemeClr val="lt1"/>
+          </a:fontRef>
+        </p:style>
+        <p:txBody>
+          <a:bodyPr rtlCol="0" anchor="ctr"/>
+          <a:lstStyle/>
+          <a:p>
+            <a:pPr algn="ctr"/>
+          </a:p>
+        </p:txBody>
+      </p:sp>
+      <p:sp>
+        <p:nvSpPr>
+          <p:cNvPr id="14" name="TextBox 13"/>
+          <p:cNvSpPr txBox="1"/>
+          <p:nvPr/>
+        </p:nvSpPr>
+        <p:spPr>
+          <a:xfrm>
+            <a:off x="5157216" y="2414016"/>
+            <a:ext cx="3429000" cy="1700784"/>
+          </a:xfrm>
+          <a:prstGeom prst="rect">
+            <a:avLst/>
+          </a:prstGeom>
+          <a:noFill/>
+        </p:spPr>
+        <p:txBody>
+          <a:bodyPr wrap="square" lIns="27432" rIns="27432" tIns="13716" bIns="13716" anchor="t">
+            <a:spAutoFit/>
+          </a:bodyPr>
+          <a:lstStyle/>
+          <a:p>
+            <a:pPr algn="l">
+              <a:spcAft>
+                <a:spcPts val="75"/>
+              </a:spcAft>
+            </a:pPr>
+            <a:r>
+              <a:rPr sz="825" b="0" i="0">
+                <a:solidFill>
+                  <a:srgbClr val="9CA3AF"/>
+                </a:solidFill>
+                <a:latin typeface="Consolas"/>
+              </a:rPr>
+              <a:t># .env</a:t>
+            </a:r>
+          </a:p>
+          <a:p>
+            <a:pPr algn="l">
+              <a:spcAft>
+                <a:spcPts val="75"/>
+              </a:spcAft>
+            </a:pPr>
+            <a:r>
+              <a:rPr sz="825" b="0" i="0">
+                <a:solidFill>
+                  <a:srgbClr val="FB924D"/>
+                </a:solidFill>
+                <a:latin typeface="Consolas"/>
+              </a:rPr>
+              <a:t>LLM_PROVIDER=openai</a:t>
+            </a:r>
+          </a:p>
+          <a:p>
+            <a:pPr algn="l">
+              <a:spcAft>
+                <a:spcPts val="75"/>
+              </a:spcAft>
+            </a:pPr>
+            <a:r>
+              <a:rPr sz="825" b="0" i="0">
+                <a:solidFill>
+                  <a:srgbClr val="E5E7EB"/>
+                </a:solidFill>
+                <a:latin typeface="Consolas"/>
+              </a:rPr>
+              <a:t>OPENAI_BASE_URL=http://&lt;ws&gt;:8000/v1</a:t>
+            </a:r>
+          </a:p>
+          <a:p>
+            <a:pPr algn="l">
+              <a:spcAft>
+                <a:spcPts val="75"/>
+              </a:spcAft>
+            </a:pPr>
+            <a:r>
+              <a:rPr sz="825" b="0" i="0">
+                <a:solidFill>
+                  <a:srgbClr val="E5E7EB"/>
+                </a:solidFill>
+                <a:latin typeface="Consolas"/>
+              </a:rPr>
+              <a:t>OPENAI_API_KEY=dummy</a:t>
+            </a:r>
+          </a:p>
+          <a:p>
+            <a:pPr algn="l">
+              <a:spcAft>
+                <a:spcPts val="75"/>
+              </a:spcAft>
+            </a:pPr>
+            <a:r>
+              <a:rPr sz="825" b="0" i="0">
+                <a:solidFill>
+                  <a:srgbClr val="E5E7EB"/>
+                </a:solidFill>
+                <a:latin typeface="Consolas"/>
+              </a:rPr>
+              <a:t>OPENAI_MODEL=gemma-4</a:t>
+            </a:r>
+          </a:p>
+          <a:p>
+            <a:pPr algn="l">
+              <a:spcAft>
+                <a:spcPts val="75"/>
+              </a:spcAft>
+            </a:pPr>
+            <a:r>
+              <a:rPr sz="825" b="0" i="0">
+                <a:solidFill>
+                  <a:srgbClr val="E5E7EB"/>
+                </a:solidFill>
+                <a:latin typeface="Consolas"/>
+              </a:rPr>
+              <a:t> </a:t>
+            </a:r>
+          </a:p>
+          <a:p>
+            <a:pPr algn="l">
+              <a:spcAft>
+                <a:spcPts val="75"/>
+              </a:spcAft>
+            </a:pPr>
+            <a:r>
+              <a:rPr sz="825" b="0" i="0">
+                <a:solidFill>
+                  <a:srgbClr val="9CA3AF"/>
+                </a:solidFill>
+                <a:latin typeface="Consolas"/>
+              </a:rPr>
+              <a:t># 優點</a:t>
+            </a:r>
+          </a:p>
+          <a:p>
+            <a:pPr algn="l">
+              <a:spcAft>
+                <a:spcPts val="75"/>
+              </a:spcAft>
+            </a:pPr>
+            <a:r>
+              <a:rPr sz="825" b="0" i="0">
+                <a:solidFill>
+                  <a:srgbClr val="9CA3AF"/>
+                </a:solidFill>
+                <a:latin typeface="Consolas"/>
+              </a:rPr>
+              <a:t># • 0 美金,無 token 限制</a:t>
+            </a:r>
+          </a:p>
+        </p:txBody>
+      </p:sp>
+      <p:sp>
+        <p:nvSpPr>
+          <p:cNvPr id="15" name="Rounded Rectangle 14"/>
+          <p:cNvSpPr/>
+          <p:nvPr/>
+        </p:nvSpPr>
+        <p:spPr>
+          <a:xfrm>
+            <a:off x="582930" y="4423410"/>
+            <a:ext cx="8229600" cy="377190"/>
           </a:xfrm>
           <a:prstGeom prst="roundRect">
             <a:avLst>
@@ -13051,60 +15161,14 @@
       </p:sp>
       <p:sp>
         <p:nvSpPr>
-          <p:cNvPr id="8" name="Oval 7"/>
-          <p:cNvSpPr/>
-          <p:nvPr/>
-        </p:nvSpPr>
-        <p:spPr>
-          <a:xfrm>
-            <a:off x="706374" y="2009394"/>
-            <a:ext cx="438912" cy="438912"/>
-          </a:xfrm>
-          <a:prstGeom prst="ellipse">
-            <a:avLst/>
-          </a:prstGeom>
-          <a:solidFill>
-            <a:srgbClr val="FFFFFF"/>
-          </a:solidFill>
-          <a:ln w="23812">
-            <a:solidFill>
-              <a:srgbClr val="7B5CF5"/>
-            </a:solidFill>
-          </a:ln>
-          <a:effectLst/>
-        </p:spPr>
-        <p:style>
-          <a:lnRef idx="1">
-            <a:schemeClr val="accent1"/>
-          </a:lnRef>
-          <a:fillRef idx="3">
-            <a:schemeClr val="accent1"/>
-          </a:fillRef>
-          <a:effectRef idx="2">
-            <a:schemeClr val="accent1"/>
-          </a:effectRef>
-          <a:fontRef idx="minor">
-            <a:schemeClr val="lt1"/>
-          </a:fontRef>
-        </p:style>
-        <p:txBody>
-          <a:bodyPr rtlCol="0" anchor="ctr"/>
-          <a:lstStyle/>
-          <a:p>
-            <a:pPr algn="ctr"/>
-          </a:p>
-        </p:txBody>
-      </p:sp>
-      <p:sp>
-        <p:nvSpPr>
-          <p:cNvPr id="9" name="TextBox 8"/>
-          <p:cNvSpPr txBox="1"/>
-          <p:nvPr/>
-        </p:nvSpPr>
-        <p:spPr>
-          <a:xfrm>
-            <a:off x="706374" y="2009394"/>
-            <a:ext cx="438912" cy="438912"/>
+          <p:cNvPr id="16" name="TextBox 15"/>
+          <p:cNvSpPr txBox="1"/>
+          <p:nvPr/>
+        </p:nvSpPr>
+        <p:spPr>
+          <a:xfrm>
+            <a:off x="788669" y="4423410"/>
+            <a:ext cx="7818120" cy="377190"/>
           </a:xfrm>
           <a:prstGeom prst="rect">
             <a:avLst/>
@@ -13117,304 +15181,15 @@
           </a:bodyPr>
           <a:lstStyle/>
           <a:p>
-            <a:pPr algn="ctr"/>
-            <a:r>
-              <a:rPr sz="1950" b="1" i="0">
+            <a:pPr algn="l"/>
+            <a:r>
+              <a:rPr sz="975" b="1" i="0">
                 <a:solidFill>
                   <a:srgbClr val="7B5CF5"/>
                 </a:solidFill>
-                <a:latin typeface="Arial Black"/>
-              </a:rPr>
-              <a:t>①</a:t>
-            </a:r>
-          </a:p>
-        </p:txBody>
-      </p:sp>
-      <p:sp>
-        <p:nvSpPr>
-          <p:cNvPr id="10" name="TextBox 9"/>
-          <p:cNvSpPr txBox="1"/>
-          <p:nvPr/>
-        </p:nvSpPr>
-        <p:spPr>
-          <a:xfrm>
-            <a:off x="754380" y="2708910"/>
-            <a:ext cx="1680210" cy="377190"/>
-          </a:xfrm>
-          <a:prstGeom prst="rect">
-            <a:avLst/>
-          </a:prstGeom>
-          <a:noFill/>
-        </p:spPr>
-        <p:txBody>
-          <a:bodyPr wrap="square" lIns="27432" rIns="27432" tIns="13716" bIns="13716" anchor="t">
-            <a:spAutoFit/>
-          </a:bodyPr>
-          <a:lstStyle/>
-          <a:p>
-            <a:pPr algn="l"/>
-            <a:r>
-              <a:rPr sz="1350" b="1" i="0">
-                <a:solidFill>
-                  <a:srgbClr val="1F2937"/>
-                </a:solidFill>
-                <a:latin typeface="Arial Black"/>
-              </a:rPr>
-              <a:t>觀察</a:t>
-            </a:r>
-          </a:p>
-        </p:txBody>
-      </p:sp>
-      <p:sp>
-        <p:nvSpPr>
-          <p:cNvPr id="11" name="TextBox 10"/>
-          <p:cNvSpPr txBox="1"/>
-          <p:nvPr/>
-        </p:nvSpPr>
-        <p:spPr>
-          <a:xfrm>
-            <a:off x="754380" y="3154679"/>
-            <a:ext cx="1680210" cy="960119"/>
-          </a:xfrm>
-          <a:prstGeom prst="rect">
-            <a:avLst/>
-          </a:prstGeom>
-          <a:noFill/>
-        </p:spPr>
-        <p:txBody>
-          <a:bodyPr wrap="square" lIns="27432" rIns="27432" tIns="13716" bIns="13716" anchor="t">
-            <a:spAutoFit/>
-          </a:bodyPr>
-          <a:lstStyle/>
-          <a:p>
-            <a:pPr algn="l">
-              <a:spcAft>
-                <a:spcPts val="300"/>
-              </a:spcAft>
-            </a:pPr>
-            <a:r>
-              <a:rPr sz="975" b="0" i="0">
-                <a:solidFill>
-                  <a:srgbClr val="374151"/>
-                </a:solidFill>
                 <a:latin typeface="Calibri"/>
               </a:rPr>
-              <a:t>看 [tool_use] log</a:t>
-            </a:r>
-          </a:p>
-          <a:p>
-            <a:pPr algn="l">
-              <a:spcAft>
-                <a:spcPts val="300"/>
-              </a:spcAft>
-            </a:pPr>
-            <a:r>
-              <a:rPr sz="975" b="0" i="0">
-                <a:solidFill>
-                  <a:srgbClr val="374151"/>
-                </a:solidFill>
-                <a:latin typeface="Calibri"/>
-              </a:rPr>
-              <a:t>AI 摘要 JSON</a:t>
-            </a:r>
-          </a:p>
-        </p:txBody>
-      </p:sp>
-      <p:sp>
-        <p:nvSpPr>
-          <p:cNvPr id="12" name="TextBox 11"/>
-          <p:cNvSpPr txBox="1"/>
-          <p:nvPr/>
-        </p:nvSpPr>
-        <p:spPr>
-          <a:xfrm>
-            <a:off x="754380" y="4080510"/>
-            <a:ext cx="1680210" cy="274320"/>
-          </a:xfrm>
-          <a:prstGeom prst="rect">
-            <a:avLst/>
-          </a:prstGeom>
-          <a:noFill/>
-        </p:spPr>
-        <p:txBody>
-          <a:bodyPr wrap="square" lIns="27432" rIns="27432" tIns="13716" bIns="13716" anchor="t">
-            <a:spAutoFit/>
-          </a:bodyPr>
-          <a:lstStyle/>
-          <a:p>
-            <a:pPr algn="l"/>
-            <a:r>
-              <a:rPr sz="1050" b="1" i="1">
-                <a:solidFill>
-                  <a:srgbClr val="7B5CF5"/>
-                </a:solidFill>
-                <a:latin typeface="Consolas"/>
-              </a:rPr>
-              <a:t>5 min</a:t>
-            </a:r>
-          </a:p>
-        </p:txBody>
-      </p:sp>
-      <p:sp>
-        <p:nvSpPr>
-          <p:cNvPr id="13" name="Rounded Rectangle 12"/>
-          <p:cNvSpPr/>
-          <p:nvPr/>
-        </p:nvSpPr>
-        <p:spPr>
-          <a:xfrm>
-            <a:off x="2743200" y="1954530"/>
-            <a:ext cx="2023110" cy="2400300"/>
-          </a:xfrm>
-          <a:prstGeom prst="roundRect">
-            <a:avLst>
-              <a:gd name="adj" fmla="val 10000"/>
-            </a:avLst>
-          </a:prstGeom>
-          <a:solidFill>
-            <a:srgbClr val="FFE7DB"/>
-          </a:solidFill>
-          <a:ln w="19050">
-            <a:solidFill>
-              <a:srgbClr val="FB7048"/>
-            </a:solidFill>
-          </a:ln>
-          <a:effectLst/>
-        </p:spPr>
-        <p:style>
-          <a:lnRef idx="1">
-            <a:schemeClr val="accent1"/>
-          </a:lnRef>
-          <a:fillRef idx="3">
-            <a:schemeClr val="accent1"/>
-          </a:fillRef>
-          <a:effectRef idx="2">
-            <a:schemeClr val="accent1"/>
-          </a:effectRef>
-          <a:fontRef idx="minor">
-            <a:schemeClr val="lt1"/>
-          </a:fontRef>
-        </p:style>
-        <p:txBody>
-          <a:bodyPr rtlCol="0" anchor="ctr"/>
-          <a:lstStyle/>
-          <a:p>
-            <a:pPr algn="ctr"/>
-          </a:p>
-        </p:txBody>
-      </p:sp>
-      <p:sp>
-        <p:nvSpPr>
-          <p:cNvPr id="14" name="Oval 13"/>
-          <p:cNvSpPr/>
-          <p:nvPr/>
-        </p:nvSpPr>
-        <p:spPr>
-          <a:xfrm>
-            <a:off x="2866644" y="2009394"/>
-            <a:ext cx="438912" cy="438912"/>
-          </a:xfrm>
-          <a:prstGeom prst="ellipse">
-            <a:avLst/>
-          </a:prstGeom>
-          <a:solidFill>
-            <a:srgbClr val="FFFFFF"/>
-          </a:solidFill>
-          <a:ln w="23812">
-            <a:solidFill>
-              <a:srgbClr val="FB7048"/>
-            </a:solidFill>
-          </a:ln>
-          <a:effectLst/>
-        </p:spPr>
-        <p:style>
-          <a:lnRef idx="1">
-            <a:schemeClr val="accent1"/>
-          </a:lnRef>
-          <a:fillRef idx="3">
-            <a:schemeClr val="accent1"/>
-          </a:fillRef>
-          <a:effectRef idx="2">
-            <a:schemeClr val="accent1"/>
-          </a:effectRef>
-          <a:fontRef idx="minor">
-            <a:schemeClr val="lt1"/>
-          </a:fontRef>
-        </p:style>
-        <p:txBody>
-          <a:bodyPr rtlCol="0" anchor="ctr"/>
-          <a:lstStyle/>
-          <a:p>
-            <a:pPr algn="ctr"/>
-          </a:p>
-        </p:txBody>
-      </p:sp>
-      <p:sp>
-        <p:nvSpPr>
-          <p:cNvPr id="15" name="TextBox 14"/>
-          <p:cNvSpPr txBox="1"/>
-          <p:nvPr/>
-        </p:nvSpPr>
-        <p:spPr>
-          <a:xfrm>
-            <a:off x="2866644" y="2009394"/>
-            <a:ext cx="438912" cy="438912"/>
-          </a:xfrm>
-          <a:prstGeom prst="rect">
-            <a:avLst/>
-          </a:prstGeom>
-          <a:noFill/>
-        </p:spPr>
-        <p:txBody>
-          <a:bodyPr wrap="square" lIns="27432" rIns="27432" tIns="13716" bIns="13716" anchor="ctr">
-            <a:spAutoFit/>
-          </a:bodyPr>
-          <a:lstStyle/>
-          <a:p>
-            <a:pPr algn="ctr"/>
-            <a:r>
-              <a:rPr sz="1950" b="1" i="0">
-                <a:solidFill>
-                  <a:srgbClr val="FB7048"/>
-                </a:solidFill>
-                <a:latin typeface="Arial Black"/>
-              </a:rPr>
-              <a:t>②</a:t>
-            </a:r>
-          </a:p>
-        </p:txBody>
-      </p:sp>
-      <p:sp>
-        <p:nvSpPr>
-          <p:cNvPr id="16" name="TextBox 15"/>
-          <p:cNvSpPr txBox="1"/>
-          <p:nvPr/>
-        </p:nvSpPr>
-        <p:spPr>
-          <a:xfrm>
-            <a:off x="2914650" y="2708910"/>
-            <a:ext cx="1680210" cy="377190"/>
-          </a:xfrm>
-          <a:prstGeom prst="rect">
-            <a:avLst/>
-          </a:prstGeom>
-          <a:noFill/>
-        </p:spPr>
-        <p:txBody>
-          <a:bodyPr wrap="square" lIns="27432" rIns="27432" tIns="13716" bIns="13716" anchor="t">
-            <a:spAutoFit/>
-          </a:bodyPr>
-          <a:lstStyle/>
-          <a:p>
-            <a:pPr algn="l"/>
-            <a:r>
-              <a:rPr sz="1350" b="1" i="0">
-                <a:solidFill>
-                  <a:srgbClr val="1F2937"/>
-                </a:solidFill>
-                <a:latin typeface="Arial Black"/>
-              </a:rPr>
-              <a:t>換資料</a:t>
+              <a:t>  💎  N+M 的甜蜜:你的工具一支不變,adapter 差別只在 mcp-client.js 幾行</a:t>
             </a:r>
           </a:p>
         </p:txBody>
@@ -13422,687 +15197,6 @@
       <p:sp>
         <p:nvSpPr>
           <p:cNvPr id="17" name="TextBox 16"/>
-          <p:cNvSpPr txBox="1"/>
-          <p:nvPr/>
-        </p:nvSpPr>
-        <p:spPr>
-          <a:xfrm>
-            <a:off x="2914650" y="3154679"/>
-            <a:ext cx="1680210" cy="960119"/>
-          </a:xfrm>
-          <a:prstGeom prst="rect">
-            <a:avLst/>
-          </a:prstGeom>
-          <a:noFill/>
-        </p:spPr>
-        <p:txBody>
-          <a:bodyPr wrap="square" lIns="27432" rIns="27432" tIns="13716" bIns="13716" anchor="t">
-            <a:spAutoFit/>
-          </a:bodyPr>
-          <a:lstStyle/>
-          <a:p>
-            <a:pPr algn="l">
-              <a:spcAft>
-                <a:spcPts val="300"/>
-              </a:spcAft>
-            </a:pPr>
-            <a:r>
-              <a:rPr sz="975" b="0" i="0">
-                <a:solidFill>
-                  <a:srgbClr val="374151"/>
-                </a:solidFill>
-                <a:latin typeface="Calibri"/>
-              </a:rPr>
-              <a:t>編輯 data/*.json</a:t>
-            </a:r>
-          </a:p>
-          <a:p>
-            <a:pPr algn="l">
-              <a:spcAft>
-                <a:spcPts val="300"/>
-              </a:spcAft>
-            </a:pPr>
-            <a:r>
-              <a:rPr sz="975" b="0" i="0">
-                <a:solidFill>
-                  <a:srgbClr val="374151"/>
-                </a:solidFill>
-                <a:latin typeface="Calibri"/>
-              </a:rPr>
-              <a:t>放你的領域內容</a:t>
-            </a:r>
-          </a:p>
-        </p:txBody>
-      </p:sp>
-      <p:sp>
-        <p:nvSpPr>
-          <p:cNvPr id="18" name="TextBox 17"/>
-          <p:cNvSpPr txBox="1"/>
-          <p:nvPr/>
-        </p:nvSpPr>
-        <p:spPr>
-          <a:xfrm>
-            <a:off x="2914650" y="4080510"/>
-            <a:ext cx="1680210" cy="274320"/>
-          </a:xfrm>
-          <a:prstGeom prst="rect">
-            <a:avLst/>
-          </a:prstGeom>
-          <a:noFill/>
-        </p:spPr>
-        <p:txBody>
-          <a:bodyPr wrap="square" lIns="27432" rIns="27432" tIns="13716" bIns="13716" anchor="t">
-            <a:spAutoFit/>
-          </a:bodyPr>
-          <a:lstStyle/>
-          <a:p>
-            <a:pPr algn="l"/>
-            <a:r>
-              <a:rPr sz="1050" b="1" i="1">
-                <a:solidFill>
-                  <a:srgbClr val="FB7048"/>
-                </a:solidFill>
-                <a:latin typeface="Consolas"/>
-              </a:rPr>
-              <a:t>15 min</a:t>
-            </a:r>
-          </a:p>
-        </p:txBody>
-      </p:sp>
-      <p:sp>
-        <p:nvSpPr>
-          <p:cNvPr id="19" name="Rounded Rectangle 18"/>
-          <p:cNvSpPr/>
-          <p:nvPr/>
-        </p:nvSpPr>
-        <p:spPr>
-          <a:xfrm>
-            <a:off x="4903470" y="1954530"/>
-            <a:ext cx="2023110" cy="2400300"/>
-          </a:xfrm>
-          <a:prstGeom prst="roundRect">
-            <a:avLst>
-              <a:gd name="adj" fmla="val 10000"/>
-            </a:avLst>
-          </a:prstGeom>
-          <a:solidFill>
-            <a:srgbClr val="D4F7F0"/>
-          </a:solidFill>
-          <a:ln w="19050">
-            <a:solidFill>
-              <a:srgbClr val="0EA594"/>
-            </a:solidFill>
-          </a:ln>
-          <a:effectLst/>
-        </p:spPr>
-        <p:style>
-          <a:lnRef idx="1">
-            <a:schemeClr val="accent1"/>
-          </a:lnRef>
-          <a:fillRef idx="3">
-            <a:schemeClr val="accent1"/>
-          </a:fillRef>
-          <a:effectRef idx="2">
-            <a:schemeClr val="accent1"/>
-          </a:effectRef>
-          <a:fontRef idx="minor">
-            <a:schemeClr val="lt1"/>
-          </a:fontRef>
-        </p:style>
-        <p:txBody>
-          <a:bodyPr rtlCol="0" anchor="ctr"/>
-          <a:lstStyle/>
-          <a:p>
-            <a:pPr algn="ctr"/>
-          </a:p>
-        </p:txBody>
-      </p:sp>
-      <p:sp>
-        <p:nvSpPr>
-          <p:cNvPr id="20" name="Oval 19"/>
-          <p:cNvSpPr/>
-          <p:nvPr/>
-        </p:nvSpPr>
-        <p:spPr>
-          <a:xfrm>
-            <a:off x="5026914" y="2009394"/>
-            <a:ext cx="438912" cy="438912"/>
-          </a:xfrm>
-          <a:prstGeom prst="ellipse">
-            <a:avLst/>
-          </a:prstGeom>
-          <a:solidFill>
-            <a:srgbClr val="FFFFFF"/>
-          </a:solidFill>
-          <a:ln w="23812">
-            <a:solidFill>
-              <a:srgbClr val="0EA594"/>
-            </a:solidFill>
-          </a:ln>
-          <a:effectLst/>
-        </p:spPr>
-        <p:style>
-          <a:lnRef idx="1">
-            <a:schemeClr val="accent1"/>
-          </a:lnRef>
-          <a:fillRef idx="3">
-            <a:schemeClr val="accent1"/>
-          </a:fillRef>
-          <a:effectRef idx="2">
-            <a:schemeClr val="accent1"/>
-          </a:effectRef>
-          <a:fontRef idx="minor">
-            <a:schemeClr val="lt1"/>
-          </a:fontRef>
-        </p:style>
-        <p:txBody>
-          <a:bodyPr rtlCol="0" anchor="ctr"/>
-          <a:lstStyle/>
-          <a:p>
-            <a:pPr algn="ctr"/>
-          </a:p>
-        </p:txBody>
-      </p:sp>
-      <p:sp>
-        <p:nvSpPr>
-          <p:cNvPr id="21" name="TextBox 20"/>
-          <p:cNvSpPr txBox="1"/>
-          <p:nvPr/>
-        </p:nvSpPr>
-        <p:spPr>
-          <a:xfrm>
-            <a:off x="5026914" y="2009394"/>
-            <a:ext cx="438912" cy="438912"/>
-          </a:xfrm>
-          <a:prstGeom prst="rect">
-            <a:avLst/>
-          </a:prstGeom>
-          <a:noFill/>
-        </p:spPr>
-        <p:txBody>
-          <a:bodyPr wrap="square" lIns="27432" rIns="27432" tIns="13716" bIns="13716" anchor="ctr">
-            <a:spAutoFit/>
-          </a:bodyPr>
-          <a:lstStyle/>
-          <a:p>
-            <a:pPr algn="ctr"/>
-            <a:r>
-              <a:rPr sz="1950" b="1" i="0">
-                <a:solidFill>
-                  <a:srgbClr val="0EA594"/>
-                </a:solidFill>
-                <a:latin typeface="Arial Black"/>
-              </a:rPr>
-              <a:t>③</a:t>
-            </a:r>
-          </a:p>
-        </p:txBody>
-      </p:sp>
-      <p:sp>
-        <p:nvSpPr>
-          <p:cNvPr id="22" name="TextBox 21"/>
-          <p:cNvSpPr txBox="1"/>
-          <p:nvPr/>
-        </p:nvSpPr>
-        <p:spPr>
-          <a:xfrm>
-            <a:off x="5074920" y="2708910"/>
-            <a:ext cx="1680210" cy="377190"/>
-          </a:xfrm>
-          <a:prstGeom prst="rect">
-            <a:avLst/>
-          </a:prstGeom>
-          <a:noFill/>
-        </p:spPr>
-        <p:txBody>
-          <a:bodyPr wrap="square" lIns="27432" rIns="27432" tIns="13716" bIns="13716" anchor="t">
-            <a:spAutoFit/>
-          </a:bodyPr>
-          <a:lstStyle/>
-          <a:p>
-            <a:pPr algn="l"/>
-            <a:r>
-              <a:rPr sz="1350" b="1" i="0">
-                <a:solidFill>
-                  <a:srgbClr val="1F2937"/>
-                </a:solidFill>
-                <a:latin typeface="Arial Black"/>
-              </a:rPr>
-              <a:t>改說明書</a:t>
-            </a:r>
-          </a:p>
-        </p:txBody>
-      </p:sp>
-      <p:sp>
-        <p:nvSpPr>
-          <p:cNvPr id="23" name="TextBox 22"/>
-          <p:cNvSpPr txBox="1"/>
-          <p:nvPr/>
-        </p:nvSpPr>
-        <p:spPr>
-          <a:xfrm>
-            <a:off x="5074920" y="3154679"/>
-            <a:ext cx="1680210" cy="960119"/>
-          </a:xfrm>
-          <a:prstGeom prst="rect">
-            <a:avLst/>
-          </a:prstGeom>
-          <a:noFill/>
-        </p:spPr>
-        <p:txBody>
-          <a:bodyPr wrap="square" lIns="27432" rIns="27432" tIns="13716" bIns="13716" anchor="t">
-            <a:spAutoFit/>
-          </a:bodyPr>
-          <a:lstStyle/>
-          <a:p>
-            <a:pPr algn="l">
-              <a:spcAft>
-                <a:spcPts val="300"/>
-              </a:spcAft>
-            </a:pPr>
-            <a:r>
-              <a:rPr sz="975" b="0" i="0">
-                <a:solidFill>
-                  <a:srgbClr val="374151"/>
-                </a:solidFill>
-                <a:latin typeface="Calibri"/>
-              </a:rPr>
-              <a:t>docstring 的使用情境</a:t>
-            </a:r>
-          </a:p>
-          <a:p>
-            <a:pPr algn="l">
-              <a:spcAft>
-                <a:spcPts val="300"/>
-              </a:spcAft>
-            </a:pPr>
-            <a:r>
-              <a:rPr sz="975" b="0" i="0">
-                <a:solidFill>
-                  <a:srgbClr val="374151"/>
-                </a:solidFill>
-                <a:latin typeface="Calibri"/>
-              </a:rPr>
-              <a:t>決定工具呼叫率</a:t>
-            </a:r>
-          </a:p>
-        </p:txBody>
-      </p:sp>
-      <p:sp>
-        <p:nvSpPr>
-          <p:cNvPr id="24" name="TextBox 23"/>
-          <p:cNvSpPr txBox="1"/>
-          <p:nvPr/>
-        </p:nvSpPr>
-        <p:spPr>
-          <a:xfrm>
-            <a:off x="5074920" y="4080510"/>
-            <a:ext cx="1680210" cy="274320"/>
-          </a:xfrm>
-          <a:prstGeom prst="rect">
-            <a:avLst/>
-          </a:prstGeom>
-          <a:noFill/>
-        </p:spPr>
-        <p:txBody>
-          <a:bodyPr wrap="square" lIns="27432" rIns="27432" tIns="13716" bIns="13716" anchor="t">
-            <a:spAutoFit/>
-          </a:bodyPr>
-          <a:lstStyle/>
-          <a:p>
-            <a:pPr algn="l"/>
-            <a:r>
-              <a:rPr sz="1050" b="1" i="1">
-                <a:solidFill>
-                  <a:srgbClr val="0EA594"/>
-                </a:solidFill>
-                <a:latin typeface="Consolas"/>
-              </a:rPr>
-              <a:t>10 min</a:t>
-            </a:r>
-          </a:p>
-        </p:txBody>
-      </p:sp>
-      <p:sp>
-        <p:nvSpPr>
-          <p:cNvPr id="25" name="Rounded Rectangle 24"/>
-          <p:cNvSpPr/>
-          <p:nvPr/>
-        </p:nvSpPr>
-        <p:spPr>
-          <a:xfrm>
-            <a:off x="7063740" y="1954530"/>
-            <a:ext cx="2023110" cy="2400300"/>
-          </a:xfrm>
-          <a:prstGeom prst="roundRect">
-            <a:avLst>
-              <a:gd name="adj" fmla="val 10000"/>
-            </a:avLst>
-          </a:prstGeom>
-          <a:solidFill>
-            <a:srgbClr val="FEE2E2"/>
-          </a:solidFill>
-          <a:ln w="19050">
-            <a:solidFill>
-              <a:srgbClr val="EF4444"/>
-            </a:solidFill>
-          </a:ln>
-          <a:effectLst/>
-        </p:spPr>
-        <p:style>
-          <a:lnRef idx="1">
-            <a:schemeClr val="accent1"/>
-          </a:lnRef>
-          <a:fillRef idx="3">
-            <a:schemeClr val="accent1"/>
-          </a:fillRef>
-          <a:effectRef idx="2">
-            <a:schemeClr val="accent1"/>
-          </a:effectRef>
-          <a:fontRef idx="minor">
-            <a:schemeClr val="lt1"/>
-          </a:fontRef>
-        </p:style>
-        <p:txBody>
-          <a:bodyPr rtlCol="0" anchor="ctr"/>
-          <a:lstStyle/>
-          <a:p>
-            <a:pPr algn="ctr"/>
-          </a:p>
-        </p:txBody>
-      </p:sp>
-      <p:sp>
-        <p:nvSpPr>
-          <p:cNvPr id="26" name="Oval 25"/>
-          <p:cNvSpPr/>
-          <p:nvPr/>
-        </p:nvSpPr>
-        <p:spPr>
-          <a:xfrm>
-            <a:off x="7187184" y="2009394"/>
-            <a:ext cx="438912" cy="438912"/>
-          </a:xfrm>
-          <a:prstGeom prst="ellipse">
-            <a:avLst/>
-          </a:prstGeom>
-          <a:solidFill>
-            <a:srgbClr val="FFFFFF"/>
-          </a:solidFill>
-          <a:ln w="23812">
-            <a:solidFill>
-              <a:srgbClr val="EF4444"/>
-            </a:solidFill>
-          </a:ln>
-          <a:effectLst/>
-        </p:spPr>
-        <p:style>
-          <a:lnRef idx="1">
-            <a:schemeClr val="accent1"/>
-          </a:lnRef>
-          <a:fillRef idx="3">
-            <a:schemeClr val="accent1"/>
-          </a:fillRef>
-          <a:effectRef idx="2">
-            <a:schemeClr val="accent1"/>
-          </a:effectRef>
-          <a:fontRef idx="minor">
-            <a:schemeClr val="lt1"/>
-          </a:fontRef>
-        </p:style>
-        <p:txBody>
-          <a:bodyPr rtlCol="0" anchor="ctr"/>
-          <a:lstStyle/>
-          <a:p>
-            <a:pPr algn="ctr"/>
-          </a:p>
-        </p:txBody>
-      </p:sp>
-      <p:sp>
-        <p:nvSpPr>
-          <p:cNvPr id="27" name="TextBox 26"/>
-          <p:cNvSpPr txBox="1"/>
-          <p:nvPr/>
-        </p:nvSpPr>
-        <p:spPr>
-          <a:xfrm>
-            <a:off x="7187184" y="2009394"/>
-            <a:ext cx="438912" cy="438912"/>
-          </a:xfrm>
-          <a:prstGeom prst="rect">
-            <a:avLst/>
-          </a:prstGeom>
-          <a:noFill/>
-        </p:spPr>
-        <p:txBody>
-          <a:bodyPr wrap="square" lIns="27432" rIns="27432" tIns="13716" bIns="13716" anchor="ctr">
-            <a:spAutoFit/>
-          </a:bodyPr>
-          <a:lstStyle/>
-          <a:p>
-            <a:pPr algn="ctr"/>
-            <a:r>
-              <a:rPr sz="1950" b="1" i="0">
-                <a:solidFill>
-                  <a:srgbClr val="EF4444"/>
-                </a:solidFill>
-                <a:latin typeface="Arial Black"/>
-              </a:rPr>
-              <a:t>④</a:t>
-            </a:r>
-          </a:p>
-        </p:txBody>
-      </p:sp>
-      <p:sp>
-        <p:nvSpPr>
-          <p:cNvPr id="28" name="TextBox 27"/>
-          <p:cNvSpPr txBox="1"/>
-          <p:nvPr/>
-        </p:nvSpPr>
-        <p:spPr>
-          <a:xfrm>
-            <a:off x="7235190" y="2708910"/>
-            <a:ext cx="1680210" cy="377190"/>
-          </a:xfrm>
-          <a:prstGeom prst="rect">
-            <a:avLst/>
-          </a:prstGeom>
-          <a:noFill/>
-        </p:spPr>
-        <p:txBody>
-          <a:bodyPr wrap="square" lIns="27432" rIns="27432" tIns="13716" bIns="13716" anchor="t">
-            <a:spAutoFit/>
-          </a:bodyPr>
-          <a:lstStyle/>
-          <a:p>
-            <a:pPr algn="l"/>
-            <a:r>
-              <a:rPr sz="1350" b="1" i="0">
-                <a:solidFill>
-                  <a:srgbClr val="1F2937"/>
-                </a:solidFill>
-                <a:latin typeface="Arial Black"/>
-              </a:rPr>
-              <a:t>驗證</a:t>
-            </a:r>
-          </a:p>
-        </p:txBody>
-      </p:sp>
-      <p:sp>
-        <p:nvSpPr>
-          <p:cNvPr id="29" name="TextBox 28"/>
-          <p:cNvSpPr txBox="1"/>
-          <p:nvPr/>
-        </p:nvSpPr>
-        <p:spPr>
-          <a:xfrm>
-            <a:off x="7235190" y="3154679"/>
-            <a:ext cx="1680210" cy="960119"/>
-          </a:xfrm>
-          <a:prstGeom prst="rect">
-            <a:avLst/>
-          </a:prstGeom>
-          <a:noFill/>
-        </p:spPr>
-        <p:txBody>
-          <a:bodyPr wrap="square" lIns="27432" rIns="27432" tIns="13716" bIns="13716" anchor="t">
-            <a:spAutoFit/>
-          </a:bodyPr>
-          <a:lstStyle/>
-          <a:p>
-            <a:pPr algn="l">
-              <a:spcAft>
-                <a:spcPts val="300"/>
-              </a:spcAft>
-            </a:pPr>
-            <a:r>
-              <a:rPr sz="975" b="0" i="0">
-                <a:solidFill>
-                  <a:srgbClr val="374151"/>
-                </a:solidFill>
-                <a:latin typeface="Calibri"/>
-              </a:rPr>
-              <a:t>重啟 npm start</a:t>
-            </a:r>
-          </a:p>
-          <a:p>
-            <a:pPr algn="l">
-              <a:spcAft>
-                <a:spcPts val="300"/>
-              </a:spcAft>
-            </a:pPr>
-            <a:r>
-              <a:rPr sz="975" b="0" i="0">
-                <a:solidFill>
-                  <a:srgbClr val="374151"/>
-                </a:solidFill>
-                <a:latin typeface="Calibri"/>
-              </a:rPr>
-              <a:t>問自己資料問題</a:t>
-            </a:r>
-          </a:p>
-        </p:txBody>
-      </p:sp>
-      <p:sp>
-        <p:nvSpPr>
-          <p:cNvPr id="30" name="TextBox 29"/>
-          <p:cNvSpPr txBox="1"/>
-          <p:nvPr/>
-        </p:nvSpPr>
-        <p:spPr>
-          <a:xfrm>
-            <a:off x="7235190" y="4080510"/>
-            <a:ext cx="1680210" cy="274320"/>
-          </a:xfrm>
-          <a:prstGeom prst="rect">
-            <a:avLst/>
-          </a:prstGeom>
-          <a:noFill/>
-        </p:spPr>
-        <p:txBody>
-          <a:bodyPr wrap="square" lIns="27432" rIns="27432" tIns="13716" bIns="13716" anchor="t">
-            <a:spAutoFit/>
-          </a:bodyPr>
-          <a:lstStyle/>
-          <a:p>
-            <a:pPr algn="l"/>
-            <a:r>
-              <a:rPr sz="1050" b="1" i="1">
-                <a:solidFill>
-                  <a:srgbClr val="EF4444"/>
-                </a:solidFill>
-                <a:latin typeface="Consolas"/>
-              </a:rPr>
-              <a:t>5 min</a:t>
-            </a:r>
-          </a:p>
-        </p:txBody>
-      </p:sp>
-      <p:sp>
-        <p:nvSpPr>
-          <p:cNvPr id="31" name="Rounded Rectangle 30"/>
-          <p:cNvSpPr/>
-          <p:nvPr/>
-        </p:nvSpPr>
-        <p:spPr>
-          <a:xfrm>
-            <a:off x="582930" y="4457700"/>
-            <a:ext cx="8229600" cy="342900"/>
-          </a:xfrm>
-          <a:prstGeom prst="roundRect">
-            <a:avLst>
-              <a:gd name="adj" fmla="val 10000"/>
-            </a:avLst>
-          </a:prstGeom>
-          <a:solidFill>
-            <a:srgbClr val="EEE8FF"/>
-          </a:solidFill>
-          <a:ln w="19050">
-            <a:solidFill>
-              <a:srgbClr val="7B5CF5"/>
-            </a:solidFill>
-          </a:ln>
-          <a:effectLst/>
-        </p:spPr>
-        <p:style>
-          <a:lnRef idx="1">
-            <a:schemeClr val="accent1"/>
-          </a:lnRef>
-          <a:fillRef idx="3">
-            <a:schemeClr val="accent1"/>
-          </a:fillRef>
-          <a:effectRef idx="2">
-            <a:schemeClr val="accent1"/>
-          </a:effectRef>
-          <a:fontRef idx="minor">
-            <a:schemeClr val="lt1"/>
-          </a:fontRef>
-        </p:style>
-        <p:txBody>
-          <a:bodyPr rtlCol="0" anchor="ctr"/>
-          <a:lstStyle/>
-          <a:p>
-            <a:pPr algn="ctr"/>
-          </a:p>
-        </p:txBody>
-      </p:sp>
-      <p:sp>
-        <p:nvSpPr>
-          <p:cNvPr id="32" name="TextBox 31"/>
-          <p:cNvSpPr txBox="1"/>
-          <p:nvPr/>
-        </p:nvSpPr>
-        <p:spPr>
-          <a:xfrm>
-            <a:off x="788669" y="4457700"/>
-            <a:ext cx="7818120" cy="342900"/>
-          </a:xfrm>
-          <a:prstGeom prst="rect">
-            <a:avLst/>
-          </a:prstGeom>
-          <a:noFill/>
-        </p:spPr>
-        <p:txBody>
-          <a:bodyPr wrap="square" lIns="27432" rIns="27432" tIns="13716" bIns="13716" anchor="ctr">
-            <a:spAutoFit/>
-          </a:bodyPr>
-          <a:lstStyle/>
-          <a:p>
-            <a:pPr algn="l"/>
-            <a:r>
-              <a:rPr sz="975" b="1" i="0">
-                <a:solidFill>
-                  <a:srgbClr val="7B5CF5"/>
-                </a:solidFill>
-                <a:latin typeface="Calibri"/>
-              </a:rPr>
-              <a:t>▶  產出:你的 AI 助理會回答你自己放進去的資料 — 不是英文中心 demo 了</a:t>
-            </a:r>
-          </a:p>
-        </p:txBody>
-      </p:sp>
-      <p:sp>
-        <p:nvSpPr>
-          <p:cNvPr id="33" name="TextBox 32"/>
           <p:cNvSpPr txBox="1"/>
           <p:nvPr/>
         </p:nvSpPr>
@@ -14130,7 +15224,7 @@
                 </a:solidFill>
                 <a:latin typeface="Calibri"/>
               </a:rPr>
-              <a:t>9 / 12</a:t>
+              <a:t>9 / 13</a:t>
             </a:r>
           </a:p>
         </p:txBody>

--- a/04-hands-on-lab.pptx
+++ b/04-hands-on-lab.pptx
@@ -5366,7 +5366,7 @@
                 </a:solidFill>
                 <a:latin typeface="Calibri"/>
               </a:rPr>
-              <a:t>⚠ JSON 語法錯會卡住:</a:t>
+              <a:t>△  JSON 語法錯會卡住:</a:t>
             </a:r>
           </a:p>
           <a:p>
@@ -11351,7 +11351,7 @@
                 </a:solidFill>
                 <a:latin typeface="Calibri"/>
               </a:rPr>
-              <a:t>  🛑 maxIterations=10 是護欄;整個 agent 沒有 magic — 就是 for-loop + if-else</a:t>
+              <a:t>  △  maxIterations=10 是護欄;整個 agent 沒有 magic — 就是 for-loop + if-else</a:t>
             </a:r>
           </a:p>
         </p:txBody>
@@ -12929,7 +12929,7 @@
         <p:spPr>
           <a:xfrm>
             <a:off x="582930" y="3120389"/>
-            <a:ext cx="8229600" cy="1371600"/>
+            <a:ext cx="8229600" cy="1577339"/>
           </a:xfrm>
           <a:prstGeom prst="roundRect">
             <a:avLst>
@@ -13012,7 +13012,7 @@
         <p:spPr>
           <a:xfrm>
             <a:off x="720090" y="3531870"/>
-            <a:ext cx="7886700" cy="925830"/>
+            <a:ext cx="7886700" cy="1131569"/>
           </a:xfrm>
           <a:prstGeom prst="rect">
             <a:avLst/>
@@ -13056,7 +13056,7 @@
         <p:spPr>
           <a:xfrm>
             <a:off x="939546" y="3682746"/>
-            <a:ext cx="7509509" cy="637794"/>
+            <a:ext cx="7509509" cy="843534"/>
           </a:xfrm>
           <a:prstGeom prst="rect">
             <a:avLst/>
@@ -13190,7 +13190,7 @@
         </p:nvSpPr>
         <p:spPr>
           <a:xfrm>
-            <a:off x="582930" y="4560570"/>
+            <a:off x="582930" y="4834890"/>
             <a:ext cx="8229600" cy="205739"/>
           </a:xfrm>
           <a:prstGeom prst="rect">
@@ -13212,7 +13212,7 @@
                 </a:solidFill>
                 <a:latin typeface="Calibri"/>
               </a:rPr>
-              <a:t>🎉 三行 ✓ + URL → MCP server 都連上了</a:t>
+              <a:t>★  三行 ✓ + URL → MCP server 都連上了</a:t>
             </a:r>
           </a:p>
         </p:txBody>
@@ -13387,7 +13387,7 @@
                 </a:solidFill>
                 <a:latin typeface="Calibri"/>
               </a:rPr>
-              <a:t>02 · ⚠   S E T U P · 卡住怎麼辦</a:t>
+              <a:t>02 · !   S E T U P · 卡住怎麼辦</a:t>
             </a:r>
           </a:p>
         </p:txBody>
@@ -13470,8 +13470,8 @@
         </p:nvSpPr>
         <p:spPr>
           <a:xfrm>
-            <a:off x="582930" y="1748789"/>
-            <a:ext cx="8298179" cy="493776"/>
+            <a:off x="582930" y="1714500"/>
+            <a:ext cx="8298179" cy="534924"/>
           </a:xfrm>
           <a:prstGeom prst="roundRect">
             <a:avLst>
@@ -13518,8 +13518,8 @@
         </p:nvSpPr>
         <p:spPr>
           <a:xfrm>
-            <a:off x="685800" y="1748789"/>
-            <a:ext cx="411479" cy="493776"/>
+            <a:off x="685800" y="1714500"/>
+            <a:ext cx="411479" cy="534924"/>
           </a:xfrm>
           <a:prstGeom prst="rect">
             <a:avLst/>
@@ -13554,7 +13554,7 @@
         <p:spPr>
           <a:xfrm>
             <a:off x="1165860" y="1748789"/>
-            <a:ext cx="2400300" cy="493776"/>
+            <a:ext cx="2263139" cy="274320"/>
           </a:xfrm>
           <a:prstGeom prst="rect">
             <a:avLst/>
@@ -13569,7 +13569,7 @@
           <a:p>
             <a:pPr algn="l"/>
             <a:r>
-              <a:rPr sz="1125" b="1" i="0">
+              <a:rPr sz="1050" b="1" i="0">
                 <a:solidFill>
                   <a:srgbClr val="1F2937"/>
                 </a:solidFill>
@@ -13588,8 +13588,8 @@
         </p:nvSpPr>
         <p:spPr>
           <a:xfrm>
-            <a:off x="3634739" y="1748789"/>
-            <a:ext cx="5280660" cy="493776"/>
+            <a:off x="1165860" y="1988819"/>
+            <a:ext cx="685800" cy="240029"/>
           </a:xfrm>
           <a:prstGeom prst="rect">
             <a:avLst/>
@@ -13604,7 +13604,42 @@
           <a:p>
             <a:pPr algn="l"/>
             <a:r>
-              <a:rPr sz="900" b="0" i="0">
+              <a:rPr sz="675" b="1" i="0">
+                <a:solidFill>
+                  <a:srgbClr val="9CA3AF"/>
+                </a:solidFill>
+                <a:latin typeface="Consolas"/>
+              </a:rPr>
+              <a:t>Mac/Linux</a:t>
+            </a:r>
+          </a:p>
+        </p:txBody>
+      </p:sp>
+      <p:sp>
+        <p:nvSpPr>
+          <p:cNvPr id="11" name="TextBox 10"/>
+          <p:cNvSpPr txBox="1"/>
+          <p:nvPr/>
+        </p:nvSpPr>
+        <p:spPr>
+          <a:xfrm>
+            <a:off x="3429000" y="1748789"/>
+            <a:ext cx="5486400" cy="240029"/>
+          </a:xfrm>
+          <a:prstGeom prst="rect">
+            <a:avLst/>
+          </a:prstGeom>
+          <a:noFill/>
+        </p:spPr>
+        <p:txBody>
+          <a:bodyPr wrap="square" lIns="27432" rIns="27432" tIns="13716" bIns="13716" anchor="ctr">
+            <a:spAutoFit/>
+          </a:bodyPr>
+          <a:lstStyle/>
+          <a:p>
+            <a:pPr algn="l"/>
+            <a:r>
+              <a:rPr sz="825" b="0" i="0">
                 <a:solidFill>
                   <a:srgbClr val="374151"/>
                 </a:solidFill>
@@ -13617,14 +13652,119 @@
       </p:sp>
       <p:sp>
         <p:nvSpPr>
-          <p:cNvPr id="11" name="Rounded Rectangle 10"/>
+          <p:cNvPr id="12" name="TextBox 11"/>
+          <p:cNvSpPr txBox="1"/>
+          <p:nvPr/>
+        </p:nvSpPr>
+        <p:spPr>
+          <a:xfrm>
+            <a:off x="1165860" y="1988819"/>
+            <a:ext cx="685800" cy="240029"/>
+          </a:xfrm>
+          <a:prstGeom prst="rect">
+            <a:avLst/>
+          </a:prstGeom>
+          <a:noFill/>
+        </p:spPr>
+        <p:txBody>
+          <a:bodyPr wrap="square" lIns="27432" rIns="27432" tIns="13716" bIns="13716" anchor="ctr">
+            <a:spAutoFit/>
+          </a:bodyPr>
+          <a:lstStyle/>
+          <a:p>
+            <a:pPr algn="l"/>
+            <a:r>
+              <a:rPr sz="675" b="1" i="0">
+                <a:solidFill>
+                  <a:srgbClr val="9CA3AF"/>
+                </a:solidFill>
+                <a:latin typeface="Consolas"/>
+              </a:rPr>
+              <a:t/>
+            </a:r>
+          </a:p>
+        </p:txBody>
+      </p:sp>
+      <p:sp>
+        <p:nvSpPr>
+          <p:cNvPr id="13" name="TextBox 12"/>
+          <p:cNvSpPr txBox="1"/>
+          <p:nvPr/>
+        </p:nvSpPr>
+        <p:spPr>
+          <a:xfrm>
+            <a:off x="3429000" y="2002536"/>
+            <a:ext cx="582930" cy="240029"/>
+          </a:xfrm>
+          <a:prstGeom prst="rect">
+            <a:avLst/>
+          </a:prstGeom>
+          <a:noFill/>
+        </p:spPr>
+        <p:txBody>
+          <a:bodyPr wrap="square" lIns="27432" rIns="27432" tIns="13716" bIns="13716" anchor="ctr">
+            <a:spAutoFit/>
+          </a:bodyPr>
+          <a:lstStyle/>
+          <a:p>
+            <a:pPr algn="l"/>
+            <a:r>
+              <a:rPr sz="675" b="1" i="0">
+                <a:solidFill>
+                  <a:srgbClr val="3B82F6"/>
+                </a:solidFill>
+                <a:latin typeface="Consolas"/>
+              </a:rPr>
+              <a:t>Win</a:t>
+            </a:r>
+          </a:p>
+        </p:txBody>
+      </p:sp>
+      <p:sp>
+        <p:nvSpPr>
+          <p:cNvPr id="14" name="TextBox 13"/>
+          <p:cNvSpPr txBox="1"/>
+          <p:nvPr/>
+        </p:nvSpPr>
+        <p:spPr>
+          <a:xfrm>
+            <a:off x="4011929" y="2002536"/>
+            <a:ext cx="4903470" cy="240029"/>
+          </a:xfrm>
+          <a:prstGeom prst="rect">
+            <a:avLst/>
+          </a:prstGeom>
+          <a:noFill/>
+        </p:spPr>
+        <p:txBody>
+          <a:bodyPr wrap="square" lIns="27432" rIns="27432" tIns="13716" bIns="13716" anchor="ctr">
+            <a:spAutoFit/>
+          </a:bodyPr>
+          <a:lstStyle/>
+          <a:p>
+            <a:pPr algn="l"/>
+            <a:r>
+              <a:rPr sz="825" b="0" i="0">
+                <a:solidFill>
+                  <a:srgbClr val="374151"/>
+                </a:solidFill>
+                <a:latin typeface="Consolas"/>
+              </a:rPr>
+              <a:t>irm https://astral.sh/uv/install.ps1 | iex</a:t>
+            </a:r>
+          </a:p>
+        </p:txBody>
+      </p:sp>
+      <p:sp>
+        <p:nvSpPr>
+          <p:cNvPr id="15" name="Rounded Rectangle 14"/>
           <p:cNvSpPr/>
           <p:nvPr/>
         </p:nvSpPr>
         <p:spPr>
           <a:xfrm>
-            <a:off x="582930" y="2311146"/>
-            <a:ext cx="8298179" cy="493776"/>
+            <a:off x="582930" y="2297430"/>
+            <a:ext cx="8298179" cy="534924"/>
           </a:xfrm>
           <a:prstGeom prst="roundRect">
             <a:avLst>
@@ -13665,14 +13805,14 @@
       </p:sp>
       <p:sp>
         <p:nvSpPr>
-          <p:cNvPr id="12" name="TextBox 11"/>
-          <p:cNvSpPr txBox="1"/>
-          <p:nvPr/>
-        </p:nvSpPr>
-        <p:spPr>
-          <a:xfrm>
-            <a:off x="685800" y="2311146"/>
-            <a:ext cx="411479" cy="493776"/>
+          <p:cNvPr id="16" name="TextBox 15"/>
+          <p:cNvSpPr txBox="1"/>
+          <p:nvPr/>
+        </p:nvSpPr>
+        <p:spPr>
+          <a:xfrm>
+            <a:off x="685800" y="2297430"/>
+            <a:ext cx="411479" cy="534924"/>
           </a:xfrm>
           <a:prstGeom prst="rect">
             <a:avLst/>
@@ -13700,14 +13840,14 @@
       </p:sp>
       <p:sp>
         <p:nvSpPr>
-          <p:cNvPr id="13" name="TextBox 12"/>
-          <p:cNvSpPr txBox="1"/>
-          <p:nvPr/>
-        </p:nvSpPr>
-        <p:spPr>
-          <a:xfrm>
-            <a:off x="1165860" y="2311146"/>
-            <a:ext cx="2400300" cy="493776"/>
+          <p:cNvPr id="17" name="TextBox 16"/>
+          <p:cNvSpPr txBox="1"/>
+          <p:nvPr/>
+        </p:nvSpPr>
+        <p:spPr>
+          <a:xfrm>
+            <a:off x="1165860" y="2331720"/>
+            <a:ext cx="2263139" cy="274320"/>
           </a:xfrm>
           <a:prstGeom prst="rect">
             <a:avLst/>
@@ -13722,7 +13862,7 @@
           <a:p>
             <a:pPr algn="l"/>
             <a:r>
-              <a:rPr sz="1125" b="1" i="0">
+              <a:rPr sz="1050" b="1" i="0">
                 <a:solidFill>
                   <a:srgbClr val="1F2937"/>
                 </a:solidFill>
@@ -13735,14 +13875,14 @@
       </p:sp>
       <p:sp>
         <p:nvSpPr>
-          <p:cNvPr id="14" name="TextBox 13"/>
-          <p:cNvSpPr txBox="1"/>
-          <p:nvPr/>
-        </p:nvSpPr>
-        <p:spPr>
-          <a:xfrm>
-            <a:off x="3634739" y="2311146"/>
-            <a:ext cx="5280660" cy="493776"/>
+          <p:cNvPr id="18" name="TextBox 17"/>
+          <p:cNvSpPr txBox="1"/>
+          <p:nvPr/>
+        </p:nvSpPr>
+        <p:spPr>
+          <a:xfrm>
+            <a:off x="1165860" y="2571750"/>
+            <a:ext cx="685800" cy="240029"/>
           </a:xfrm>
           <a:prstGeom prst="rect">
             <a:avLst/>
@@ -13757,27 +13897,167 @@
           <a:p>
             <a:pPr algn="l"/>
             <a:r>
-              <a:rPr sz="900" b="0" i="0">
+              <a:rPr sz="675" b="1" i="0">
+                <a:solidFill>
+                  <a:srgbClr val="9CA3AF"/>
+                </a:solidFill>
+                <a:latin typeface="Consolas"/>
+              </a:rPr>
+              <a:t>Mac/Linux</a:t>
+            </a:r>
+          </a:p>
+        </p:txBody>
+      </p:sp>
+      <p:sp>
+        <p:nvSpPr>
+          <p:cNvPr id="19" name="TextBox 18"/>
+          <p:cNvSpPr txBox="1"/>
+          <p:nvPr/>
+        </p:nvSpPr>
+        <p:spPr>
+          <a:xfrm>
+            <a:off x="3429000" y="2331720"/>
+            <a:ext cx="5486400" cy="240029"/>
+          </a:xfrm>
+          <a:prstGeom prst="rect">
+            <a:avLst/>
+          </a:prstGeom>
+          <a:noFill/>
+        </p:spPr>
+        <p:txBody>
+          <a:bodyPr wrap="square" lIns="27432" rIns="27432" tIns="13716" bIns="13716" anchor="ctr">
+            <a:spAutoFit/>
+          </a:bodyPr>
+          <a:lstStyle/>
+          <a:p>
+            <a:pPr algn="l"/>
+            <a:r>
+              <a:rPr sz="825" b="0" i="0">
                 <a:solidFill>
                   <a:srgbClr val="374151"/>
                 </a:solidFill>
                 <a:latin typeface="Consolas"/>
               </a:rPr>
-              <a:t>nano .env → 填入 sk-ant-...(不要加引號)</a:t>
-            </a:r>
-          </a:p>
-        </p:txBody>
-      </p:sp>
-      <p:sp>
-        <p:nvSpPr>
-          <p:cNvPr id="15" name="Rounded Rectangle 14"/>
+              <a:t>nano .env  → 填入 sk-ant-...(不要加引號)</a:t>
+            </a:r>
+          </a:p>
+        </p:txBody>
+      </p:sp>
+      <p:sp>
+        <p:nvSpPr>
+          <p:cNvPr id="20" name="TextBox 19"/>
+          <p:cNvSpPr txBox="1"/>
+          <p:nvPr/>
+        </p:nvSpPr>
+        <p:spPr>
+          <a:xfrm>
+            <a:off x="1165860" y="2571750"/>
+            <a:ext cx="685800" cy="240029"/>
+          </a:xfrm>
+          <a:prstGeom prst="rect">
+            <a:avLst/>
+          </a:prstGeom>
+          <a:noFill/>
+        </p:spPr>
+        <p:txBody>
+          <a:bodyPr wrap="square" lIns="27432" rIns="27432" tIns="13716" bIns="13716" anchor="ctr">
+            <a:spAutoFit/>
+          </a:bodyPr>
+          <a:lstStyle/>
+          <a:p>
+            <a:pPr algn="l"/>
+            <a:r>
+              <a:rPr sz="675" b="1" i="0">
+                <a:solidFill>
+                  <a:srgbClr val="9CA3AF"/>
+                </a:solidFill>
+                <a:latin typeface="Consolas"/>
+              </a:rPr>
+              <a:t/>
+            </a:r>
+          </a:p>
+        </p:txBody>
+      </p:sp>
+      <p:sp>
+        <p:nvSpPr>
+          <p:cNvPr id="21" name="TextBox 20"/>
+          <p:cNvSpPr txBox="1"/>
+          <p:nvPr/>
+        </p:nvSpPr>
+        <p:spPr>
+          <a:xfrm>
+            <a:off x="3429000" y="2585466"/>
+            <a:ext cx="582930" cy="240029"/>
+          </a:xfrm>
+          <a:prstGeom prst="rect">
+            <a:avLst/>
+          </a:prstGeom>
+          <a:noFill/>
+        </p:spPr>
+        <p:txBody>
+          <a:bodyPr wrap="square" lIns="27432" rIns="27432" tIns="13716" bIns="13716" anchor="ctr">
+            <a:spAutoFit/>
+          </a:bodyPr>
+          <a:lstStyle/>
+          <a:p>
+            <a:pPr algn="l"/>
+            <a:r>
+              <a:rPr sz="675" b="1" i="0">
+                <a:solidFill>
+                  <a:srgbClr val="3B82F6"/>
+                </a:solidFill>
+                <a:latin typeface="Consolas"/>
+              </a:rPr>
+              <a:t>Win</a:t>
+            </a:r>
+          </a:p>
+        </p:txBody>
+      </p:sp>
+      <p:sp>
+        <p:nvSpPr>
+          <p:cNvPr id="22" name="TextBox 21"/>
+          <p:cNvSpPr txBox="1"/>
+          <p:nvPr/>
+        </p:nvSpPr>
+        <p:spPr>
+          <a:xfrm>
+            <a:off x="4011929" y="2585466"/>
+            <a:ext cx="4903470" cy="240029"/>
+          </a:xfrm>
+          <a:prstGeom prst="rect">
+            <a:avLst/>
+          </a:prstGeom>
+          <a:noFill/>
+        </p:spPr>
+        <p:txBody>
+          <a:bodyPr wrap="square" lIns="27432" rIns="27432" tIns="13716" bIns="13716" anchor="ctr">
+            <a:spAutoFit/>
+          </a:bodyPr>
+          <a:lstStyle/>
+          <a:p>
+            <a:pPr algn="l"/>
+            <a:r>
+              <a:rPr sz="825" b="0" i="0">
+                <a:solidFill>
+                  <a:srgbClr val="374151"/>
+                </a:solidFill>
+                <a:latin typeface="Consolas"/>
+              </a:rPr>
+              <a:t>notepad .env  → 填入 sk-ant-...</a:t>
+            </a:r>
+          </a:p>
+        </p:txBody>
+      </p:sp>
+      <p:sp>
+        <p:nvSpPr>
+          <p:cNvPr id="23" name="Rounded Rectangle 22"/>
           <p:cNvSpPr/>
           <p:nvPr/>
         </p:nvSpPr>
         <p:spPr>
           <a:xfrm>
-            <a:off x="582930" y="2873501"/>
-            <a:ext cx="8298179" cy="493776"/>
+            <a:off x="582930" y="2880360"/>
+            <a:ext cx="8298179" cy="534924"/>
           </a:xfrm>
           <a:prstGeom prst="roundRect">
             <a:avLst>
@@ -13818,14 +14098,14 @@
       </p:sp>
       <p:sp>
         <p:nvSpPr>
-          <p:cNvPr id="16" name="TextBox 15"/>
-          <p:cNvSpPr txBox="1"/>
-          <p:nvPr/>
-        </p:nvSpPr>
-        <p:spPr>
-          <a:xfrm>
-            <a:off x="685800" y="2873501"/>
-            <a:ext cx="411479" cy="493776"/>
+          <p:cNvPr id="24" name="TextBox 23"/>
+          <p:cNvSpPr txBox="1"/>
+          <p:nvPr/>
+        </p:nvSpPr>
+        <p:spPr>
+          <a:xfrm>
+            <a:off x="685800" y="2880360"/>
+            <a:ext cx="411479" cy="534924"/>
           </a:xfrm>
           <a:prstGeom prst="rect">
             <a:avLst/>
@@ -13853,14 +14133,14 @@
       </p:sp>
       <p:sp>
         <p:nvSpPr>
-          <p:cNvPr id="17" name="TextBox 16"/>
-          <p:cNvSpPr txBox="1"/>
-          <p:nvPr/>
-        </p:nvSpPr>
-        <p:spPr>
-          <a:xfrm>
-            <a:off x="1165860" y="2873501"/>
-            <a:ext cx="2400300" cy="493776"/>
+          <p:cNvPr id="25" name="TextBox 24"/>
+          <p:cNvSpPr txBox="1"/>
+          <p:nvPr/>
+        </p:nvSpPr>
+        <p:spPr>
+          <a:xfrm>
+            <a:off x="1165860" y="2914650"/>
+            <a:ext cx="2263139" cy="274320"/>
           </a:xfrm>
           <a:prstGeom prst="rect">
             <a:avLst/>
@@ -13875,7 +14155,7 @@
           <a:p>
             <a:pPr algn="l"/>
             <a:r>
-              <a:rPr sz="1125" b="1" i="0">
+              <a:rPr sz="1050" b="1" i="0">
                 <a:solidFill>
                   <a:srgbClr val="1F2937"/>
                 </a:solidFill>
@@ -13888,14 +14168,14 @@
       </p:sp>
       <p:sp>
         <p:nvSpPr>
-          <p:cNvPr id="18" name="TextBox 17"/>
-          <p:cNvSpPr txBox="1"/>
-          <p:nvPr/>
-        </p:nvSpPr>
-        <p:spPr>
-          <a:xfrm>
-            <a:off x="3634739" y="2873501"/>
-            <a:ext cx="5280660" cy="493776"/>
+          <p:cNvPr id="26" name="TextBox 25"/>
+          <p:cNvSpPr txBox="1"/>
+          <p:nvPr/>
+        </p:nvSpPr>
+        <p:spPr>
+          <a:xfrm>
+            <a:off x="1165860" y="3154680"/>
+            <a:ext cx="685800" cy="240029"/>
           </a:xfrm>
           <a:prstGeom prst="rect">
             <a:avLst/>
@@ -13910,27 +14190,167 @@
           <a:p>
             <a:pPr algn="l"/>
             <a:r>
-              <a:rPr sz="900" b="0" i="0">
+              <a:rPr sz="675" b="1" i="0">
+                <a:solidFill>
+                  <a:srgbClr val="9CA3AF"/>
+                </a:solidFill>
+                <a:latin typeface="Consolas"/>
+              </a:rPr>
+              <a:t>Mac/Linux</a:t>
+            </a:r>
+          </a:p>
+        </p:txBody>
+      </p:sp>
+      <p:sp>
+        <p:nvSpPr>
+          <p:cNvPr id="27" name="TextBox 26"/>
+          <p:cNvSpPr txBox="1"/>
+          <p:nvPr/>
+        </p:nvSpPr>
+        <p:spPr>
+          <a:xfrm>
+            <a:off x="3429000" y="2914650"/>
+            <a:ext cx="5486400" cy="240029"/>
+          </a:xfrm>
+          <a:prstGeom prst="rect">
+            <a:avLst/>
+          </a:prstGeom>
+          <a:noFill/>
+        </p:spPr>
+        <p:txBody>
+          <a:bodyPr wrap="square" lIns="27432" rIns="27432" tIns="13716" bIns="13716" anchor="ctr">
+            <a:spAutoFit/>
+          </a:bodyPr>
+          <a:lstStyle/>
+          <a:p>
+            <a:pPr algn="l"/>
+            <a:r>
+              <a:rPr sz="825" b="0" i="0">
                 <a:solidFill>
                   <a:srgbClr val="374151"/>
                 </a:solidFill>
                 <a:latin typeface="Consolas"/>
               </a:rPr>
-              <a:t>lsof -i :3000 → kill -9 &lt;PID&gt;</a:t>
-            </a:r>
-          </a:p>
-        </p:txBody>
-      </p:sp>
-      <p:sp>
-        <p:nvSpPr>
-          <p:cNvPr id="19" name="Rounded Rectangle 18"/>
+              <a:t>lsof -i :3000  → kill -9 &lt;PID&gt;</a:t>
+            </a:r>
+          </a:p>
+        </p:txBody>
+      </p:sp>
+      <p:sp>
+        <p:nvSpPr>
+          <p:cNvPr id="28" name="TextBox 27"/>
+          <p:cNvSpPr txBox="1"/>
+          <p:nvPr/>
+        </p:nvSpPr>
+        <p:spPr>
+          <a:xfrm>
+            <a:off x="1165860" y="3154680"/>
+            <a:ext cx="685800" cy="240029"/>
+          </a:xfrm>
+          <a:prstGeom prst="rect">
+            <a:avLst/>
+          </a:prstGeom>
+          <a:noFill/>
+        </p:spPr>
+        <p:txBody>
+          <a:bodyPr wrap="square" lIns="27432" rIns="27432" tIns="13716" bIns="13716" anchor="ctr">
+            <a:spAutoFit/>
+          </a:bodyPr>
+          <a:lstStyle/>
+          <a:p>
+            <a:pPr algn="l"/>
+            <a:r>
+              <a:rPr sz="675" b="1" i="0">
+                <a:solidFill>
+                  <a:srgbClr val="9CA3AF"/>
+                </a:solidFill>
+                <a:latin typeface="Consolas"/>
+              </a:rPr>
+              <a:t/>
+            </a:r>
+          </a:p>
+        </p:txBody>
+      </p:sp>
+      <p:sp>
+        <p:nvSpPr>
+          <p:cNvPr id="29" name="TextBox 28"/>
+          <p:cNvSpPr txBox="1"/>
+          <p:nvPr/>
+        </p:nvSpPr>
+        <p:spPr>
+          <a:xfrm>
+            <a:off x="3429000" y="3168396"/>
+            <a:ext cx="582930" cy="240029"/>
+          </a:xfrm>
+          <a:prstGeom prst="rect">
+            <a:avLst/>
+          </a:prstGeom>
+          <a:noFill/>
+        </p:spPr>
+        <p:txBody>
+          <a:bodyPr wrap="square" lIns="27432" rIns="27432" tIns="13716" bIns="13716" anchor="ctr">
+            <a:spAutoFit/>
+          </a:bodyPr>
+          <a:lstStyle/>
+          <a:p>
+            <a:pPr algn="l"/>
+            <a:r>
+              <a:rPr sz="675" b="1" i="0">
+                <a:solidFill>
+                  <a:srgbClr val="3B82F6"/>
+                </a:solidFill>
+                <a:latin typeface="Consolas"/>
+              </a:rPr>
+              <a:t>Win</a:t>
+            </a:r>
+          </a:p>
+        </p:txBody>
+      </p:sp>
+      <p:sp>
+        <p:nvSpPr>
+          <p:cNvPr id="30" name="TextBox 29"/>
+          <p:cNvSpPr txBox="1"/>
+          <p:nvPr/>
+        </p:nvSpPr>
+        <p:spPr>
+          <a:xfrm>
+            <a:off x="4011929" y="3168396"/>
+            <a:ext cx="4903470" cy="240029"/>
+          </a:xfrm>
+          <a:prstGeom prst="rect">
+            <a:avLst/>
+          </a:prstGeom>
+          <a:noFill/>
+        </p:spPr>
+        <p:txBody>
+          <a:bodyPr wrap="square" lIns="27432" rIns="27432" tIns="13716" bIns="13716" anchor="ctr">
+            <a:spAutoFit/>
+          </a:bodyPr>
+          <a:lstStyle/>
+          <a:p>
+            <a:pPr algn="l"/>
+            <a:r>
+              <a:rPr sz="825" b="0" i="0">
+                <a:solidFill>
+                  <a:srgbClr val="374151"/>
+                </a:solidFill>
+                <a:latin typeface="Consolas"/>
+              </a:rPr>
+              <a:t>netstat -ano | findstr :3000  → taskkill /F /PID &lt;PID&gt;</a:t>
+            </a:r>
+          </a:p>
+        </p:txBody>
+      </p:sp>
+      <p:sp>
+        <p:nvSpPr>
+          <p:cNvPr id="31" name="Rounded Rectangle 30"/>
           <p:cNvSpPr/>
           <p:nvPr/>
         </p:nvSpPr>
         <p:spPr>
           <a:xfrm>
-            <a:off x="582930" y="3435858"/>
-            <a:ext cx="8298179" cy="493776"/>
+            <a:off x="582930" y="3463290"/>
+            <a:ext cx="8298179" cy="534924"/>
           </a:xfrm>
           <a:prstGeom prst="roundRect">
             <a:avLst>
@@ -13971,14 +14391,14 @@
       </p:sp>
       <p:sp>
         <p:nvSpPr>
-          <p:cNvPr id="20" name="TextBox 19"/>
-          <p:cNvSpPr txBox="1"/>
-          <p:nvPr/>
-        </p:nvSpPr>
-        <p:spPr>
-          <a:xfrm>
-            <a:off x="685800" y="3435858"/>
-            <a:ext cx="411479" cy="493776"/>
+          <p:cNvPr id="32" name="TextBox 31"/>
+          <p:cNvSpPr txBox="1"/>
+          <p:nvPr/>
+        </p:nvSpPr>
+        <p:spPr>
+          <a:xfrm>
+            <a:off x="685800" y="3463290"/>
+            <a:ext cx="411479" cy="534924"/>
           </a:xfrm>
           <a:prstGeom prst="rect">
             <a:avLst/>
@@ -14006,14 +14426,14 @@
       </p:sp>
       <p:sp>
         <p:nvSpPr>
-          <p:cNvPr id="21" name="TextBox 20"/>
-          <p:cNvSpPr txBox="1"/>
-          <p:nvPr/>
-        </p:nvSpPr>
-        <p:spPr>
-          <a:xfrm>
-            <a:off x="1165860" y="3435858"/>
-            <a:ext cx="2400300" cy="493776"/>
+          <p:cNvPr id="33" name="TextBox 32"/>
+          <p:cNvSpPr txBox="1"/>
+          <p:nvPr/>
+        </p:nvSpPr>
+        <p:spPr>
+          <a:xfrm>
+            <a:off x="1165860" y="3497580"/>
+            <a:ext cx="2263139" cy="274320"/>
           </a:xfrm>
           <a:prstGeom prst="rect">
             <a:avLst/>
@@ -14028,7 +14448,7 @@
           <a:p>
             <a:pPr algn="l"/>
             <a:r>
-              <a:rPr sz="1125" b="1" i="0">
+              <a:rPr sz="1050" b="1" i="0">
                 <a:solidFill>
                   <a:srgbClr val="1F2937"/>
                 </a:solidFill>
@@ -14041,14 +14461,14 @@
       </p:sp>
       <p:sp>
         <p:nvSpPr>
-          <p:cNvPr id="22" name="TextBox 21"/>
-          <p:cNvSpPr txBox="1"/>
-          <p:nvPr/>
-        </p:nvSpPr>
-        <p:spPr>
-          <a:xfrm>
-            <a:off x="3634739" y="3435858"/>
-            <a:ext cx="5280660" cy="493776"/>
+          <p:cNvPr id="34" name="TextBox 33"/>
+          <p:cNvSpPr txBox="1"/>
+          <p:nvPr/>
+        </p:nvSpPr>
+        <p:spPr>
+          <a:xfrm>
+            <a:off x="1165860" y="3737610"/>
+            <a:ext cx="685800" cy="240029"/>
           </a:xfrm>
           <a:prstGeom prst="rect">
             <a:avLst/>
@@ -14063,27 +14483,167 @@
           <a:p>
             <a:pPr algn="l"/>
             <a:r>
-              <a:rPr sz="900" b="0" i="0">
+              <a:rPr sz="675" b="1" i="0">
+                <a:solidFill>
+                  <a:srgbClr val="9CA3AF"/>
+                </a:solidFill>
+                <a:latin typeface="Consolas"/>
+              </a:rPr>
+              <a:t>Mac/Linux</a:t>
+            </a:r>
+          </a:p>
+        </p:txBody>
+      </p:sp>
+      <p:sp>
+        <p:nvSpPr>
+          <p:cNvPr id="35" name="TextBox 34"/>
+          <p:cNvSpPr txBox="1"/>
+          <p:nvPr/>
+        </p:nvSpPr>
+        <p:spPr>
+          <a:xfrm>
+            <a:off x="3429000" y="3497580"/>
+            <a:ext cx="5486400" cy="240029"/>
+          </a:xfrm>
+          <a:prstGeom prst="rect">
+            <a:avLst/>
+          </a:prstGeom>
+          <a:noFill/>
+        </p:spPr>
+        <p:txBody>
+          <a:bodyPr wrap="square" lIns="27432" rIns="27432" tIns="13716" bIns="13716" anchor="ctr">
+            <a:spAutoFit/>
+          </a:bodyPr>
+          <a:lstStyle/>
+          <a:p>
+            <a:pPr algn="l"/>
+            <a:r>
+              <a:rPr sz="825" b="0" i="0">
                 <a:solidFill>
                   <a:srgbClr val="374151"/>
                 </a:solidFill>
                 <a:latin typeface="Consolas"/>
               </a:rPr>
-              <a:t>cat /tmp/mini-npm.log → 多半是 --legacy-peer-deps</a:t>
-            </a:r>
-          </a:p>
-        </p:txBody>
-      </p:sp>
-      <p:sp>
-        <p:nvSpPr>
-          <p:cNvPr id="23" name="Rounded Rectangle 22"/>
+              <a:t>cat /tmp/mini-npm.log  → --legacy-peer-deps</a:t>
+            </a:r>
+          </a:p>
+        </p:txBody>
+      </p:sp>
+      <p:sp>
+        <p:nvSpPr>
+          <p:cNvPr id="36" name="TextBox 35"/>
+          <p:cNvSpPr txBox="1"/>
+          <p:nvPr/>
+        </p:nvSpPr>
+        <p:spPr>
+          <a:xfrm>
+            <a:off x="1165860" y="3737610"/>
+            <a:ext cx="685800" cy="240029"/>
+          </a:xfrm>
+          <a:prstGeom prst="rect">
+            <a:avLst/>
+          </a:prstGeom>
+          <a:noFill/>
+        </p:spPr>
+        <p:txBody>
+          <a:bodyPr wrap="square" lIns="27432" rIns="27432" tIns="13716" bIns="13716" anchor="ctr">
+            <a:spAutoFit/>
+          </a:bodyPr>
+          <a:lstStyle/>
+          <a:p>
+            <a:pPr algn="l"/>
+            <a:r>
+              <a:rPr sz="675" b="1" i="0">
+                <a:solidFill>
+                  <a:srgbClr val="9CA3AF"/>
+                </a:solidFill>
+                <a:latin typeface="Consolas"/>
+              </a:rPr>
+              <a:t/>
+            </a:r>
+          </a:p>
+        </p:txBody>
+      </p:sp>
+      <p:sp>
+        <p:nvSpPr>
+          <p:cNvPr id="37" name="TextBox 36"/>
+          <p:cNvSpPr txBox="1"/>
+          <p:nvPr/>
+        </p:nvSpPr>
+        <p:spPr>
+          <a:xfrm>
+            <a:off x="3429000" y="3751326"/>
+            <a:ext cx="582930" cy="240029"/>
+          </a:xfrm>
+          <a:prstGeom prst="rect">
+            <a:avLst/>
+          </a:prstGeom>
+          <a:noFill/>
+        </p:spPr>
+        <p:txBody>
+          <a:bodyPr wrap="square" lIns="27432" rIns="27432" tIns="13716" bIns="13716" anchor="ctr">
+            <a:spAutoFit/>
+          </a:bodyPr>
+          <a:lstStyle/>
+          <a:p>
+            <a:pPr algn="l"/>
+            <a:r>
+              <a:rPr sz="675" b="1" i="0">
+                <a:solidFill>
+                  <a:srgbClr val="3B82F6"/>
+                </a:solidFill>
+                <a:latin typeface="Consolas"/>
+              </a:rPr>
+              <a:t>Win</a:t>
+            </a:r>
+          </a:p>
+        </p:txBody>
+      </p:sp>
+      <p:sp>
+        <p:nvSpPr>
+          <p:cNvPr id="38" name="TextBox 37"/>
+          <p:cNvSpPr txBox="1"/>
+          <p:nvPr/>
+        </p:nvSpPr>
+        <p:spPr>
+          <a:xfrm>
+            <a:off x="4011929" y="3751326"/>
+            <a:ext cx="4903470" cy="240029"/>
+          </a:xfrm>
+          <a:prstGeom prst="rect">
+            <a:avLst/>
+          </a:prstGeom>
+          <a:noFill/>
+        </p:spPr>
+        <p:txBody>
+          <a:bodyPr wrap="square" lIns="27432" rIns="27432" tIns="13716" bIns="13716" anchor="ctr">
+            <a:spAutoFit/>
+          </a:bodyPr>
+          <a:lstStyle/>
+          <a:p>
+            <a:pPr algn="l"/>
+            <a:r>
+              <a:rPr sz="825" b="0" i="0">
+                <a:solidFill>
+                  <a:srgbClr val="374151"/>
+                </a:solidFill>
+                <a:latin typeface="Consolas"/>
+              </a:rPr>
+              <a:t>type %TEMP%\mini-npm.log  → --legacy-peer-deps</a:t>
+            </a:r>
+          </a:p>
+        </p:txBody>
+      </p:sp>
+      <p:sp>
+        <p:nvSpPr>
+          <p:cNvPr id="39" name="Rounded Rectangle 38"/>
           <p:cNvSpPr/>
           <p:nvPr/>
         </p:nvSpPr>
         <p:spPr>
           <a:xfrm>
-            <a:off x="582930" y="3998214"/>
-            <a:ext cx="8298179" cy="493776"/>
+            <a:off x="582930" y="4046220"/>
+            <a:ext cx="8298179" cy="534924"/>
           </a:xfrm>
           <a:prstGeom prst="roundRect">
             <a:avLst>
@@ -14124,14 +14684,14 @@
       </p:sp>
       <p:sp>
         <p:nvSpPr>
-          <p:cNvPr id="24" name="TextBox 23"/>
-          <p:cNvSpPr txBox="1"/>
-          <p:nvPr/>
-        </p:nvSpPr>
-        <p:spPr>
-          <a:xfrm>
-            <a:off x="685800" y="3998214"/>
-            <a:ext cx="411479" cy="493776"/>
+          <p:cNvPr id="40" name="TextBox 39"/>
+          <p:cNvSpPr txBox="1"/>
+          <p:nvPr/>
+        </p:nvSpPr>
+        <p:spPr>
+          <a:xfrm>
+            <a:off x="685800" y="4046220"/>
+            <a:ext cx="411479" cy="534924"/>
           </a:xfrm>
           <a:prstGeom prst="rect">
             <a:avLst/>
@@ -14159,14 +14719,14 @@
       </p:sp>
       <p:sp>
         <p:nvSpPr>
-          <p:cNvPr id="25" name="TextBox 24"/>
-          <p:cNvSpPr txBox="1"/>
-          <p:nvPr/>
-        </p:nvSpPr>
-        <p:spPr>
-          <a:xfrm>
-            <a:off x="1165860" y="3998214"/>
-            <a:ext cx="2400300" cy="493776"/>
+          <p:cNvPr id="41" name="TextBox 40"/>
+          <p:cNvSpPr txBox="1"/>
+          <p:nvPr/>
+        </p:nvSpPr>
+        <p:spPr>
+          <a:xfrm>
+            <a:off x="1165860" y="4080510"/>
+            <a:ext cx="2263139" cy="274320"/>
           </a:xfrm>
           <a:prstGeom prst="rect">
             <a:avLst/>
@@ -14181,7 +14741,7 @@
           <a:p>
             <a:pPr algn="l"/>
             <a:r>
-              <a:rPr sz="1125" b="1" i="0">
+              <a:rPr sz="1050" b="1" i="0">
                 <a:solidFill>
                   <a:srgbClr val="1F2937"/>
                 </a:solidFill>
@@ -14194,14 +14754,14 @@
       </p:sp>
       <p:sp>
         <p:nvSpPr>
-          <p:cNvPr id="26" name="TextBox 25"/>
-          <p:cNvSpPr txBox="1"/>
-          <p:nvPr/>
-        </p:nvSpPr>
-        <p:spPr>
-          <a:xfrm>
-            <a:off x="3634739" y="3998214"/>
-            <a:ext cx="5280660" cy="493776"/>
+          <p:cNvPr id="42" name="TextBox 41"/>
+          <p:cNvSpPr txBox="1"/>
+          <p:nvPr/>
+        </p:nvSpPr>
+        <p:spPr>
+          <a:xfrm>
+            <a:off x="1165860" y="4320540"/>
+            <a:ext cx="685800" cy="240029"/>
           </a:xfrm>
           <a:prstGeom prst="rect">
             <a:avLst/>
@@ -14216,20 +14776,160 @@
           <a:p>
             <a:pPr algn="l"/>
             <a:r>
-              <a:rPr sz="900" b="0" i="0">
+              <a:rPr sz="675" b="1" i="0">
+                <a:solidFill>
+                  <a:srgbClr val="9CA3AF"/>
+                </a:solidFill>
+                <a:latin typeface="Consolas"/>
+              </a:rPr>
+              <a:t>Mac/Linux</a:t>
+            </a:r>
+          </a:p>
+        </p:txBody>
+      </p:sp>
+      <p:sp>
+        <p:nvSpPr>
+          <p:cNvPr id="43" name="TextBox 42"/>
+          <p:cNvSpPr txBox="1"/>
+          <p:nvPr/>
+        </p:nvSpPr>
+        <p:spPr>
+          <a:xfrm>
+            <a:off x="3429000" y="4080510"/>
+            <a:ext cx="5486400" cy="240029"/>
+          </a:xfrm>
+          <a:prstGeom prst="rect">
+            <a:avLst/>
+          </a:prstGeom>
+          <a:noFill/>
+        </p:spPr>
+        <p:txBody>
+          <a:bodyPr wrap="square" lIns="27432" rIns="27432" tIns="13716" bIns="13716" anchor="ctr">
+            <a:spAutoFit/>
+          </a:bodyPr>
+          <a:lstStyle/>
+          <a:p>
+            <a:pPr algn="l"/>
+            <a:r>
+              <a:rPr sz="825" b="0" i="0">
                 <a:solidFill>
                   <a:srgbClr val="374151"/>
                 </a:solidFill>
                 <a:latin typeface="Consolas"/>
               </a:rPr>
-              <a:t>1) Ctrl+C 重啟 server   2) 把 docstring 寫更具體</a:t>
-            </a:r>
-          </a:p>
-        </p:txBody>
-      </p:sp>
-      <p:sp>
-        <p:nvSpPr>
-          <p:cNvPr id="27" name="Rounded Rectangle 26"/>
+              <a:t>Ctrl+C 重啟 server  →  把 docstring 寫更具體</a:t>
+            </a:r>
+          </a:p>
+        </p:txBody>
+      </p:sp>
+      <p:sp>
+        <p:nvSpPr>
+          <p:cNvPr id="44" name="TextBox 43"/>
+          <p:cNvSpPr txBox="1"/>
+          <p:nvPr/>
+        </p:nvSpPr>
+        <p:spPr>
+          <a:xfrm>
+            <a:off x="1165860" y="4320540"/>
+            <a:ext cx="685800" cy="240029"/>
+          </a:xfrm>
+          <a:prstGeom prst="rect">
+            <a:avLst/>
+          </a:prstGeom>
+          <a:noFill/>
+        </p:spPr>
+        <p:txBody>
+          <a:bodyPr wrap="square" lIns="27432" rIns="27432" tIns="13716" bIns="13716" anchor="ctr">
+            <a:spAutoFit/>
+          </a:bodyPr>
+          <a:lstStyle/>
+          <a:p>
+            <a:pPr algn="l"/>
+            <a:r>
+              <a:rPr sz="675" b="1" i="0">
+                <a:solidFill>
+                  <a:srgbClr val="9CA3AF"/>
+                </a:solidFill>
+                <a:latin typeface="Consolas"/>
+              </a:rPr>
+              <a:t/>
+            </a:r>
+          </a:p>
+        </p:txBody>
+      </p:sp>
+      <p:sp>
+        <p:nvSpPr>
+          <p:cNvPr id="45" name="TextBox 44"/>
+          <p:cNvSpPr txBox="1"/>
+          <p:nvPr/>
+        </p:nvSpPr>
+        <p:spPr>
+          <a:xfrm>
+            <a:off x="3429000" y="4334256"/>
+            <a:ext cx="582930" cy="240029"/>
+          </a:xfrm>
+          <a:prstGeom prst="rect">
+            <a:avLst/>
+          </a:prstGeom>
+          <a:noFill/>
+        </p:spPr>
+        <p:txBody>
+          <a:bodyPr wrap="square" lIns="27432" rIns="27432" tIns="13716" bIns="13716" anchor="ctr">
+            <a:spAutoFit/>
+          </a:bodyPr>
+          <a:lstStyle/>
+          <a:p>
+            <a:pPr algn="l"/>
+            <a:r>
+              <a:rPr sz="675" b="1" i="0">
+                <a:solidFill>
+                  <a:srgbClr val="3B82F6"/>
+                </a:solidFill>
+                <a:latin typeface="Consolas"/>
+              </a:rPr>
+              <a:t>Win</a:t>
+            </a:r>
+          </a:p>
+        </p:txBody>
+      </p:sp>
+      <p:sp>
+        <p:nvSpPr>
+          <p:cNvPr id="46" name="TextBox 45"/>
+          <p:cNvSpPr txBox="1"/>
+          <p:nvPr/>
+        </p:nvSpPr>
+        <p:spPr>
+          <a:xfrm>
+            <a:off x="4011929" y="4334256"/>
+            <a:ext cx="4903470" cy="240029"/>
+          </a:xfrm>
+          <a:prstGeom prst="rect">
+            <a:avLst/>
+          </a:prstGeom>
+          <a:noFill/>
+        </p:spPr>
+        <p:txBody>
+          <a:bodyPr wrap="square" lIns="27432" rIns="27432" tIns="13716" bIns="13716" anchor="ctr">
+            <a:spAutoFit/>
+          </a:bodyPr>
+          <a:lstStyle/>
+          <a:p>
+            <a:pPr algn="l"/>
+            <a:r>
+              <a:rPr sz="825" b="0" i="0">
+                <a:solidFill>
+                  <a:srgbClr val="374151"/>
+                </a:solidFill>
+                <a:latin typeface="Consolas"/>
+              </a:rPr>
+              <a:t>Ctrl+C 重啟 server  →  把 docstring 寫更具體</a:t>
+            </a:r>
+          </a:p>
+        </p:txBody>
+      </p:sp>
+      <p:sp>
+        <p:nvSpPr>
+          <p:cNvPr id="47" name="Rounded Rectangle 46"/>
           <p:cNvSpPr/>
           <p:nvPr/>
         </p:nvSpPr>
@@ -14244,11 +14944,11 @@
             </a:avLst>
           </a:prstGeom>
           <a:solidFill>
-            <a:srgbClr val="F1F5F9"/>
+            <a:srgbClr val="DBEAFE"/>
           </a:solidFill>
           <a:ln w="19050">
             <a:solidFill>
-              <a:srgbClr val="9CA3AF"/>
+              <a:srgbClr val="3B82F6"/>
             </a:solidFill>
           </a:ln>
           <a:effectLst/>
@@ -14277,7 +14977,7 @@
       </p:sp>
       <p:sp>
         <p:nvSpPr>
-          <p:cNvPr id="28" name="TextBox 27"/>
+          <p:cNvPr id="48" name="TextBox 47"/>
           <p:cNvSpPr txBox="1"/>
           <p:nvPr/>
         </p:nvSpPr>
@@ -14301,18 +15001,18 @@
             <a:r>
               <a:rPr sz="900" b="1" i="0">
                 <a:solidFill>
-                  <a:srgbClr val="9CA3AF"/>
+                  <a:srgbClr val="3B82F6"/>
                 </a:solidFill>
                 <a:latin typeface="Calibri"/>
               </a:rPr>
-              <a:t>i  完整故障排除見 04-live-demo-script.md(講師手冊)</a:t>
-            </a:r>
-          </a:p>
-        </p:txBody>
-      </p:sp>
-      <p:sp>
-        <p:nvSpPr>
-          <p:cNvPr id="29" name="TextBox 28"/>
+              <a:t>i  Windows 學員建議用 Git Bash:Mac/Linux 指令一律可跑(setup.sh 也直接用)</a:t>
+            </a:r>
+          </a:p>
+        </p:txBody>
+      </p:sp>
+      <p:sp>
+        <p:nvSpPr>
+          <p:cNvPr id="49" name="TextBox 48"/>
           <p:cNvSpPr txBox="1"/>
           <p:nvPr/>
         </p:nvSpPr>
@@ -15189,7 +15889,7 @@
                 </a:solidFill>
                 <a:latin typeface="Calibri"/>
               </a:rPr>
-              <a:t>  💎  N+M 的甜蜜:你的工具一支不變,adapter 差別只在 mcp-client.js 幾行</a:t>
+              <a:t>  ★  N+M 的甜蜜:你的工具一支不變,adapter 差別只在 mcp-client.js 幾行</a:t>
             </a:r>
           </a:p>
         </p:txBody>

--- a/04-hands-on-lab.pptx
+++ b/04-hands-on-lab.pptx
@@ -3287,7 +3287,7 @@
                 </a:solidFill>
                 <a:latin typeface="Calibri"/>
               </a:rPr>
-              <a:t>Hands-on Lab  ·  50 minutes</a:t>
+              <a:t>Hands-on Lab  ·  45 minutes</a:t>
             </a:r>
           </a:p>
         </p:txBody>
@@ -7671,7 +7671,7 @@
                 </a:solidFill>
                 <a:latin typeface="Calibri"/>
               </a:rPr>
-              <a:t>50 分鐘後,你將親手擁有</a:t>
+              <a:t>45 分鐘後,你將親手擁有</a:t>
             </a:r>
           </a:p>
         </p:txBody>
@@ -8557,7 +8557,7 @@
                 </a:solidFill>
                 <a:latin typeface="Arial Black"/>
               </a:rPr>
-              <a:t>50 分鐘時間配置</a:t>
+              <a:t>45 分鐘時間配置</a:t>
             </a:r>
           </a:p>
         </p:txBody>
@@ -8592,7 +8592,7 @@
                 </a:solidFill>
                 <a:latin typeface="Calibri"/>
               </a:rPr>
-              <a:t>講師 10 min 引導 + 40 min 巡場陪跑</a:t>
+              <a:t>講師 8 min 引導 + 37 min 巡場陪跑</a:t>
             </a:r>
           </a:p>
         </p:txBody>
@@ -8864,7 +8864,7 @@
                 </a:solidFill>
                 <a:latin typeface="Consolas"/>
               </a:rPr>
-              <a:t>0–10</a:t>
+              <a:t>0–8</a:t>
             </a:r>
           </a:p>
         </p:txBody>
@@ -9013,7 +9013,7 @@
                 </a:solidFill>
                 <a:latin typeface="Consolas"/>
               </a:rPr>
-              <a:t>10–20</a:t>
+              <a:t>8–18</a:t>
             </a:r>
           </a:p>
         </p:txBody>
@@ -9118,7 +9118,7 @@
                 </a:solidFill>
                 <a:latin typeface="Consolas"/>
               </a:rPr>
-              <a:t>20–35</a:t>
+              <a:t>18–32</a:t>
             </a:r>
           </a:p>
         </p:txBody>
@@ -9267,7 +9267,7 @@
                 </a:solidFill>
                 <a:latin typeface="Consolas"/>
               </a:rPr>
-              <a:t>35–45</a:t>
+              <a:t>32–40</a:t>
             </a:r>
           </a:p>
         </p:txBody>
@@ -9372,7 +9372,7 @@
                 </a:solidFill>
                 <a:latin typeface="Consolas"/>
               </a:rPr>
-              <a:t>45–50</a:t>
+              <a:t>40–45</a:t>
             </a:r>
           </a:p>
         </p:txBody>
